--- a/07.pptx
+++ b/07.pptx
@@ -6,7 +6,7 @@
     <p:sldMasterId id="2147483673" r:id="rId2"/>
   </p:sldMasterIdLst>
   <p:notesMasterIdLst>
-    <p:notesMasterId r:id="rId10"/>
+    <p:notesMasterId r:id="rId14"/>
   </p:notesMasterIdLst>
   <p:sldIdLst>
     <p:sldId id="259" r:id="rId3"/>
@@ -16,6 +16,10 @@
     <p:sldId id="262" r:id="rId7"/>
     <p:sldId id="258" r:id="rId8"/>
     <p:sldId id="257" r:id="rId9"/>
+    <p:sldId id="263" r:id="rId10"/>
+    <p:sldId id="264" r:id="rId11"/>
+    <p:sldId id="265" r:id="rId12"/>
+    <p:sldId id="266" r:id="rId13"/>
   </p:sldIdLst>
   <p:sldSz cx="12192000" cy="6858000"/>
   <p:notesSz cx="6858000" cy="9144000"/>
@@ -204,7 +208,7 @@
           <a:p>
             <a:fld id="{1B711F3E-B30C-42F4-A182-916C2273D750}" type="datetimeFigureOut">
               <a:rPr lang="zh-CN" altLang="en-US" smtClean="0"/>
-              <a:t>2026/7/10</a:t>
+              <a:t>2026/7/16</a:t>
             </a:fld>
             <a:endParaRPr lang="zh-CN" altLang="en-US"/>
           </a:p>
@@ -6677,6 +6681,1389 @@
 </p:sld>
 </file>
 
+<file path=ppt/slides/slide10.xml><?xml version="1.0" encoding="utf-8"?>
+<p:sld xmlns:a="http://schemas.openxmlformats.org/drawingml/2006/main" xmlns:r="http://schemas.openxmlformats.org/officeDocument/2006/relationships" xmlns:p="http://schemas.openxmlformats.org/presentationml/2006/main">
+  <p:cSld>
+    <p:spTree>
+      <p:nvGrpSpPr>
+        <p:cNvPr id="1" name=""/>
+        <p:cNvGrpSpPr/>
+        <p:nvPr/>
+      </p:nvGrpSpPr>
+      <p:grpSpPr>
+        <a:xfrm>
+          <a:off x="0" y="0"/>
+          <a:ext cx="0" cy="0"/>
+          <a:chOff x="0" y="0"/>
+          <a:chExt cx="0" cy="0"/>
+        </a:xfrm>
+      </p:grpSpPr>
+      <p:sp>
+        <p:nvSpPr>
+          <p:cNvPr id="2" name="灯片编号占位符 1">
+            <a:extLst>
+              <a:ext uri="{FF2B5EF4-FFF2-40B4-BE49-F238E27FC236}">
+                <a16:creationId xmlns:a16="http://schemas.microsoft.com/office/drawing/2014/main" id="{BA514041-2128-2B40-A233-593ED1026E97}"/>
+              </a:ext>
+            </a:extLst>
+          </p:cNvPr>
+          <p:cNvSpPr>
+            <a:spLocks noGrp="1"/>
+          </p:cNvSpPr>
+          <p:nvPr>
+            <p:ph type="sldNum" sz="quarter" idx="12"/>
+          </p:nvPr>
+        </p:nvSpPr>
+        <p:spPr/>
+        <p:txBody>
+          <a:bodyPr/>
+          <a:lstStyle/>
+          <a:p>
+            <a:fld id="{EB466BE2-40FE-4A59-82BB-128E7E394AEC}" type="slidenum">
+              <a:rPr lang="zh-CN" altLang="en-US" smtClean="0"/>
+              <a:t>10</a:t>
+            </a:fld>
+            <a:endParaRPr lang="zh-CN" altLang="en-US"/>
+          </a:p>
+        </p:txBody>
+      </p:sp>
+      <p:sp>
+        <p:nvSpPr>
+          <p:cNvPr id="4" name="内容占位符 3">
+            <a:extLst>
+              <a:ext uri="{FF2B5EF4-FFF2-40B4-BE49-F238E27FC236}">
+                <a16:creationId xmlns:a16="http://schemas.microsoft.com/office/drawing/2014/main" id="{DB315D10-A78E-7128-07D0-1843B4063C69}"/>
+              </a:ext>
+            </a:extLst>
+          </p:cNvPr>
+          <p:cNvSpPr>
+            <a:spLocks noGrp="1"/>
+          </p:cNvSpPr>
+          <p:nvPr>
+            <p:ph sz="quarter" idx="13"/>
+          </p:nvPr>
+        </p:nvSpPr>
+        <p:spPr/>
+        <p:txBody>
+          <a:bodyPr/>
+          <a:lstStyle/>
+          <a:p>
+            <a:r>
+              <a:rPr lang="en-US" altLang="zh-CN" dirty="0"/>
+              <a:t>Global RX/RY</a:t>
+            </a:r>
+          </a:p>
+          <a:p>
+            <a:r>
+              <a:rPr lang="en-US" altLang="zh-CN" dirty="0"/>
+              <a:t>Zone CZ/RZ</a:t>
+            </a:r>
+          </a:p>
+          <a:p>
+            <a:pPr lvl="1"/>
+            <a:r>
+              <a:rPr lang="zh-CN" altLang="en-US" dirty="0"/>
+              <a:t>执行</a:t>
+            </a:r>
+            <a:r>
+              <a:rPr lang="en-US" altLang="zh-CN" dirty="0" err="1"/>
+              <a:t>cz</a:t>
+            </a:r>
+            <a:r>
+              <a:rPr lang="zh-CN" altLang="en-US" dirty="0"/>
+              <a:t>门会累计一个额外相位</a:t>
+            </a:r>
+            <a:endParaRPr lang="en-US" altLang="zh-CN" dirty="0"/>
+          </a:p>
+          <a:p>
+            <a:r>
+              <a:rPr lang="zh-CN" altLang="en-US" dirty="0"/>
+              <a:t>寻址 </a:t>
+            </a:r>
+            <a:r>
+              <a:rPr lang="en-US" altLang="zh-CN" dirty="0"/>
+              <a:t>RZ</a:t>
+            </a:r>
+          </a:p>
+          <a:p>
+            <a:pPr lvl="1"/>
+            <a:r>
+              <a:rPr lang="zh-CN" altLang="en-US" dirty="0"/>
+              <a:t>如何实现？有何限制？</a:t>
+            </a:r>
+            <a:endParaRPr lang="en-US" altLang="zh-CN" dirty="0"/>
+          </a:p>
+          <a:p>
+            <a:r>
+              <a:rPr lang="zh-CN" altLang="en-US" dirty="0"/>
+              <a:t>测量</a:t>
+            </a:r>
+            <a:endParaRPr lang="en-US" altLang="zh-CN" dirty="0"/>
+          </a:p>
+          <a:p>
+            <a:pPr lvl="1"/>
+            <a:r>
+              <a:rPr lang="zh-CN" altLang="en-US" dirty="0"/>
+              <a:t>破坏性测量</a:t>
+            </a:r>
+            <a:endParaRPr lang="en-US" altLang="zh-CN" dirty="0"/>
+          </a:p>
+          <a:p>
+            <a:r>
+              <a:rPr lang="zh-CN" altLang="en-US" dirty="0"/>
+              <a:t>是否需要暴露更底层的操作？</a:t>
+            </a:r>
+            <a:endParaRPr lang="en-US" altLang="zh-CN" dirty="0"/>
+          </a:p>
+          <a:p>
+            <a:pPr lvl="1"/>
+            <a:r>
+              <a:rPr lang="zh-CN" altLang="en-US" dirty="0"/>
+              <a:t>取决于是否有优化空间</a:t>
+            </a:r>
+            <a:endParaRPr lang="en-US" altLang="zh-CN" dirty="0"/>
+          </a:p>
+          <a:p>
+            <a:endParaRPr lang="zh-CN" altLang="en-US" dirty="0"/>
+          </a:p>
+        </p:txBody>
+      </p:sp>
+      <p:sp>
+        <p:nvSpPr>
+          <p:cNvPr id="3" name="标题 2">
+            <a:extLst>
+              <a:ext uri="{FF2B5EF4-FFF2-40B4-BE49-F238E27FC236}">
+                <a16:creationId xmlns:a16="http://schemas.microsoft.com/office/drawing/2014/main" id="{977A3081-DC81-C293-ED78-E30F3E6C6892}"/>
+              </a:ext>
+            </a:extLst>
+          </p:cNvPr>
+          <p:cNvSpPr>
+            <a:spLocks noGrp="1"/>
+          </p:cNvSpPr>
+          <p:nvPr>
+            <p:ph type="title"/>
+          </p:nvPr>
+        </p:nvSpPr>
+        <p:spPr/>
+        <p:txBody>
+          <a:bodyPr/>
+          <a:lstStyle/>
+          <a:p>
+            <a:r>
+              <a:rPr lang="zh-CN" altLang="en-US" dirty="0"/>
+              <a:t>门集</a:t>
+            </a:r>
+          </a:p>
+        </p:txBody>
+      </p:sp>
+    </p:spTree>
+    <p:extLst>
+      <p:ext uri="{BB962C8B-B14F-4D97-AF65-F5344CB8AC3E}">
+        <p14:creationId xmlns:p14="http://schemas.microsoft.com/office/powerpoint/2010/main" val="1374987608"/>
+      </p:ext>
+    </p:extLst>
+  </p:cSld>
+  <p:clrMapOvr>
+    <a:masterClrMapping/>
+  </p:clrMapOvr>
+</p:sld>
+</file>
+
+<file path=ppt/slides/slide11.xml><?xml version="1.0" encoding="utf-8"?>
+<p:sld xmlns:a="http://schemas.openxmlformats.org/drawingml/2006/main" xmlns:r="http://schemas.openxmlformats.org/officeDocument/2006/relationships" xmlns:p="http://schemas.openxmlformats.org/presentationml/2006/main">
+  <p:cSld>
+    <p:spTree>
+      <p:nvGrpSpPr>
+        <p:cNvPr id="1" name=""/>
+        <p:cNvGrpSpPr/>
+        <p:nvPr/>
+      </p:nvGrpSpPr>
+      <p:grpSpPr>
+        <a:xfrm>
+          <a:off x="0" y="0"/>
+          <a:ext cx="0" cy="0"/>
+          <a:chOff x="0" y="0"/>
+          <a:chExt cx="0" cy="0"/>
+        </a:xfrm>
+      </p:grpSpPr>
+      <p:sp>
+        <p:nvSpPr>
+          <p:cNvPr id="2" name="灯片编号占位符 1">
+            <a:extLst>
+              <a:ext uri="{FF2B5EF4-FFF2-40B4-BE49-F238E27FC236}">
+                <a16:creationId xmlns:a16="http://schemas.microsoft.com/office/drawing/2014/main" id="{8E3669B3-B5EB-56DE-14EE-13F2BD3F13D0}"/>
+              </a:ext>
+            </a:extLst>
+          </p:cNvPr>
+          <p:cNvSpPr>
+            <a:spLocks noGrp="1"/>
+          </p:cNvSpPr>
+          <p:nvPr>
+            <p:ph type="sldNum" sz="quarter" idx="12"/>
+          </p:nvPr>
+        </p:nvSpPr>
+        <p:spPr/>
+        <p:txBody>
+          <a:bodyPr/>
+          <a:lstStyle/>
+          <a:p>
+            <a:fld id="{EB466BE2-40FE-4A59-82BB-128E7E394AEC}" type="slidenum">
+              <a:rPr lang="zh-CN" altLang="en-US" smtClean="0"/>
+              <a:t>11</a:t>
+            </a:fld>
+            <a:endParaRPr lang="zh-CN" altLang="en-US"/>
+          </a:p>
+        </p:txBody>
+      </p:sp>
+      <p:sp>
+        <p:nvSpPr>
+          <p:cNvPr id="3" name="内容占位符 2">
+            <a:extLst>
+              <a:ext uri="{FF2B5EF4-FFF2-40B4-BE49-F238E27FC236}">
+                <a16:creationId xmlns:a16="http://schemas.microsoft.com/office/drawing/2014/main" id="{65FFCA58-0D28-15DB-552C-42302C9FFFA9}"/>
+              </a:ext>
+            </a:extLst>
+          </p:cNvPr>
+          <p:cNvSpPr>
+            <a:spLocks noGrp="1"/>
+          </p:cNvSpPr>
+          <p:nvPr>
+            <p:ph sz="quarter" idx="13"/>
+          </p:nvPr>
+        </p:nvSpPr>
+        <p:spPr>
+          <a:xfrm>
+            <a:off x="190005" y="902525"/>
+            <a:ext cx="6961566" cy="2862179"/>
+          </a:xfrm>
+        </p:spPr>
+        <p:txBody>
+          <a:bodyPr/>
+          <a:lstStyle/>
+          <a:p>
+            <a:r>
+              <a:rPr lang="zh-CN" altLang="en-US" dirty="0"/>
+              <a:t>抓取一个完整阵列，同方向同距离移动</a:t>
+            </a:r>
+            <a:endParaRPr lang="en-US" altLang="zh-CN" dirty="0"/>
+          </a:p>
+          <a:p>
+            <a:r>
+              <a:rPr lang="zh-CN" altLang="en-US" dirty="0"/>
+              <a:t>其他移动模式</a:t>
+            </a:r>
+            <a:endParaRPr lang="en-US" altLang="zh-CN" dirty="0"/>
+          </a:p>
+          <a:p>
+            <a:pPr lvl="1"/>
+            <a:r>
+              <a:rPr lang="zh-CN" altLang="en-US" dirty="0"/>
+              <a:t>尽可能用到较少的移动模式？</a:t>
+            </a:r>
+            <a:endParaRPr lang="en-US" altLang="zh-CN" dirty="0"/>
+          </a:p>
+          <a:p>
+            <a:pPr lvl="2"/>
+            <a:r>
+              <a:rPr lang="zh-CN" altLang="en-US" dirty="0"/>
+              <a:t>一种移动模式如何定义？</a:t>
+            </a:r>
+            <a:endParaRPr lang="en-US" altLang="zh-CN" dirty="0"/>
+          </a:p>
+          <a:p>
+            <a:r>
+              <a:rPr lang="zh-CN" altLang="en-US" dirty="0"/>
+              <a:t>是否允许多个</a:t>
+            </a:r>
+            <a:r>
+              <a:rPr lang="en-US" altLang="zh-CN" dirty="0"/>
+              <a:t>AOD</a:t>
+            </a:r>
+            <a:r>
+              <a:rPr lang="zh-CN" altLang="en-US"/>
+              <a:t>并行</a:t>
+            </a:r>
+            <a:endParaRPr lang="zh-CN" altLang="en-US" dirty="0"/>
+          </a:p>
+        </p:txBody>
+      </p:sp>
+      <p:sp>
+        <p:nvSpPr>
+          <p:cNvPr id="4" name="标题 3">
+            <a:extLst>
+              <a:ext uri="{FF2B5EF4-FFF2-40B4-BE49-F238E27FC236}">
+                <a16:creationId xmlns:a16="http://schemas.microsoft.com/office/drawing/2014/main" id="{CA9BE34D-B16E-4168-8CC1-C86C7EE3F11B}"/>
+              </a:ext>
+            </a:extLst>
+          </p:cNvPr>
+          <p:cNvSpPr>
+            <a:spLocks noGrp="1"/>
+          </p:cNvSpPr>
+          <p:nvPr>
+            <p:ph type="title"/>
+          </p:nvPr>
+        </p:nvSpPr>
+        <p:spPr/>
+        <p:txBody>
+          <a:bodyPr/>
+          <a:lstStyle/>
+          <a:p>
+            <a:r>
+              <a:rPr lang="en-US" altLang="zh-CN" dirty="0"/>
+              <a:t>AOD</a:t>
+            </a:r>
+            <a:r>
+              <a:rPr lang="zh-CN" altLang="en-US" dirty="0"/>
+              <a:t>移动模式</a:t>
+            </a:r>
+          </a:p>
+        </p:txBody>
+      </p:sp>
+      <p:sp>
+        <p:nvSpPr>
+          <p:cNvPr id="6" name="椭圆 5">
+            <a:extLst>
+              <a:ext uri="{FF2B5EF4-FFF2-40B4-BE49-F238E27FC236}">
+                <a16:creationId xmlns:a16="http://schemas.microsoft.com/office/drawing/2014/main" id="{7A4F5BB9-4916-F3E8-4607-8421C9A438F5}"/>
+              </a:ext>
+            </a:extLst>
+          </p:cNvPr>
+          <p:cNvSpPr>
+            <a:spLocks noChangeAspect="1"/>
+          </p:cNvSpPr>
+          <p:nvPr/>
+        </p:nvSpPr>
+        <p:spPr>
+          <a:xfrm>
+            <a:off x="7652084" y="1659979"/>
+            <a:ext cx="144000" cy="144000"/>
+          </a:xfrm>
+          <a:prstGeom prst="ellipse">
+            <a:avLst/>
+          </a:prstGeom>
+          <a:ln>
+            <a:solidFill>
+              <a:schemeClr val="tx1"/>
+            </a:solidFill>
+          </a:ln>
+        </p:spPr>
+        <p:txBody>
+          <a:bodyPr wrap="square" rtlCol="0" anchor="ctr">
+            <a:noAutofit/>
+          </a:bodyPr>
+          <a:lstStyle/>
+          <a:p>
+            <a:pPr algn="ctr"/>
+            <a:endParaRPr lang="zh-CN" altLang="en-US" dirty="0">
+              <a:latin typeface="微软雅黑" pitchFamily="34" charset="-122"/>
+              <a:ea typeface="微软雅黑" pitchFamily="34" charset="-122"/>
+            </a:endParaRPr>
+          </a:p>
+        </p:txBody>
+      </p:sp>
+      <p:sp>
+        <p:nvSpPr>
+          <p:cNvPr id="8" name="椭圆 7">
+            <a:extLst>
+              <a:ext uri="{FF2B5EF4-FFF2-40B4-BE49-F238E27FC236}">
+                <a16:creationId xmlns:a16="http://schemas.microsoft.com/office/drawing/2014/main" id="{9FF47FB9-D9B4-47F5-D5E3-AE25AC24E3B8}"/>
+              </a:ext>
+            </a:extLst>
+          </p:cNvPr>
+          <p:cNvSpPr>
+            <a:spLocks noChangeAspect="1"/>
+          </p:cNvSpPr>
+          <p:nvPr/>
+        </p:nvSpPr>
+        <p:spPr>
+          <a:xfrm>
+            <a:off x="8317029" y="1659979"/>
+            <a:ext cx="144000" cy="144000"/>
+          </a:xfrm>
+          <a:prstGeom prst="ellipse">
+            <a:avLst/>
+          </a:prstGeom>
+          <a:ln>
+            <a:solidFill>
+              <a:schemeClr val="tx1"/>
+            </a:solidFill>
+          </a:ln>
+        </p:spPr>
+        <p:txBody>
+          <a:bodyPr wrap="square" rtlCol="0" anchor="ctr">
+            <a:noAutofit/>
+          </a:bodyPr>
+          <a:lstStyle/>
+          <a:p>
+            <a:pPr algn="ctr"/>
+            <a:endParaRPr lang="zh-CN" altLang="en-US" dirty="0">
+              <a:latin typeface="微软雅黑" pitchFamily="34" charset="-122"/>
+              <a:ea typeface="微软雅黑" pitchFamily="34" charset="-122"/>
+            </a:endParaRPr>
+          </a:p>
+        </p:txBody>
+      </p:sp>
+      <p:sp>
+        <p:nvSpPr>
+          <p:cNvPr id="10" name="椭圆 9">
+            <a:extLst>
+              <a:ext uri="{FF2B5EF4-FFF2-40B4-BE49-F238E27FC236}">
+                <a16:creationId xmlns:a16="http://schemas.microsoft.com/office/drawing/2014/main" id="{C1525089-D0E1-FC6A-007C-DCEC213CA974}"/>
+              </a:ext>
+            </a:extLst>
+          </p:cNvPr>
+          <p:cNvSpPr>
+            <a:spLocks noChangeAspect="1"/>
+          </p:cNvSpPr>
+          <p:nvPr/>
+        </p:nvSpPr>
+        <p:spPr>
+          <a:xfrm>
+            <a:off x="7652084" y="2043385"/>
+            <a:ext cx="144000" cy="144000"/>
+          </a:xfrm>
+          <a:prstGeom prst="ellipse">
+            <a:avLst/>
+          </a:prstGeom>
+          <a:ln>
+            <a:solidFill>
+              <a:schemeClr val="tx1"/>
+            </a:solidFill>
+          </a:ln>
+        </p:spPr>
+        <p:txBody>
+          <a:bodyPr wrap="square" rtlCol="0" anchor="ctr">
+            <a:noAutofit/>
+          </a:bodyPr>
+          <a:lstStyle/>
+          <a:p>
+            <a:pPr algn="ctr"/>
+            <a:endParaRPr lang="zh-CN" altLang="en-US" dirty="0">
+              <a:latin typeface="微软雅黑" pitchFamily="34" charset="-122"/>
+              <a:ea typeface="微软雅黑" pitchFamily="34" charset="-122"/>
+            </a:endParaRPr>
+          </a:p>
+        </p:txBody>
+      </p:sp>
+      <p:sp>
+        <p:nvSpPr>
+          <p:cNvPr id="12" name="椭圆 11">
+            <a:extLst>
+              <a:ext uri="{FF2B5EF4-FFF2-40B4-BE49-F238E27FC236}">
+                <a16:creationId xmlns:a16="http://schemas.microsoft.com/office/drawing/2014/main" id="{7CD4BEA6-E9E2-A2D7-F91E-231A4FA0C939}"/>
+              </a:ext>
+            </a:extLst>
+          </p:cNvPr>
+          <p:cNvSpPr>
+            <a:spLocks noChangeAspect="1"/>
+          </p:cNvSpPr>
+          <p:nvPr/>
+        </p:nvSpPr>
+        <p:spPr>
+          <a:xfrm>
+            <a:off x="8317029" y="2043385"/>
+            <a:ext cx="144000" cy="144000"/>
+          </a:xfrm>
+          <a:prstGeom prst="ellipse">
+            <a:avLst/>
+          </a:prstGeom>
+          <a:ln>
+            <a:solidFill>
+              <a:schemeClr val="tx1"/>
+            </a:solidFill>
+          </a:ln>
+        </p:spPr>
+        <p:txBody>
+          <a:bodyPr wrap="square" rtlCol="0" anchor="ctr">
+            <a:noAutofit/>
+          </a:bodyPr>
+          <a:lstStyle/>
+          <a:p>
+            <a:pPr algn="ctr"/>
+            <a:endParaRPr lang="zh-CN" altLang="en-US" dirty="0">
+              <a:latin typeface="微软雅黑" pitchFamily="34" charset="-122"/>
+              <a:ea typeface="微软雅黑" pitchFamily="34" charset="-122"/>
+            </a:endParaRPr>
+          </a:p>
+        </p:txBody>
+      </p:sp>
+      <p:sp>
+        <p:nvSpPr>
+          <p:cNvPr id="14" name="椭圆 13">
+            <a:extLst>
+              <a:ext uri="{FF2B5EF4-FFF2-40B4-BE49-F238E27FC236}">
+                <a16:creationId xmlns:a16="http://schemas.microsoft.com/office/drawing/2014/main" id="{3DE3B675-D490-5DC4-57A4-02D7E14E65CA}"/>
+              </a:ext>
+            </a:extLst>
+          </p:cNvPr>
+          <p:cNvSpPr>
+            <a:spLocks noChangeAspect="1"/>
+          </p:cNvSpPr>
+          <p:nvPr/>
+        </p:nvSpPr>
+        <p:spPr>
+          <a:xfrm>
+            <a:off x="7652084" y="2620901"/>
+            <a:ext cx="144000" cy="144000"/>
+          </a:xfrm>
+          <a:prstGeom prst="ellipse">
+            <a:avLst/>
+          </a:prstGeom>
+          <a:ln>
+            <a:solidFill>
+              <a:schemeClr val="tx1"/>
+            </a:solidFill>
+          </a:ln>
+        </p:spPr>
+        <p:txBody>
+          <a:bodyPr wrap="square" rtlCol="0" anchor="ctr">
+            <a:noAutofit/>
+          </a:bodyPr>
+          <a:lstStyle/>
+          <a:p>
+            <a:pPr algn="ctr"/>
+            <a:endParaRPr lang="zh-CN" altLang="en-US" dirty="0">
+              <a:latin typeface="微软雅黑" pitchFamily="34" charset="-122"/>
+              <a:ea typeface="微软雅黑" pitchFamily="34" charset="-122"/>
+            </a:endParaRPr>
+          </a:p>
+        </p:txBody>
+      </p:sp>
+      <p:sp>
+        <p:nvSpPr>
+          <p:cNvPr id="16" name="椭圆 15">
+            <a:extLst>
+              <a:ext uri="{FF2B5EF4-FFF2-40B4-BE49-F238E27FC236}">
+                <a16:creationId xmlns:a16="http://schemas.microsoft.com/office/drawing/2014/main" id="{403E4E1B-567D-7567-59F2-BFCCFF5AF432}"/>
+              </a:ext>
+            </a:extLst>
+          </p:cNvPr>
+          <p:cNvSpPr>
+            <a:spLocks noChangeAspect="1"/>
+          </p:cNvSpPr>
+          <p:nvPr/>
+        </p:nvSpPr>
+        <p:spPr>
+          <a:xfrm>
+            <a:off x="8317029" y="2620901"/>
+            <a:ext cx="144000" cy="144000"/>
+          </a:xfrm>
+          <a:prstGeom prst="ellipse">
+            <a:avLst/>
+          </a:prstGeom>
+          <a:ln>
+            <a:solidFill>
+              <a:schemeClr val="tx1"/>
+            </a:solidFill>
+          </a:ln>
+        </p:spPr>
+        <p:txBody>
+          <a:bodyPr wrap="square" rtlCol="0" anchor="ctr">
+            <a:noAutofit/>
+          </a:bodyPr>
+          <a:lstStyle/>
+          <a:p>
+            <a:pPr algn="ctr"/>
+            <a:endParaRPr lang="zh-CN" altLang="en-US" dirty="0">
+              <a:latin typeface="微软雅黑" pitchFamily="34" charset="-122"/>
+              <a:ea typeface="微软雅黑" pitchFamily="34" charset="-122"/>
+            </a:endParaRPr>
+          </a:p>
+        </p:txBody>
+      </p:sp>
+      <p:sp>
+        <p:nvSpPr>
+          <p:cNvPr id="18" name="椭圆 17">
+            <a:extLst>
+              <a:ext uri="{FF2B5EF4-FFF2-40B4-BE49-F238E27FC236}">
+                <a16:creationId xmlns:a16="http://schemas.microsoft.com/office/drawing/2014/main" id="{73DEA327-3DC3-BB9A-99F2-19C50D7A0FDF}"/>
+              </a:ext>
+            </a:extLst>
+          </p:cNvPr>
+          <p:cNvSpPr>
+            <a:spLocks noChangeAspect="1"/>
+          </p:cNvSpPr>
+          <p:nvPr/>
+        </p:nvSpPr>
+        <p:spPr>
+          <a:xfrm>
+            <a:off x="7652084" y="3004307"/>
+            <a:ext cx="144000" cy="144000"/>
+          </a:xfrm>
+          <a:prstGeom prst="ellipse">
+            <a:avLst/>
+          </a:prstGeom>
+          <a:ln>
+            <a:solidFill>
+              <a:schemeClr val="tx1"/>
+            </a:solidFill>
+          </a:ln>
+        </p:spPr>
+        <p:txBody>
+          <a:bodyPr wrap="square" rtlCol="0" anchor="ctr">
+            <a:noAutofit/>
+          </a:bodyPr>
+          <a:lstStyle/>
+          <a:p>
+            <a:pPr algn="ctr"/>
+            <a:endParaRPr lang="zh-CN" altLang="en-US" dirty="0">
+              <a:latin typeface="微软雅黑" pitchFamily="34" charset="-122"/>
+              <a:ea typeface="微软雅黑" pitchFamily="34" charset="-122"/>
+            </a:endParaRPr>
+          </a:p>
+        </p:txBody>
+      </p:sp>
+      <p:sp>
+        <p:nvSpPr>
+          <p:cNvPr id="20" name="椭圆 19">
+            <a:extLst>
+              <a:ext uri="{FF2B5EF4-FFF2-40B4-BE49-F238E27FC236}">
+                <a16:creationId xmlns:a16="http://schemas.microsoft.com/office/drawing/2014/main" id="{21E71F80-0F17-1265-30C6-3CD7B3C37486}"/>
+              </a:ext>
+            </a:extLst>
+          </p:cNvPr>
+          <p:cNvSpPr>
+            <a:spLocks noChangeAspect="1"/>
+          </p:cNvSpPr>
+          <p:nvPr/>
+        </p:nvSpPr>
+        <p:spPr>
+          <a:xfrm>
+            <a:off x="8317029" y="3004307"/>
+            <a:ext cx="144000" cy="144000"/>
+          </a:xfrm>
+          <a:prstGeom prst="ellipse">
+            <a:avLst/>
+          </a:prstGeom>
+          <a:ln>
+            <a:solidFill>
+              <a:schemeClr val="tx1"/>
+            </a:solidFill>
+          </a:ln>
+        </p:spPr>
+        <p:txBody>
+          <a:bodyPr wrap="square" rtlCol="0" anchor="ctr">
+            <a:noAutofit/>
+          </a:bodyPr>
+          <a:lstStyle/>
+          <a:p>
+            <a:pPr algn="ctr"/>
+            <a:endParaRPr lang="zh-CN" altLang="en-US" dirty="0">
+              <a:latin typeface="微软雅黑" pitchFamily="34" charset="-122"/>
+              <a:ea typeface="微软雅黑" pitchFamily="34" charset="-122"/>
+            </a:endParaRPr>
+          </a:p>
+        </p:txBody>
+      </p:sp>
+      <p:cxnSp>
+        <p:nvCxnSpPr>
+          <p:cNvPr id="38" name="直接箭头连接符 37">
+            <a:extLst>
+              <a:ext uri="{FF2B5EF4-FFF2-40B4-BE49-F238E27FC236}">
+                <a16:creationId xmlns:a16="http://schemas.microsoft.com/office/drawing/2014/main" id="{C476957F-CC1C-8C0E-D0D5-415081962906}"/>
+              </a:ext>
+            </a:extLst>
+          </p:cNvPr>
+          <p:cNvCxnSpPr>
+            <a:stCxn id="6" idx="3"/>
+            <a:endCxn id="14" idx="1"/>
+          </p:cNvCxnSpPr>
+          <p:nvPr/>
+        </p:nvCxnSpPr>
+        <p:spPr>
+          <a:xfrm>
+            <a:off x="7673172" y="1782891"/>
+            <a:ext cx="0" cy="859098"/>
+          </a:xfrm>
+          <a:prstGeom prst="straightConnector1">
+            <a:avLst/>
+          </a:prstGeom>
+          <a:ln w="28575">
+            <a:solidFill>
+              <a:schemeClr val="tx1"/>
+            </a:solidFill>
+            <a:tailEnd type="triangle"/>
+          </a:ln>
+        </p:spPr>
+        <p:style>
+          <a:lnRef idx="1">
+            <a:schemeClr val="accent1"/>
+          </a:lnRef>
+          <a:fillRef idx="0">
+            <a:schemeClr val="accent1"/>
+          </a:fillRef>
+          <a:effectRef idx="0">
+            <a:schemeClr val="accent1"/>
+          </a:effectRef>
+          <a:fontRef idx="minor">
+            <a:schemeClr val="tx1"/>
+          </a:fontRef>
+        </p:style>
+      </p:cxnSp>
+      <p:cxnSp>
+        <p:nvCxnSpPr>
+          <p:cNvPr id="40" name="直接箭头连接符 39">
+            <a:extLst>
+              <a:ext uri="{FF2B5EF4-FFF2-40B4-BE49-F238E27FC236}">
+                <a16:creationId xmlns:a16="http://schemas.microsoft.com/office/drawing/2014/main" id="{640F7397-9EEB-0D88-502A-FF60B7C16F73}"/>
+              </a:ext>
+            </a:extLst>
+          </p:cNvPr>
+          <p:cNvCxnSpPr>
+            <a:stCxn id="10" idx="5"/>
+            <a:endCxn id="18" idx="7"/>
+          </p:cNvCxnSpPr>
+          <p:nvPr/>
+        </p:nvCxnSpPr>
+        <p:spPr>
+          <a:xfrm>
+            <a:off x="7774996" y="2166297"/>
+            <a:ext cx="0" cy="859098"/>
+          </a:xfrm>
+          <a:prstGeom prst="straightConnector1">
+            <a:avLst/>
+          </a:prstGeom>
+          <a:ln w="28575">
+            <a:solidFill>
+              <a:schemeClr val="tx1"/>
+            </a:solidFill>
+            <a:tailEnd type="triangle"/>
+          </a:ln>
+        </p:spPr>
+        <p:style>
+          <a:lnRef idx="1">
+            <a:schemeClr val="accent1"/>
+          </a:lnRef>
+          <a:fillRef idx="0">
+            <a:schemeClr val="accent1"/>
+          </a:fillRef>
+          <a:effectRef idx="0">
+            <a:schemeClr val="accent1"/>
+          </a:effectRef>
+          <a:fontRef idx="minor">
+            <a:schemeClr val="tx1"/>
+          </a:fontRef>
+        </p:style>
+      </p:cxnSp>
+      <p:cxnSp>
+        <p:nvCxnSpPr>
+          <p:cNvPr id="42" name="直接箭头连接符 41">
+            <a:extLst>
+              <a:ext uri="{FF2B5EF4-FFF2-40B4-BE49-F238E27FC236}">
+                <a16:creationId xmlns:a16="http://schemas.microsoft.com/office/drawing/2014/main" id="{CCA2B556-9B1B-3B5C-B1FA-82D20BEFD5E3}"/>
+              </a:ext>
+            </a:extLst>
+          </p:cNvPr>
+          <p:cNvCxnSpPr>
+            <a:stCxn id="8" idx="3"/>
+            <a:endCxn id="16" idx="1"/>
+          </p:cNvCxnSpPr>
+          <p:nvPr/>
+        </p:nvCxnSpPr>
+        <p:spPr>
+          <a:xfrm>
+            <a:off x="8338117" y="1782891"/>
+            <a:ext cx="0" cy="859098"/>
+          </a:xfrm>
+          <a:prstGeom prst="straightConnector1">
+            <a:avLst/>
+          </a:prstGeom>
+          <a:ln w="28575">
+            <a:solidFill>
+              <a:schemeClr val="tx1"/>
+            </a:solidFill>
+            <a:tailEnd type="triangle"/>
+          </a:ln>
+        </p:spPr>
+        <p:style>
+          <a:lnRef idx="1">
+            <a:schemeClr val="accent1"/>
+          </a:lnRef>
+          <a:fillRef idx="0">
+            <a:schemeClr val="accent1"/>
+          </a:fillRef>
+          <a:effectRef idx="0">
+            <a:schemeClr val="accent1"/>
+          </a:effectRef>
+          <a:fontRef idx="minor">
+            <a:schemeClr val="tx1"/>
+          </a:fontRef>
+        </p:style>
+      </p:cxnSp>
+      <p:cxnSp>
+        <p:nvCxnSpPr>
+          <p:cNvPr id="44" name="直接箭头连接符 43">
+            <a:extLst>
+              <a:ext uri="{FF2B5EF4-FFF2-40B4-BE49-F238E27FC236}">
+                <a16:creationId xmlns:a16="http://schemas.microsoft.com/office/drawing/2014/main" id="{1C01532E-E0B1-7B42-B124-EC40F649D7FD}"/>
+              </a:ext>
+            </a:extLst>
+          </p:cNvPr>
+          <p:cNvCxnSpPr>
+            <a:stCxn id="12" idx="5"/>
+            <a:endCxn id="20" idx="7"/>
+          </p:cNvCxnSpPr>
+          <p:nvPr/>
+        </p:nvCxnSpPr>
+        <p:spPr>
+          <a:xfrm>
+            <a:off x="8439941" y="2166297"/>
+            <a:ext cx="0" cy="859098"/>
+          </a:xfrm>
+          <a:prstGeom prst="straightConnector1">
+            <a:avLst/>
+          </a:prstGeom>
+          <a:ln w="28575">
+            <a:solidFill>
+              <a:schemeClr val="tx1"/>
+            </a:solidFill>
+            <a:tailEnd type="triangle"/>
+          </a:ln>
+        </p:spPr>
+        <p:style>
+          <a:lnRef idx="1">
+            <a:schemeClr val="accent1"/>
+          </a:lnRef>
+          <a:fillRef idx="0">
+            <a:schemeClr val="accent1"/>
+          </a:fillRef>
+          <a:effectRef idx="0">
+            <a:schemeClr val="accent1"/>
+          </a:effectRef>
+          <a:fontRef idx="minor">
+            <a:schemeClr val="tx1"/>
+          </a:fontRef>
+        </p:style>
+      </p:cxnSp>
+      <p:sp>
+        <p:nvSpPr>
+          <p:cNvPr id="45" name="椭圆 44">
+            <a:extLst>
+              <a:ext uri="{FF2B5EF4-FFF2-40B4-BE49-F238E27FC236}">
+                <a16:creationId xmlns:a16="http://schemas.microsoft.com/office/drawing/2014/main" id="{65B7565A-6CC8-D6DE-DC70-AA3ED1E993F6}"/>
+              </a:ext>
+            </a:extLst>
+          </p:cNvPr>
+          <p:cNvSpPr>
+            <a:spLocks noChangeAspect="1"/>
+          </p:cNvSpPr>
+          <p:nvPr/>
+        </p:nvSpPr>
+        <p:spPr>
+          <a:xfrm>
+            <a:off x="10230050" y="1659979"/>
+            <a:ext cx="144000" cy="144000"/>
+          </a:xfrm>
+          <a:prstGeom prst="ellipse">
+            <a:avLst/>
+          </a:prstGeom>
+          <a:ln>
+            <a:solidFill>
+              <a:schemeClr val="tx1"/>
+            </a:solidFill>
+          </a:ln>
+        </p:spPr>
+        <p:txBody>
+          <a:bodyPr wrap="square" rtlCol="0" anchor="ctr">
+            <a:noAutofit/>
+          </a:bodyPr>
+          <a:lstStyle/>
+          <a:p>
+            <a:pPr algn="ctr"/>
+            <a:endParaRPr lang="zh-CN" altLang="en-US" dirty="0">
+              <a:latin typeface="微软雅黑" pitchFamily="34" charset="-122"/>
+              <a:ea typeface="微软雅黑" pitchFamily="34" charset="-122"/>
+            </a:endParaRPr>
+          </a:p>
+        </p:txBody>
+      </p:sp>
+      <p:sp>
+        <p:nvSpPr>
+          <p:cNvPr id="46" name="椭圆 45">
+            <a:extLst>
+              <a:ext uri="{FF2B5EF4-FFF2-40B4-BE49-F238E27FC236}">
+                <a16:creationId xmlns:a16="http://schemas.microsoft.com/office/drawing/2014/main" id="{FC6DF0E4-B438-4728-2DB1-572C57D883FA}"/>
+              </a:ext>
+            </a:extLst>
+          </p:cNvPr>
+          <p:cNvSpPr>
+            <a:spLocks noChangeAspect="1"/>
+          </p:cNvSpPr>
+          <p:nvPr/>
+        </p:nvSpPr>
+        <p:spPr>
+          <a:xfrm>
+            <a:off x="10894995" y="1659979"/>
+            <a:ext cx="144000" cy="144000"/>
+          </a:xfrm>
+          <a:prstGeom prst="ellipse">
+            <a:avLst/>
+          </a:prstGeom>
+          <a:ln>
+            <a:solidFill>
+              <a:schemeClr val="tx1"/>
+            </a:solidFill>
+          </a:ln>
+        </p:spPr>
+        <p:txBody>
+          <a:bodyPr wrap="square" rtlCol="0" anchor="ctr">
+            <a:noAutofit/>
+          </a:bodyPr>
+          <a:lstStyle/>
+          <a:p>
+            <a:pPr algn="ctr"/>
+            <a:endParaRPr lang="zh-CN" altLang="en-US" dirty="0">
+              <a:latin typeface="微软雅黑" pitchFamily="34" charset="-122"/>
+              <a:ea typeface="微软雅黑" pitchFamily="34" charset="-122"/>
+            </a:endParaRPr>
+          </a:p>
+        </p:txBody>
+      </p:sp>
+      <p:sp>
+        <p:nvSpPr>
+          <p:cNvPr id="47" name="椭圆 46">
+            <a:extLst>
+              <a:ext uri="{FF2B5EF4-FFF2-40B4-BE49-F238E27FC236}">
+                <a16:creationId xmlns:a16="http://schemas.microsoft.com/office/drawing/2014/main" id="{7F745260-DAFC-658F-6E47-1146996A2CFE}"/>
+              </a:ext>
+            </a:extLst>
+          </p:cNvPr>
+          <p:cNvSpPr>
+            <a:spLocks noChangeAspect="1"/>
+          </p:cNvSpPr>
+          <p:nvPr/>
+        </p:nvSpPr>
+        <p:spPr>
+          <a:xfrm>
+            <a:off x="10230050" y="2043385"/>
+            <a:ext cx="144000" cy="144000"/>
+          </a:xfrm>
+          <a:prstGeom prst="ellipse">
+            <a:avLst/>
+          </a:prstGeom>
+          <a:ln>
+            <a:solidFill>
+              <a:schemeClr val="tx1"/>
+            </a:solidFill>
+          </a:ln>
+        </p:spPr>
+        <p:txBody>
+          <a:bodyPr wrap="square" rtlCol="0" anchor="ctr">
+            <a:noAutofit/>
+          </a:bodyPr>
+          <a:lstStyle/>
+          <a:p>
+            <a:pPr algn="ctr"/>
+            <a:endParaRPr lang="zh-CN" altLang="en-US" dirty="0">
+              <a:latin typeface="微软雅黑" pitchFamily="34" charset="-122"/>
+              <a:ea typeface="微软雅黑" pitchFamily="34" charset="-122"/>
+            </a:endParaRPr>
+          </a:p>
+        </p:txBody>
+      </p:sp>
+      <p:sp>
+        <p:nvSpPr>
+          <p:cNvPr id="48" name="椭圆 47">
+            <a:extLst>
+              <a:ext uri="{FF2B5EF4-FFF2-40B4-BE49-F238E27FC236}">
+                <a16:creationId xmlns:a16="http://schemas.microsoft.com/office/drawing/2014/main" id="{F7D821FD-40CE-8186-78F0-332646A83D08}"/>
+              </a:ext>
+            </a:extLst>
+          </p:cNvPr>
+          <p:cNvSpPr>
+            <a:spLocks noChangeAspect="1"/>
+          </p:cNvSpPr>
+          <p:nvPr/>
+        </p:nvSpPr>
+        <p:spPr>
+          <a:xfrm>
+            <a:off x="10894995" y="2043385"/>
+            <a:ext cx="144000" cy="144000"/>
+          </a:xfrm>
+          <a:prstGeom prst="ellipse">
+            <a:avLst/>
+          </a:prstGeom>
+          <a:ln>
+            <a:solidFill>
+              <a:schemeClr val="tx1"/>
+            </a:solidFill>
+          </a:ln>
+        </p:spPr>
+        <p:txBody>
+          <a:bodyPr wrap="square" rtlCol="0" anchor="ctr">
+            <a:noAutofit/>
+          </a:bodyPr>
+          <a:lstStyle/>
+          <a:p>
+            <a:pPr algn="ctr"/>
+            <a:endParaRPr lang="zh-CN" altLang="en-US" dirty="0">
+              <a:latin typeface="微软雅黑" pitchFamily="34" charset="-122"/>
+              <a:ea typeface="微软雅黑" pitchFamily="34" charset="-122"/>
+            </a:endParaRPr>
+          </a:p>
+        </p:txBody>
+      </p:sp>
+      <p:sp>
+        <p:nvSpPr>
+          <p:cNvPr id="49" name="椭圆 48">
+            <a:extLst>
+              <a:ext uri="{FF2B5EF4-FFF2-40B4-BE49-F238E27FC236}">
+                <a16:creationId xmlns:a16="http://schemas.microsoft.com/office/drawing/2014/main" id="{9B8FA53C-865E-EA45-96BE-33BB3B6C8223}"/>
+              </a:ext>
+            </a:extLst>
+          </p:cNvPr>
+          <p:cNvSpPr>
+            <a:spLocks noChangeAspect="1"/>
+          </p:cNvSpPr>
+          <p:nvPr/>
+        </p:nvSpPr>
+        <p:spPr>
+          <a:xfrm>
+            <a:off x="10230050" y="2620901"/>
+            <a:ext cx="144000" cy="144000"/>
+          </a:xfrm>
+          <a:prstGeom prst="ellipse">
+            <a:avLst/>
+          </a:prstGeom>
+          <a:ln>
+            <a:solidFill>
+              <a:schemeClr val="tx1"/>
+            </a:solidFill>
+          </a:ln>
+        </p:spPr>
+        <p:txBody>
+          <a:bodyPr wrap="square" rtlCol="0" anchor="ctr">
+            <a:noAutofit/>
+          </a:bodyPr>
+          <a:lstStyle/>
+          <a:p>
+            <a:pPr algn="ctr"/>
+            <a:endParaRPr lang="zh-CN" altLang="en-US" dirty="0">
+              <a:latin typeface="微软雅黑" pitchFamily="34" charset="-122"/>
+              <a:ea typeface="微软雅黑" pitchFamily="34" charset="-122"/>
+            </a:endParaRPr>
+          </a:p>
+        </p:txBody>
+      </p:sp>
+      <p:sp>
+        <p:nvSpPr>
+          <p:cNvPr id="50" name="椭圆 49">
+            <a:extLst>
+              <a:ext uri="{FF2B5EF4-FFF2-40B4-BE49-F238E27FC236}">
+                <a16:creationId xmlns:a16="http://schemas.microsoft.com/office/drawing/2014/main" id="{605A1BC2-79D6-43B2-DF31-108E602CF671}"/>
+              </a:ext>
+            </a:extLst>
+          </p:cNvPr>
+          <p:cNvSpPr>
+            <a:spLocks noChangeAspect="1"/>
+          </p:cNvSpPr>
+          <p:nvPr/>
+        </p:nvSpPr>
+        <p:spPr>
+          <a:xfrm>
+            <a:off x="10894995" y="2620901"/>
+            <a:ext cx="144000" cy="144000"/>
+          </a:xfrm>
+          <a:prstGeom prst="ellipse">
+            <a:avLst/>
+          </a:prstGeom>
+          <a:ln>
+            <a:solidFill>
+              <a:schemeClr val="tx1"/>
+            </a:solidFill>
+          </a:ln>
+        </p:spPr>
+        <p:txBody>
+          <a:bodyPr wrap="square" rtlCol="0" anchor="ctr">
+            <a:noAutofit/>
+          </a:bodyPr>
+          <a:lstStyle/>
+          <a:p>
+            <a:pPr algn="ctr"/>
+            <a:endParaRPr lang="zh-CN" altLang="en-US" dirty="0">
+              <a:latin typeface="微软雅黑" pitchFamily="34" charset="-122"/>
+              <a:ea typeface="微软雅黑" pitchFamily="34" charset="-122"/>
+            </a:endParaRPr>
+          </a:p>
+        </p:txBody>
+      </p:sp>
+      <p:sp>
+        <p:nvSpPr>
+          <p:cNvPr id="51" name="椭圆 50">
+            <a:extLst>
+              <a:ext uri="{FF2B5EF4-FFF2-40B4-BE49-F238E27FC236}">
+                <a16:creationId xmlns:a16="http://schemas.microsoft.com/office/drawing/2014/main" id="{470EB352-C53A-65D3-DF8D-3908BA2DB1A3}"/>
+              </a:ext>
+            </a:extLst>
+          </p:cNvPr>
+          <p:cNvSpPr>
+            <a:spLocks noChangeAspect="1"/>
+          </p:cNvSpPr>
+          <p:nvPr/>
+        </p:nvSpPr>
+        <p:spPr>
+          <a:xfrm>
+            <a:off x="10230050" y="3764704"/>
+            <a:ext cx="144000" cy="144000"/>
+          </a:xfrm>
+          <a:prstGeom prst="ellipse">
+            <a:avLst/>
+          </a:prstGeom>
+          <a:ln>
+            <a:solidFill>
+              <a:schemeClr val="tx1"/>
+            </a:solidFill>
+          </a:ln>
+        </p:spPr>
+        <p:txBody>
+          <a:bodyPr wrap="square" rtlCol="0" anchor="ctr">
+            <a:noAutofit/>
+          </a:bodyPr>
+          <a:lstStyle/>
+          <a:p>
+            <a:pPr algn="ctr"/>
+            <a:endParaRPr lang="zh-CN" altLang="en-US" dirty="0">
+              <a:latin typeface="微软雅黑" pitchFamily="34" charset="-122"/>
+              <a:ea typeface="微软雅黑" pitchFamily="34" charset="-122"/>
+            </a:endParaRPr>
+          </a:p>
+        </p:txBody>
+      </p:sp>
+      <p:sp>
+        <p:nvSpPr>
+          <p:cNvPr id="52" name="椭圆 51">
+            <a:extLst>
+              <a:ext uri="{FF2B5EF4-FFF2-40B4-BE49-F238E27FC236}">
+                <a16:creationId xmlns:a16="http://schemas.microsoft.com/office/drawing/2014/main" id="{D5AB9103-2598-BA39-1E54-E0AF5381A9A4}"/>
+              </a:ext>
+            </a:extLst>
+          </p:cNvPr>
+          <p:cNvSpPr>
+            <a:spLocks noChangeAspect="1"/>
+          </p:cNvSpPr>
+          <p:nvPr/>
+        </p:nvSpPr>
+        <p:spPr>
+          <a:xfrm>
+            <a:off x="10894995" y="3764704"/>
+            <a:ext cx="144000" cy="144000"/>
+          </a:xfrm>
+          <a:prstGeom prst="ellipse">
+            <a:avLst/>
+          </a:prstGeom>
+          <a:ln>
+            <a:solidFill>
+              <a:schemeClr val="tx1"/>
+            </a:solidFill>
+          </a:ln>
+        </p:spPr>
+        <p:txBody>
+          <a:bodyPr wrap="square" rtlCol="0" anchor="ctr">
+            <a:noAutofit/>
+          </a:bodyPr>
+          <a:lstStyle/>
+          <a:p>
+            <a:pPr algn="ctr"/>
+            <a:endParaRPr lang="zh-CN" altLang="en-US" dirty="0">
+              <a:latin typeface="微软雅黑" pitchFamily="34" charset="-122"/>
+              <a:ea typeface="微软雅黑" pitchFamily="34" charset="-122"/>
+            </a:endParaRPr>
+          </a:p>
+        </p:txBody>
+      </p:sp>
+      <p:cxnSp>
+        <p:nvCxnSpPr>
+          <p:cNvPr id="53" name="直接箭头连接符 52">
+            <a:extLst>
+              <a:ext uri="{FF2B5EF4-FFF2-40B4-BE49-F238E27FC236}">
+                <a16:creationId xmlns:a16="http://schemas.microsoft.com/office/drawing/2014/main" id="{47865ED8-1163-6640-6118-9999D091FB4D}"/>
+              </a:ext>
+            </a:extLst>
+          </p:cNvPr>
+          <p:cNvCxnSpPr>
+            <a:stCxn id="45" idx="3"/>
+            <a:endCxn id="49" idx="1"/>
+          </p:cNvCxnSpPr>
+          <p:nvPr/>
+        </p:nvCxnSpPr>
+        <p:spPr>
+          <a:xfrm>
+            <a:off x="10251138" y="1782891"/>
+            <a:ext cx="0" cy="859098"/>
+          </a:xfrm>
+          <a:prstGeom prst="straightConnector1">
+            <a:avLst/>
+          </a:prstGeom>
+          <a:ln w="28575">
+            <a:solidFill>
+              <a:schemeClr val="tx1"/>
+            </a:solidFill>
+            <a:tailEnd type="triangle"/>
+          </a:ln>
+        </p:spPr>
+        <p:style>
+          <a:lnRef idx="1">
+            <a:schemeClr val="accent1"/>
+          </a:lnRef>
+          <a:fillRef idx="0">
+            <a:schemeClr val="accent1"/>
+          </a:fillRef>
+          <a:effectRef idx="0">
+            <a:schemeClr val="accent1"/>
+          </a:effectRef>
+          <a:fontRef idx="minor">
+            <a:schemeClr val="tx1"/>
+          </a:fontRef>
+        </p:style>
+      </p:cxnSp>
+      <p:cxnSp>
+        <p:nvCxnSpPr>
+          <p:cNvPr id="54" name="直接箭头连接符 53">
+            <a:extLst>
+              <a:ext uri="{FF2B5EF4-FFF2-40B4-BE49-F238E27FC236}">
+                <a16:creationId xmlns:a16="http://schemas.microsoft.com/office/drawing/2014/main" id="{3C559485-B599-169E-4AC1-9E049AE81E88}"/>
+              </a:ext>
+            </a:extLst>
+          </p:cNvPr>
+          <p:cNvCxnSpPr>
+            <a:stCxn id="47" idx="5"/>
+            <a:endCxn id="51" idx="7"/>
+          </p:cNvCxnSpPr>
+          <p:nvPr/>
+        </p:nvCxnSpPr>
+        <p:spPr>
+          <a:xfrm>
+            <a:off x="10352962" y="2166297"/>
+            <a:ext cx="0" cy="1619495"/>
+          </a:xfrm>
+          <a:prstGeom prst="straightConnector1">
+            <a:avLst/>
+          </a:prstGeom>
+          <a:ln w="28575">
+            <a:solidFill>
+              <a:schemeClr val="tx1"/>
+            </a:solidFill>
+            <a:tailEnd type="triangle"/>
+          </a:ln>
+        </p:spPr>
+        <p:style>
+          <a:lnRef idx="1">
+            <a:schemeClr val="accent1"/>
+          </a:lnRef>
+          <a:fillRef idx="0">
+            <a:schemeClr val="accent1"/>
+          </a:fillRef>
+          <a:effectRef idx="0">
+            <a:schemeClr val="accent1"/>
+          </a:effectRef>
+          <a:fontRef idx="minor">
+            <a:schemeClr val="tx1"/>
+          </a:fontRef>
+        </p:style>
+      </p:cxnSp>
+      <p:cxnSp>
+        <p:nvCxnSpPr>
+          <p:cNvPr id="55" name="直接箭头连接符 54">
+            <a:extLst>
+              <a:ext uri="{FF2B5EF4-FFF2-40B4-BE49-F238E27FC236}">
+                <a16:creationId xmlns:a16="http://schemas.microsoft.com/office/drawing/2014/main" id="{C496E0AB-EE26-72FB-024B-8F717CBA9F2A}"/>
+              </a:ext>
+            </a:extLst>
+          </p:cNvPr>
+          <p:cNvCxnSpPr>
+            <a:stCxn id="46" idx="3"/>
+            <a:endCxn id="50" idx="1"/>
+          </p:cNvCxnSpPr>
+          <p:nvPr/>
+        </p:nvCxnSpPr>
+        <p:spPr>
+          <a:xfrm>
+            <a:off x="10916083" y="1782891"/>
+            <a:ext cx="0" cy="859098"/>
+          </a:xfrm>
+          <a:prstGeom prst="straightConnector1">
+            <a:avLst/>
+          </a:prstGeom>
+          <a:ln w="28575">
+            <a:solidFill>
+              <a:schemeClr val="tx1"/>
+            </a:solidFill>
+            <a:tailEnd type="triangle"/>
+          </a:ln>
+        </p:spPr>
+        <p:style>
+          <a:lnRef idx="1">
+            <a:schemeClr val="accent1"/>
+          </a:lnRef>
+          <a:fillRef idx="0">
+            <a:schemeClr val="accent1"/>
+          </a:fillRef>
+          <a:effectRef idx="0">
+            <a:schemeClr val="accent1"/>
+          </a:effectRef>
+          <a:fontRef idx="minor">
+            <a:schemeClr val="tx1"/>
+          </a:fontRef>
+        </p:style>
+      </p:cxnSp>
+      <p:cxnSp>
+        <p:nvCxnSpPr>
+          <p:cNvPr id="56" name="直接箭头连接符 55">
+            <a:extLst>
+              <a:ext uri="{FF2B5EF4-FFF2-40B4-BE49-F238E27FC236}">
+                <a16:creationId xmlns:a16="http://schemas.microsoft.com/office/drawing/2014/main" id="{2DB28134-315F-B1A6-24DA-8EC85428A459}"/>
+              </a:ext>
+            </a:extLst>
+          </p:cNvPr>
+          <p:cNvCxnSpPr>
+            <a:stCxn id="48" idx="5"/>
+            <a:endCxn id="52" idx="7"/>
+          </p:cNvCxnSpPr>
+          <p:nvPr/>
+        </p:nvCxnSpPr>
+        <p:spPr>
+          <a:xfrm>
+            <a:off x="11017907" y="2166297"/>
+            <a:ext cx="0" cy="1619495"/>
+          </a:xfrm>
+          <a:prstGeom prst="straightConnector1">
+            <a:avLst/>
+          </a:prstGeom>
+          <a:ln w="28575">
+            <a:solidFill>
+              <a:schemeClr val="tx1"/>
+            </a:solidFill>
+            <a:tailEnd type="triangle"/>
+          </a:ln>
+        </p:spPr>
+        <p:style>
+          <a:lnRef idx="1">
+            <a:schemeClr val="accent1"/>
+          </a:lnRef>
+          <a:fillRef idx="0">
+            <a:schemeClr val="accent1"/>
+          </a:fillRef>
+          <a:effectRef idx="0">
+            <a:schemeClr val="accent1"/>
+          </a:effectRef>
+          <a:fontRef idx="minor">
+            <a:schemeClr val="tx1"/>
+          </a:fontRef>
+        </p:style>
+      </p:cxnSp>
+    </p:spTree>
+    <p:extLst>
+      <p:ext uri="{BB962C8B-B14F-4D97-AF65-F5344CB8AC3E}">
+        <p14:creationId xmlns:p14="http://schemas.microsoft.com/office/powerpoint/2010/main" val="1172774689"/>
+      </p:ext>
+    </p:extLst>
+  </p:cSld>
+  <p:clrMapOvr>
+    <a:masterClrMapping/>
+  </p:clrMapOvr>
+</p:sld>
+</file>
+
 <file path=ppt/slides/slide2.xml><?xml version="1.0" encoding="utf-8"?>
 <p:sld xmlns:a="http://schemas.openxmlformats.org/drawingml/2006/main" xmlns:r="http://schemas.openxmlformats.org/officeDocument/2006/relationships" xmlns:p="http://schemas.openxmlformats.org/presentationml/2006/main">
   <p:cSld>
@@ -13809,8 +15196,8 @@
           </a:p>
         </p:txBody>
       </p:sp>
-      <mc:AlternateContent xmlns:mc="http://schemas.openxmlformats.org/markup-compatibility/2006">
-        <mc:Choice xmlns:a14="http://schemas.microsoft.com/office/drawing/2010/main" Requires="a14">
+      <mc:AlternateContent xmlns:mc="http://schemas.openxmlformats.org/markup-compatibility/2006" xmlns:a14="http://schemas.microsoft.com/office/drawing/2010/main">
+        <mc:Choice Requires="a14">
           <p:sp>
             <p:nvSpPr>
               <p:cNvPr id="127" name="文本框 126">
@@ -14142,7 +15529,7 @@
             </p:txBody>
           </p:sp>
         </mc:Choice>
-        <mc:Fallback>
+        <mc:Fallback xmlns="">
           <p:sp>
             <p:nvSpPr>
               <p:cNvPr id="127" name="文本框 126">
@@ -14276,6 +15663,121 @@
               </a:rPr>
               <a:t>被占用</a:t>
             </a:r>
+          </a:p>
+        </p:txBody>
+      </p:sp>
+      <p:cxnSp>
+        <p:nvCxnSpPr>
+          <p:cNvPr id="32" name="直接箭头连接符 31">
+            <a:extLst>
+              <a:ext uri="{FF2B5EF4-FFF2-40B4-BE49-F238E27FC236}">
+                <a16:creationId xmlns:a16="http://schemas.microsoft.com/office/drawing/2014/main" id="{137A5FA4-9BF3-3263-DE63-F1D72DB62CD2}"/>
+              </a:ext>
+            </a:extLst>
+          </p:cNvPr>
+          <p:cNvCxnSpPr>
+            <a:cxnSpLocks/>
+            <a:stCxn id="50" idx="5"/>
+          </p:cNvCxnSpPr>
+          <p:nvPr/>
+        </p:nvCxnSpPr>
+        <p:spPr>
+          <a:xfrm>
+            <a:off x="5978833" y="4588888"/>
+            <a:ext cx="959991" cy="1017794"/>
+          </a:xfrm>
+          <a:prstGeom prst="straightConnector1">
+            <a:avLst/>
+          </a:prstGeom>
+          <a:ln w="28575">
+            <a:solidFill>
+              <a:schemeClr val="accent1"/>
+            </a:solidFill>
+            <a:tailEnd type="triangle"/>
+          </a:ln>
+        </p:spPr>
+        <p:style>
+          <a:lnRef idx="1">
+            <a:schemeClr val="accent1"/>
+          </a:lnRef>
+          <a:fillRef idx="0">
+            <a:schemeClr val="accent1"/>
+          </a:fillRef>
+          <a:effectRef idx="0">
+            <a:schemeClr val="accent1"/>
+          </a:effectRef>
+          <a:fontRef idx="minor">
+            <a:schemeClr val="tx1"/>
+          </a:fontRef>
+        </p:style>
+      </p:cxnSp>
+      <p:sp>
+        <p:nvSpPr>
+          <p:cNvPr id="35" name="文本框 34">
+            <a:extLst>
+              <a:ext uri="{FF2B5EF4-FFF2-40B4-BE49-F238E27FC236}">
+                <a16:creationId xmlns:a16="http://schemas.microsoft.com/office/drawing/2014/main" id="{42337976-2128-8321-42CA-752305548449}"/>
+              </a:ext>
+            </a:extLst>
+          </p:cNvPr>
+          <p:cNvSpPr txBox="1"/>
+          <p:nvPr/>
+        </p:nvSpPr>
+        <p:spPr>
+          <a:xfrm>
+            <a:off x="8316227" y="3320716"/>
+            <a:ext cx="1875835" cy="1200329"/>
+          </a:xfrm>
+          <a:prstGeom prst="rect">
+            <a:avLst/>
+          </a:prstGeom>
+          <a:noFill/>
+        </p:spPr>
+        <p:txBody>
+          <a:bodyPr wrap="none" rtlCol="0">
+            <a:spAutoFit/>
+          </a:bodyPr>
+          <a:lstStyle/>
+          <a:p>
+            <a:pPr algn="l"/>
+            <a:r>
+              <a:rPr lang="en-US" altLang="zh-CN" dirty="0">
+                <a:latin typeface="微软雅黑" panose="020B0503020204020204" pitchFamily="34" charset="-122"/>
+                <a:ea typeface="微软雅黑" panose="020B0503020204020204" pitchFamily="34" charset="-122"/>
+              </a:rPr>
+              <a:t>x1-&gt;x2, x3-&gt;x4</a:t>
+            </a:r>
+          </a:p>
+          <a:p>
+            <a:pPr algn="l"/>
+            <a:endParaRPr lang="en-US" altLang="zh-CN" dirty="0">
+              <a:latin typeface="微软雅黑" panose="020B0503020204020204" pitchFamily="34" charset="-122"/>
+              <a:ea typeface="微软雅黑" panose="020B0503020204020204" pitchFamily="34" charset="-122"/>
+            </a:endParaRPr>
+          </a:p>
+          <a:p>
+            <a:pPr algn="l"/>
+            <a:r>
+              <a:rPr lang="en-US" altLang="zh-CN" dirty="0">
+                <a:latin typeface="微软雅黑" panose="020B0503020204020204" pitchFamily="34" charset="-122"/>
+                <a:ea typeface="微软雅黑" panose="020B0503020204020204" pitchFamily="34" charset="-122"/>
+              </a:rPr>
+              <a:t>If x1&gt;x3, x2&gt;x4</a:t>
+            </a:r>
+          </a:p>
+          <a:p>
+            <a:pPr algn="l"/>
+            <a:r>
+              <a:rPr lang="en-US" altLang="zh-CN" dirty="0">
+                <a:latin typeface="微软雅黑" panose="020B0503020204020204" pitchFamily="34" charset="-122"/>
+                <a:ea typeface="微软雅黑" panose="020B0503020204020204" pitchFamily="34" charset="-122"/>
+              </a:rPr>
+              <a:t>X1=x3, =</a:t>
+            </a:r>
+            <a:endParaRPr lang="zh-CN" altLang="en-US" dirty="0">
+              <a:latin typeface="微软雅黑" panose="020B0503020204020204" pitchFamily="34" charset="-122"/>
+              <a:ea typeface="微软雅黑" panose="020B0503020204020204" pitchFamily="34" charset="-122"/>
+            </a:endParaRPr>
           </a:p>
         </p:txBody>
       </p:sp>
@@ -19565,6 +21067,7871 @@
     <p:extLst>
       <p:ext uri="{BB962C8B-B14F-4D97-AF65-F5344CB8AC3E}">
         <p14:creationId xmlns:p14="http://schemas.microsoft.com/office/powerpoint/2010/main" val="1083133601"/>
+      </p:ext>
+    </p:extLst>
+  </p:cSld>
+  <p:clrMapOvr>
+    <a:masterClrMapping/>
+  </p:clrMapOvr>
+</p:sld>
+</file>
+
+<file path=ppt/slides/slide8.xml><?xml version="1.0" encoding="utf-8"?>
+<p:sld xmlns:a="http://schemas.openxmlformats.org/drawingml/2006/main" xmlns:r="http://schemas.openxmlformats.org/officeDocument/2006/relationships" xmlns:p="http://schemas.openxmlformats.org/presentationml/2006/main">
+  <p:cSld>
+    <p:spTree>
+      <p:nvGrpSpPr>
+        <p:cNvPr id="1" name=""/>
+        <p:cNvGrpSpPr/>
+        <p:nvPr/>
+      </p:nvGrpSpPr>
+      <p:grpSpPr>
+        <a:xfrm>
+          <a:off x="0" y="0"/>
+          <a:ext cx="0" cy="0"/>
+          <a:chOff x="0" y="0"/>
+          <a:chExt cx="0" cy="0"/>
+        </a:xfrm>
+      </p:grpSpPr>
+      <p:sp>
+        <p:nvSpPr>
+          <p:cNvPr id="2" name="灯片编号占位符 1">
+            <a:extLst>
+              <a:ext uri="{FF2B5EF4-FFF2-40B4-BE49-F238E27FC236}">
+                <a16:creationId xmlns:a16="http://schemas.microsoft.com/office/drawing/2014/main" id="{7BA74626-0B72-D6D0-5DA8-12B12855C9B3}"/>
+              </a:ext>
+            </a:extLst>
+          </p:cNvPr>
+          <p:cNvSpPr>
+            <a:spLocks noGrp="1"/>
+          </p:cNvSpPr>
+          <p:nvPr>
+            <p:ph type="sldNum" sz="quarter" idx="12"/>
+          </p:nvPr>
+        </p:nvSpPr>
+        <p:spPr/>
+        <p:txBody>
+          <a:bodyPr/>
+          <a:lstStyle/>
+          <a:p>
+            <a:fld id="{EB466BE2-40FE-4A59-82BB-128E7E394AEC}" type="slidenum">
+              <a:rPr lang="zh-CN" altLang="en-US" smtClean="0"/>
+              <a:t>8</a:t>
+            </a:fld>
+            <a:endParaRPr lang="zh-CN" altLang="en-US"/>
+          </a:p>
+        </p:txBody>
+      </p:sp>
+      <p:sp>
+        <p:nvSpPr>
+          <p:cNvPr id="3" name="标题 2">
+            <a:extLst>
+              <a:ext uri="{FF2B5EF4-FFF2-40B4-BE49-F238E27FC236}">
+                <a16:creationId xmlns:a16="http://schemas.microsoft.com/office/drawing/2014/main" id="{0E9C13C3-5C01-2C7D-FEE0-447DF7C218C6}"/>
+              </a:ext>
+            </a:extLst>
+          </p:cNvPr>
+          <p:cNvSpPr>
+            <a:spLocks noGrp="1"/>
+          </p:cNvSpPr>
+          <p:nvPr>
+            <p:ph type="title"/>
+          </p:nvPr>
+        </p:nvSpPr>
+        <p:spPr/>
+        <p:txBody>
+          <a:bodyPr/>
+          <a:lstStyle/>
+          <a:p>
+            <a:r>
+              <a:rPr lang="en-US" altLang="zh-CN" dirty="0"/>
+              <a:t>Zone architecture</a:t>
+            </a:r>
+            <a:endParaRPr lang="zh-CN" altLang="en-US" dirty="0"/>
+          </a:p>
+        </p:txBody>
+      </p:sp>
+      <p:sp>
+        <p:nvSpPr>
+          <p:cNvPr id="189" name="椭圆 188">
+            <a:extLst>
+              <a:ext uri="{FF2B5EF4-FFF2-40B4-BE49-F238E27FC236}">
+                <a16:creationId xmlns:a16="http://schemas.microsoft.com/office/drawing/2014/main" id="{0AB00217-625C-8362-73C3-4604A0E918A4}"/>
+              </a:ext>
+            </a:extLst>
+          </p:cNvPr>
+          <p:cNvSpPr>
+            <a:spLocks noChangeAspect="1"/>
+          </p:cNvSpPr>
+          <p:nvPr/>
+        </p:nvSpPr>
+        <p:spPr>
+          <a:xfrm>
+            <a:off x="640804" y="1175295"/>
+            <a:ext cx="144000" cy="144000"/>
+          </a:xfrm>
+          <a:prstGeom prst="ellipse">
+            <a:avLst/>
+          </a:prstGeom>
+          <a:ln>
+            <a:solidFill>
+              <a:schemeClr val="tx1"/>
+            </a:solidFill>
+          </a:ln>
+        </p:spPr>
+        <p:txBody>
+          <a:bodyPr wrap="square" rtlCol="0" anchor="ctr">
+            <a:noAutofit/>
+          </a:bodyPr>
+          <a:lstStyle/>
+          <a:p>
+            <a:pPr algn="ctr"/>
+            <a:endParaRPr lang="zh-CN" altLang="en-US" dirty="0">
+              <a:latin typeface="微软雅黑" pitchFamily="34" charset="-122"/>
+              <a:ea typeface="微软雅黑" pitchFamily="34" charset="-122"/>
+            </a:endParaRPr>
+          </a:p>
+        </p:txBody>
+      </p:sp>
+      <p:sp>
+        <p:nvSpPr>
+          <p:cNvPr id="191" name="椭圆 190">
+            <a:extLst>
+              <a:ext uri="{FF2B5EF4-FFF2-40B4-BE49-F238E27FC236}">
+                <a16:creationId xmlns:a16="http://schemas.microsoft.com/office/drawing/2014/main" id="{8FA40A76-166B-8A5C-0C2F-EE989A46B440}"/>
+              </a:ext>
+            </a:extLst>
+          </p:cNvPr>
+          <p:cNvSpPr>
+            <a:spLocks noChangeAspect="1"/>
+          </p:cNvSpPr>
+          <p:nvPr/>
+        </p:nvSpPr>
+        <p:spPr>
+          <a:xfrm>
+            <a:off x="1305749" y="1175295"/>
+            <a:ext cx="144000" cy="144000"/>
+          </a:xfrm>
+          <a:prstGeom prst="ellipse">
+            <a:avLst/>
+          </a:prstGeom>
+          <a:ln>
+            <a:solidFill>
+              <a:schemeClr val="tx1"/>
+            </a:solidFill>
+          </a:ln>
+        </p:spPr>
+        <p:txBody>
+          <a:bodyPr wrap="square" rtlCol="0" anchor="ctr">
+            <a:noAutofit/>
+          </a:bodyPr>
+          <a:lstStyle/>
+          <a:p>
+            <a:pPr algn="ctr"/>
+            <a:endParaRPr lang="zh-CN" altLang="en-US" dirty="0">
+              <a:latin typeface="微软雅黑" pitchFamily="34" charset="-122"/>
+              <a:ea typeface="微软雅黑" pitchFamily="34" charset="-122"/>
+            </a:endParaRPr>
+          </a:p>
+        </p:txBody>
+      </p:sp>
+      <p:sp>
+        <p:nvSpPr>
+          <p:cNvPr id="193" name="椭圆 192">
+            <a:extLst>
+              <a:ext uri="{FF2B5EF4-FFF2-40B4-BE49-F238E27FC236}">
+                <a16:creationId xmlns:a16="http://schemas.microsoft.com/office/drawing/2014/main" id="{C93BA5BF-F9E4-A67A-C6E7-CECE789918B3}"/>
+              </a:ext>
+            </a:extLst>
+          </p:cNvPr>
+          <p:cNvSpPr>
+            <a:spLocks noChangeAspect="1"/>
+          </p:cNvSpPr>
+          <p:nvPr/>
+        </p:nvSpPr>
+        <p:spPr>
+          <a:xfrm>
+            <a:off x="1970694" y="1175295"/>
+            <a:ext cx="144000" cy="144000"/>
+          </a:xfrm>
+          <a:prstGeom prst="ellipse">
+            <a:avLst/>
+          </a:prstGeom>
+          <a:ln>
+            <a:solidFill>
+              <a:schemeClr val="tx1"/>
+            </a:solidFill>
+          </a:ln>
+        </p:spPr>
+        <p:txBody>
+          <a:bodyPr wrap="square" rtlCol="0" anchor="ctr">
+            <a:noAutofit/>
+          </a:bodyPr>
+          <a:lstStyle/>
+          <a:p>
+            <a:pPr algn="ctr"/>
+            <a:endParaRPr lang="zh-CN" altLang="en-US" dirty="0">
+              <a:latin typeface="微软雅黑" pitchFamily="34" charset="-122"/>
+              <a:ea typeface="微软雅黑" pitchFamily="34" charset="-122"/>
+            </a:endParaRPr>
+          </a:p>
+        </p:txBody>
+      </p:sp>
+      <p:sp>
+        <p:nvSpPr>
+          <p:cNvPr id="195" name="椭圆 194">
+            <a:extLst>
+              <a:ext uri="{FF2B5EF4-FFF2-40B4-BE49-F238E27FC236}">
+                <a16:creationId xmlns:a16="http://schemas.microsoft.com/office/drawing/2014/main" id="{5D21647D-9FAC-9641-7ACD-76754B5E754C}"/>
+              </a:ext>
+            </a:extLst>
+          </p:cNvPr>
+          <p:cNvSpPr>
+            <a:spLocks noChangeAspect="1"/>
+          </p:cNvSpPr>
+          <p:nvPr/>
+        </p:nvSpPr>
+        <p:spPr>
+          <a:xfrm>
+            <a:off x="2635639" y="1175295"/>
+            <a:ext cx="144000" cy="144000"/>
+          </a:xfrm>
+          <a:prstGeom prst="ellipse">
+            <a:avLst/>
+          </a:prstGeom>
+          <a:ln>
+            <a:solidFill>
+              <a:schemeClr val="tx1"/>
+            </a:solidFill>
+          </a:ln>
+        </p:spPr>
+        <p:txBody>
+          <a:bodyPr wrap="square" rtlCol="0" anchor="ctr">
+            <a:noAutofit/>
+          </a:bodyPr>
+          <a:lstStyle/>
+          <a:p>
+            <a:pPr algn="ctr"/>
+            <a:endParaRPr lang="zh-CN" altLang="en-US" dirty="0">
+              <a:latin typeface="微软雅黑" pitchFamily="34" charset="-122"/>
+              <a:ea typeface="微软雅黑" pitchFamily="34" charset="-122"/>
+            </a:endParaRPr>
+          </a:p>
+        </p:txBody>
+      </p:sp>
+      <p:sp>
+        <p:nvSpPr>
+          <p:cNvPr id="197" name="椭圆 196">
+            <a:extLst>
+              <a:ext uri="{FF2B5EF4-FFF2-40B4-BE49-F238E27FC236}">
+                <a16:creationId xmlns:a16="http://schemas.microsoft.com/office/drawing/2014/main" id="{AD1B0FF2-648F-70FD-87FF-1B3C2FE356E6}"/>
+              </a:ext>
+            </a:extLst>
+          </p:cNvPr>
+          <p:cNvSpPr>
+            <a:spLocks noChangeAspect="1"/>
+          </p:cNvSpPr>
+          <p:nvPr/>
+        </p:nvSpPr>
+        <p:spPr>
+          <a:xfrm>
+            <a:off x="3300585" y="1175295"/>
+            <a:ext cx="144000" cy="144000"/>
+          </a:xfrm>
+          <a:prstGeom prst="ellipse">
+            <a:avLst/>
+          </a:prstGeom>
+          <a:ln>
+            <a:solidFill>
+              <a:schemeClr val="tx1"/>
+            </a:solidFill>
+          </a:ln>
+        </p:spPr>
+        <p:txBody>
+          <a:bodyPr wrap="square" rtlCol="0" anchor="ctr">
+            <a:noAutofit/>
+          </a:bodyPr>
+          <a:lstStyle/>
+          <a:p>
+            <a:pPr algn="ctr"/>
+            <a:endParaRPr lang="zh-CN" altLang="en-US" dirty="0">
+              <a:latin typeface="微软雅黑" pitchFamily="34" charset="-122"/>
+              <a:ea typeface="微软雅黑" pitchFamily="34" charset="-122"/>
+            </a:endParaRPr>
+          </a:p>
+        </p:txBody>
+      </p:sp>
+      <p:sp>
+        <p:nvSpPr>
+          <p:cNvPr id="199" name="椭圆 198">
+            <a:extLst>
+              <a:ext uri="{FF2B5EF4-FFF2-40B4-BE49-F238E27FC236}">
+                <a16:creationId xmlns:a16="http://schemas.microsoft.com/office/drawing/2014/main" id="{1DE44215-39F3-F460-0B25-3AF83120D09D}"/>
+              </a:ext>
+            </a:extLst>
+          </p:cNvPr>
+          <p:cNvSpPr>
+            <a:spLocks noChangeAspect="1"/>
+          </p:cNvSpPr>
+          <p:nvPr/>
+        </p:nvSpPr>
+        <p:spPr>
+          <a:xfrm>
+            <a:off x="640804" y="1558701"/>
+            <a:ext cx="144000" cy="144000"/>
+          </a:xfrm>
+          <a:prstGeom prst="ellipse">
+            <a:avLst/>
+          </a:prstGeom>
+          <a:ln>
+            <a:solidFill>
+              <a:schemeClr val="tx1"/>
+            </a:solidFill>
+          </a:ln>
+        </p:spPr>
+        <p:txBody>
+          <a:bodyPr wrap="square" rtlCol="0" anchor="ctr">
+            <a:noAutofit/>
+          </a:bodyPr>
+          <a:lstStyle/>
+          <a:p>
+            <a:pPr algn="ctr"/>
+            <a:endParaRPr lang="zh-CN" altLang="en-US" dirty="0">
+              <a:latin typeface="微软雅黑" pitchFamily="34" charset="-122"/>
+              <a:ea typeface="微软雅黑" pitchFamily="34" charset="-122"/>
+            </a:endParaRPr>
+          </a:p>
+        </p:txBody>
+      </p:sp>
+      <p:sp>
+        <p:nvSpPr>
+          <p:cNvPr id="201" name="椭圆 200">
+            <a:extLst>
+              <a:ext uri="{FF2B5EF4-FFF2-40B4-BE49-F238E27FC236}">
+                <a16:creationId xmlns:a16="http://schemas.microsoft.com/office/drawing/2014/main" id="{E980ACB8-DDA2-1E5C-28D3-36AEFCA530D6}"/>
+              </a:ext>
+            </a:extLst>
+          </p:cNvPr>
+          <p:cNvSpPr>
+            <a:spLocks noChangeAspect="1"/>
+          </p:cNvSpPr>
+          <p:nvPr/>
+        </p:nvSpPr>
+        <p:spPr>
+          <a:xfrm>
+            <a:off x="1305749" y="1558701"/>
+            <a:ext cx="144000" cy="144000"/>
+          </a:xfrm>
+          <a:prstGeom prst="ellipse">
+            <a:avLst/>
+          </a:prstGeom>
+          <a:ln>
+            <a:solidFill>
+              <a:schemeClr val="tx1"/>
+            </a:solidFill>
+          </a:ln>
+        </p:spPr>
+        <p:txBody>
+          <a:bodyPr wrap="square" rtlCol="0" anchor="ctr">
+            <a:noAutofit/>
+          </a:bodyPr>
+          <a:lstStyle/>
+          <a:p>
+            <a:pPr algn="ctr"/>
+            <a:endParaRPr lang="zh-CN" altLang="en-US" dirty="0">
+              <a:latin typeface="微软雅黑" pitchFamily="34" charset="-122"/>
+              <a:ea typeface="微软雅黑" pitchFamily="34" charset="-122"/>
+            </a:endParaRPr>
+          </a:p>
+        </p:txBody>
+      </p:sp>
+      <p:sp>
+        <p:nvSpPr>
+          <p:cNvPr id="203" name="椭圆 202">
+            <a:extLst>
+              <a:ext uri="{FF2B5EF4-FFF2-40B4-BE49-F238E27FC236}">
+                <a16:creationId xmlns:a16="http://schemas.microsoft.com/office/drawing/2014/main" id="{BEF6AB8F-0055-3782-4C7D-EFD3D6D22A1F}"/>
+              </a:ext>
+            </a:extLst>
+          </p:cNvPr>
+          <p:cNvSpPr>
+            <a:spLocks noChangeAspect="1"/>
+          </p:cNvSpPr>
+          <p:nvPr/>
+        </p:nvSpPr>
+        <p:spPr>
+          <a:xfrm>
+            <a:off x="1970694" y="1558701"/>
+            <a:ext cx="144000" cy="144000"/>
+          </a:xfrm>
+          <a:prstGeom prst="ellipse">
+            <a:avLst/>
+          </a:prstGeom>
+          <a:ln>
+            <a:solidFill>
+              <a:schemeClr val="tx1"/>
+            </a:solidFill>
+          </a:ln>
+        </p:spPr>
+        <p:txBody>
+          <a:bodyPr wrap="square" rtlCol="0" anchor="ctr">
+            <a:noAutofit/>
+          </a:bodyPr>
+          <a:lstStyle/>
+          <a:p>
+            <a:pPr algn="ctr"/>
+            <a:endParaRPr lang="zh-CN" altLang="en-US" dirty="0">
+              <a:latin typeface="微软雅黑" pitchFamily="34" charset="-122"/>
+              <a:ea typeface="微软雅黑" pitchFamily="34" charset="-122"/>
+            </a:endParaRPr>
+          </a:p>
+        </p:txBody>
+      </p:sp>
+      <p:sp>
+        <p:nvSpPr>
+          <p:cNvPr id="205" name="椭圆 204">
+            <a:extLst>
+              <a:ext uri="{FF2B5EF4-FFF2-40B4-BE49-F238E27FC236}">
+                <a16:creationId xmlns:a16="http://schemas.microsoft.com/office/drawing/2014/main" id="{E48441C2-3D21-2E16-86CC-3F22EB478F1C}"/>
+              </a:ext>
+            </a:extLst>
+          </p:cNvPr>
+          <p:cNvSpPr>
+            <a:spLocks noChangeAspect="1"/>
+          </p:cNvSpPr>
+          <p:nvPr/>
+        </p:nvSpPr>
+        <p:spPr>
+          <a:xfrm>
+            <a:off x="2635639" y="1558701"/>
+            <a:ext cx="144000" cy="144000"/>
+          </a:xfrm>
+          <a:prstGeom prst="ellipse">
+            <a:avLst/>
+          </a:prstGeom>
+          <a:ln>
+            <a:solidFill>
+              <a:schemeClr val="tx1"/>
+            </a:solidFill>
+          </a:ln>
+        </p:spPr>
+        <p:txBody>
+          <a:bodyPr wrap="square" rtlCol="0" anchor="ctr">
+            <a:noAutofit/>
+          </a:bodyPr>
+          <a:lstStyle/>
+          <a:p>
+            <a:pPr algn="ctr"/>
+            <a:endParaRPr lang="zh-CN" altLang="en-US" dirty="0">
+              <a:latin typeface="微软雅黑" pitchFamily="34" charset="-122"/>
+              <a:ea typeface="微软雅黑" pitchFamily="34" charset="-122"/>
+            </a:endParaRPr>
+          </a:p>
+        </p:txBody>
+      </p:sp>
+      <p:sp>
+        <p:nvSpPr>
+          <p:cNvPr id="207" name="椭圆 206">
+            <a:extLst>
+              <a:ext uri="{FF2B5EF4-FFF2-40B4-BE49-F238E27FC236}">
+                <a16:creationId xmlns:a16="http://schemas.microsoft.com/office/drawing/2014/main" id="{C156C5F0-CAD0-269B-3D68-032EB8DB2F15}"/>
+              </a:ext>
+            </a:extLst>
+          </p:cNvPr>
+          <p:cNvSpPr>
+            <a:spLocks noChangeAspect="1"/>
+          </p:cNvSpPr>
+          <p:nvPr/>
+        </p:nvSpPr>
+        <p:spPr>
+          <a:xfrm>
+            <a:off x="3300585" y="1558701"/>
+            <a:ext cx="144000" cy="144000"/>
+          </a:xfrm>
+          <a:prstGeom prst="ellipse">
+            <a:avLst/>
+          </a:prstGeom>
+          <a:ln>
+            <a:solidFill>
+              <a:schemeClr val="tx1"/>
+            </a:solidFill>
+          </a:ln>
+        </p:spPr>
+        <p:txBody>
+          <a:bodyPr wrap="square" rtlCol="0" anchor="ctr">
+            <a:noAutofit/>
+          </a:bodyPr>
+          <a:lstStyle/>
+          <a:p>
+            <a:pPr algn="ctr"/>
+            <a:endParaRPr lang="zh-CN" altLang="en-US" dirty="0">
+              <a:latin typeface="微软雅黑" pitchFamily="34" charset="-122"/>
+              <a:ea typeface="微软雅黑" pitchFamily="34" charset="-122"/>
+            </a:endParaRPr>
+          </a:p>
+        </p:txBody>
+      </p:sp>
+      <p:sp>
+        <p:nvSpPr>
+          <p:cNvPr id="209" name="椭圆 208">
+            <a:extLst>
+              <a:ext uri="{FF2B5EF4-FFF2-40B4-BE49-F238E27FC236}">
+                <a16:creationId xmlns:a16="http://schemas.microsoft.com/office/drawing/2014/main" id="{DB05BBA1-949D-DFFA-1F68-7B792957BF7C}"/>
+              </a:ext>
+            </a:extLst>
+          </p:cNvPr>
+          <p:cNvSpPr>
+            <a:spLocks noChangeAspect="1"/>
+          </p:cNvSpPr>
+          <p:nvPr/>
+        </p:nvSpPr>
+        <p:spPr>
+          <a:xfrm>
+            <a:off x="640804" y="4427032"/>
+            <a:ext cx="144000" cy="144000"/>
+          </a:xfrm>
+          <a:prstGeom prst="ellipse">
+            <a:avLst/>
+          </a:prstGeom>
+          <a:ln>
+            <a:solidFill>
+              <a:schemeClr val="tx1"/>
+            </a:solidFill>
+          </a:ln>
+        </p:spPr>
+        <p:txBody>
+          <a:bodyPr wrap="square" rtlCol="0" anchor="ctr">
+            <a:noAutofit/>
+          </a:bodyPr>
+          <a:lstStyle/>
+          <a:p>
+            <a:pPr algn="ctr"/>
+            <a:endParaRPr lang="zh-CN" altLang="en-US" dirty="0">
+              <a:latin typeface="微软雅黑" pitchFamily="34" charset="-122"/>
+              <a:ea typeface="微软雅黑" pitchFamily="34" charset="-122"/>
+            </a:endParaRPr>
+          </a:p>
+        </p:txBody>
+      </p:sp>
+      <p:sp>
+        <p:nvSpPr>
+          <p:cNvPr id="211" name="椭圆 210">
+            <a:extLst>
+              <a:ext uri="{FF2B5EF4-FFF2-40B4-BE49-F238E27FC236}">
+                <a16:creationId xmlns:a16="http://schemas.microsoft.com/office/drawing/2014/main" id="{8BAE2CEC-2649-0B4B-A809-4AF3935BD2CA}"/>
+              </a:ext>
+            </a:extLst>
+          </p:cNvPr>
+          <p:cNvSpPr>
+            <a:spLocks noChangeAspect="1"/>
+          </p:cNvSpPr>
+          <p:nvPr/>
+        </p:nvSpPr>
+        <p:spPr>
+          <a:xfrm>
+            <a:off x="1305749" y="4427032"/>
+            <a:ext cx="144000" cy="144000"/>
+          </a:xfrm>
+          <a:prstGeom prst="ellipse">
+            <a:avLst/>
+          </a:prstGeom>
+          <a:ln>
+            <a:solidFill>
+              <a:schemeClr val="tx1"/>
+            </a:solidFill>
+          </a:ln>
+        </p:spPr>
+        <p:txBody>
+          <a:bodyPr wrap="square" rtlCol="0" anchor="ctr">
+            <a:noAutofit/>
+          </a:bodyPr>
+          <a:lstStyle/>
+          <a:p>
+            <a:pPr algn="ctr"/>
+            <a:endParaRPr lang="zh-CN" altLang="en-US" dirty="0">
+              <a:latin typeface="微软雅黑" pitchFamily="34" charset="-122"/>
+              <a:ea typeface="微软雅黑" pitchFamily="34" charset="-122"/>
+            </a:endParaRPr>
+          </a:p>
+        </p:txBody>
+      </p:sp>
+      <p:sp>
+        <p:nvSpPr>
+          <p:cNvPr id="213" name="椭圆 212">
+            <a:extLst>
+              <a:ext uri="{FF2B5EF4-FFF2-40B4-BE49-F238E27FC236}">
+                <a16:creationId xmlns:a16="http://schemas.microsoft.com/office/drawing/2014/main" id="{7AC68F19-173E-AFC8-BBAF-7BFA71588C36}"/>
+              </a:ext>
+            </a:extLst>
+          </p:cNvPr>
+          <p:cNvSpPr>
+            <a:spLocks noChangeAspect="1"/>
+          </p:cNvSpPr>
+          <p:nvPr/>
+        </p:nvSpPr>
+        <p:spPr>
+          <a:xfrm>
+            <a:off x="1970694" y="4427032"/>
+            <a:ext cx="144000" cy="144000"/>
+          </a:xfrm>
+          <a:prstGeom prst="ellipse">
+            <a:avLst/>
+          </a:prstGeom>
+          <a:ln>
+            <a:solidFill>
+              <a:schemeClr val="tx1"/>
+            </a:solidFill>
+          </a:ln>
+        </p:spPr>
+        <p:txBody>
+          <a:bodyPr wrap="square" rtlCol="0" anchor="ctr">
+            <a:noAutofit/>
+          </a:bodyPr>
+          <a:lstStyle/>
+          <a:p>
+            <a:pPr algn="ctr"/>
+            <a:endParaRPr lang="zh-CN" altLang="en-US" dirty="0">
+              <a:latin typeface="微软雅黑" pitchFamily="34" charset="-122"/>
+              <a:ea typeface="微软雅黑" pitchFamily="34" charset="-122"/>
+            </a:endParaRPr>
+          </a:p>
+        </p:txBody>
+      </p:sp>
+      <p:sp>
+        <p:nvSpPr>
+          <p:cNvPr id="215" name="椭圆 214">
+            <a:extLst>
+              <a:ext uri="{FF2B5EF4-FFF2-40B4-BE49-F238E27FC236}">
+                <a16:creationId xmlns:a16="http://schemas.microsoft.com/office/drawing/2014/main" id="{1E0E8712-F37B-CA2E-1914-53CA42F68C15}"/>
+              </a:ext>
+            </a:extLst>
+          </p:cNvPr>
+          <p:cNvSpPr>
+            <a:spLocks noChangeAspect="1"/>
+          </p:cNvSpPr>
+          <p:nvPr/>
+        </p:nvSpPr>
+        <p:spPr>
+          <a:xfrm>
+            <a:off x="2635639" y="4427032"/>
+            <a:ext cx="144000" cy="144000"/>
+          </a:xfrm>
+          <a:prstGeom prst="ellipse">
+            <a:avLst/>
+          </a:prstGeom>
+          <a:ln>
+            <a:solidFill>
+              <a:schemeClr val="tx1"/>
+            </a:solidFill>
+          </a:ln>
+        </p:spPr>
+        <p:txBody>
+          <a:bodyPr wrap="square" rtlCol="0" anchor="ctr">
+            <a:noAutofit/>
+          </a:bodyPr>
+          <a:lstStyle/>
+          <a:p>
+            <a:pPr algn="ctr"/>
+            <a:endParaRPr lang="zh-CN" altLang="en-US" dirty="0">
+              <a:latin typeface="微软雅黑" pitchFamily="34" charset="-122"/>
+              <a:ea typeface="微软雅黑" pitchFamily="34" charset="-122"/>
+            </a:endParaRPr>
+          </a:p>
+        </p:txBody>
+      </p:sp>
+      <p:sp>
+        <p:nvSpPr>
+          <p:cNvPr id="217" name="椭圆 216">
+            <a:extLst>
+              <a:ext uri="{FF2B5EF4-FFF2-40B4-BE49-F238E27FC236}">
+                <a16:creationId xmlns:a16="http://schemas.microsoft.com/office/drawing/2014/main" id="{D382BA90-43F8-AB57-37A4-05EA46D0648C}"/>
+              </a:ext>
+            </a:extLst>
+          </p:cNvPr>
+          <p:cNvSpPr>
+            <a:spLocks noChangeAspect="1"/>
+          </p:cNvSpPr>
+          <p:nvPr/>
+        </p:nvSpPr>
+        <p:spPr>
+          <a:xfrm>
+            <a:off x="3300585" y="4427032"/>
+            <a:ext cx="144000" cy="144000"/>
+          </a:xfrm>
+          <a:prstGeom prst="ellipse">
+            <a:avLst/>
+          </a:prstGeom>
+          <a:ln>
+            <a:solidFill>
+              <a:schemeClr val="tx1"/>
+            </a:solidFill>
+          </a:ln>
+        </p:spPr>
+        <p:txBody>
+          <a:bodyPr wrap="square" rtlCol="0" anchor="ctr">
+            <a:noAutofit/>
+          </a:bodyPr>
+          <a:lstStyle/>
+          <a:p>
+            <a:pPr algn="ctr"/>
+            <a:endParaRPr lang="zh-CN" altLang="en-US" dirty="0">
+              <a:latin typeface="微软雅黑" pitchFamily="34" charset="-122"/>
+              <a:ea typeface="微软雅黑" pitchFamily="34" charset="-122"/>
+            </a:endParaRPr>
+          </a:p>
+        </p:txBody>
+      </p:sp>
+      <p:sp>
+        <p:nvSpPr>
+          <p:cNvPr id="219" name="椭圆 218">
+            <a:extLst>
+              <a:ext uri="{FF2B5EF4-FFF2-40B4-BE49-F238E27FC236}">
+                <a16:creationId xmlns:a16="http://schemas.microsoft.com/office/drawing/2014/main" id="{B74B914F-56DF-7FE0-804F-4E0B55284502}"/>
+              </a:ext>
+            </a:extLst>
+          </p:cNvPr>
+          <p:cNvSpPr>
+            <a:spLocks noChangeAspect="1"/>
+          </p:cNvSpPr>
+          <p:nvPr/>
+        </p:nvSpPr>
+        <p:spPr>
+          <a:xfrm>
+            <a:off x="640804" y="4810438"/>
+            <a:ext cx="144000" cy="144000"/>
+          </a:xfrm>
+          <a:prstGeom prst="ellipse">
+            <a:avLst/>
+          </a:prstGeom>
+          <a:ln>
+            <a:solidFill>
+              <a:schemeClr val="tx1"/>
+            </a:solidFill>
+          </a:ln>
+        </p:spPr>
+        <p:txBody>
+          <a:bodyPr wrap="square" rtlCol="0" anchor="ctr">
+            <a:noAutofit/>
+          </a:bodyPr>
+          <a:lstStyle/>
+          <a:p>
+            <a:pPr algn="ctr"/>
+            <a:endParaRPr lang="zh-CN" altLang="en-US" dirty="0">
+              <a:latin typeface="微软雅黑" pitchFamily="34" charset="-122"/>
+              <a:ea typeface="微软雅黑" pitchFamily="34" charset="-122"/>
+            </a:endParaRPr>
+          </a:p>
+        </p:txBody>
+      </p:sp>
+      <p:sp>
+        <p:nvSpPr>
+          <p:cNvPr id="221" name="椭圆 220">
+            <a:extLst>
+              <a:ext uri="{FF2B5EF4-FFF2-40B4-BE49-F238E27FC236}">
+                <a16:creationId xmlns:a16="http://schemas.microsoft.com/office/drawing/2014/main" id="{51E1FFC9-EADC-38B6-930A-3BB491C5C51E}"/>
+              </a:ext>
+            </a:extLst>
+          </p:cNvPr>
+          <p:cNvSpPr>
+            <a:spLocks noChangeAspect="1"/>
+          </p:cNvSpPr>
+          <p:nvPr/>
+        </p:nvSpPr>
+        <p:spPr>
+          <a:xfrm>
+            <a:off x="1305749" y="4810438"/>
+            <a:ext cx="144000" cy="144000"/>
+          </a:xfrm>
+          <a:prstGeom prst="ellipse">
+            <a:avLst/>
+          </a:prstGeom>
+          <a:ln>
+            <a:solidFill>
+              <a:schemeClr val="tx1"/>
+            </a:solidFill>
+          </a:ln>
+        </p:spPr>
+        <p:txBody>
+          <a:bodyPr wrap="square" rtlCol="0" anchor="ctr">
+            <a:noAutofit/>
+          </a:bodyPr>
+          <a:lstStyle/>
+          <a:p>
+            <a:pPr algn="ctr"/>
+            <a:endParaRPr lang="zh-CN" altLang="en-US" dirty="0">
+              <a:latin typeface="微软雅黑" pitchFamily="34" charset="-122"/>
+              <a:ea typeface="微软雅黑" pitchFamily="34" charset="-122"/>
+            </a:endParaRPr>
+          </a:p>
+        </p:txBody>
+      </p:sp>
+      <p:sp>
+        <p:nvSpPr>
+          <p:cNvPr id="223" name="椭圆 222">
+            <a:extLst>
+              <a:ext uri="{FF2B5EF4-FFF2-40B4-BE49-F238E27FC236}">
+                <a16:creationId xmlns:a16="http://schemas.microsoft.com/office/drawing/2014/main" id="{378EB88A-3CE9-5A2E-D1A9-E1DF088A7DC3}"/>
+              </a:ext>
+            </a:extLst>
+          </p:cNvPr>
+          <p:cNvSpPr>
+            <a:spLocks noChangeAspect="1"/>
+          </p:cNvSpPr>
+          <p:nvPr/>
+        </p:nvSpPr>
+        <p:spPr>
+          <a:xfrm>
+            <a:off x="1970694" y="4810438"/>
+            <a:ext cx="144000" cy="144000"/>
+          </a:xfrm>
+          <a:prstGeom prst="ellipse">
+            <a:avLst/>
+          </a:prstGeom>
+          <a:ln>
+            <a:solidFill>
+              <a:schemeClr val="tx1"/>
+            </a:solidFill>
+          </a:ln>
+        </p:spPr>
+        <p:txBody>
+          <a:bodyPr wrap="square" rtlCol="0" anchor="ctr">
+            <a:noAutofit/>
+          </a:bodyPr>
+          <a:lstStyle/>
+          <a:p>
+            <a:pPr algn="ctr"/>
+            <a:endParaRPr lang="zh-CN" altLang="en-US" dirty="0">
+              <a:latin typeface="微软雅黑" pitchFamily="34" charset="-122"/>
+              <a:ea typeface="微软雅黑" pitchFamily="34" charset="-122"/>
+            </a:endParaRPr>
+          </a:p>
+        </p:txBody>
+      </p:sp>
+      <p:sp>
+        <p:nvSpPr>
+          <p:cNvPr id="225" name="椭圆 224">
+            <a:extLst>
+              <a:ext uri="{FF2B5EF4-FFF2-40B4-BE49-F238E27FC236}">
+                <a16:creationId xmlns:a16="http://schemas.microsoft.com/office/drawing/2014/main" id="{0B0880BB-2774-F40B-E2F7-AE883107B49B}"/>
+              </a:ext>
+            </a:extLst>
+          </p:cNvPr>
+          <p:cNvSpPr>
+            <a:spLocks noChangeAspect="1"/>
+          </p:cNvSpPr>
+          <p:nvPr/>
+        </p:nvSpPr>
+        <p:spPr>
+          <a:xfrm>
+            <a:off x="2635639" y="4810438"/>
+            <a:ext cx="144000" cy="144000"/>
+          </a:xfrm>
+          <a:prstGeom prst="ellipse">
+            <a:avLst/>
+          </a:prstGeom>
+          <a:ln>
+            <a:solidFill>
+              <a:schemeClr val="tx1"/>
+            </a:solidFill>
+          </a:ln>
+        </p:spPr>
+        <p:txBody>
+          <a:bodyPr wrap="square" rtlCol="0" anchor="ctr">
+            <a:noAutofit/>
+          </a:bodyPr>
+          <a:lstStyle/>
+          <a:p>
+            <a:pPr algn="ctr"/>
+            <a:endParaRPr lang="zh-CN" altLang="en-US" dirty="0">
+              <a:latin typeface="微软雅黑" pitchFamily="34" charset="-122"/>
+              <a:ea typeface="微软雅黑" pitchFamily="34" charset="-122"/>
+            </a:endParaRPr>
+          </a:p>
+        </p:txBody>
+      </p:sp>
+      <p:sp>
+        <p:nvSpPr>
+          <p:cNvPr id="227" name="椭圆 226">
+            <a:extLst>
+              <a:ext uri="{FF2B5EF4-FFF2-40B4-BE49-F238E27FC236}">
+                <a16:creationId xmlns:a16="http://schemas.microsoft.com/office/drawing/2014/main" id="{AC045127-9798-226E-7C04-B80D880354A3}"/>
+              </a:ext>
+            </a:extLst>
+          </p:cNvPr>
+          <p:cNvSpPr>
+            <a:spLocks noChangeAspect="1"/>
+          </p:cNvSpPr>
+          <p:nvPr/>
+        </p:nvSpPr>
+        <p:spPr>
+          <a:xfrm>
+            <a:off x="3300585" y="4810438"/>
+            <a:ext cx="144000" cy="144000"/>
+          </a:xfrm>
+          <a:prstGeom prst="ellipse">
+            <a:avLst/>
+          </a:prstGeom>
+          <a:ln>
+            <a:solidFill>
+              <a:schemeClr val="tx1"/>
+            </a:solidFill>
+          </a:ln>
+        </p:spPr>
+        <p:txBody>
+          <a:bodyPr wrap="square" rtlCol="0" anchor="ctr">
+            <a:noAutofit/>
+          </a:bodyPr>
+          <a:lstStyle/>
+          <a:p>
+            <a:pPr algn="ctr"/>
+            <a:endParaRPr lang="zh-CN" altLang="en-US" dirty="0">
+              <a:latin typeface="微软雅黑" pitchFamily="34" charset="-122"/>
+              <a:ea typeface="微软雅黑" pitchFamily="34" charset="-122"/>
+            </a:endParaRPr>
+          </a:p>
+        </p:txBody>
+      </p:sp>
+      <p:sp>
+        <p:nvSpPr>
+          <p:cNvPr id="229" name="椭圆 228">
+            <a:extLst>
+              <a:ext uri="{FF2B5EF4-FFF2-40B4-BE49-F238E27FC236}">
+                <a16:creationId xmlns:a16="http://schemas.microsoft.com/office/drawing/2014/main" id="{22B11C40-0B97-CF2F-5346-1668BA2C0DC3}"/>
+              </a:ext>
+            </a:extLst>
+          </p:cNvPr>
+          <p:cNvSpPr>
+            <a:spLocks noChangeAspect="1"/>
+          </p:cNvSpPr>
+          <p:nvPr/>
+        </p:nvSpPr>
+        <p:spPr>
+          <a:xfrm>
+            <a:off x="640804" y="2773090"/>
+            <a:ext cx="144000" cy="144000"/>
+          </a:xfrm>
+          <a:prstGeom prst="ellipse">
+            <a:avLst/>
+          </a:prstGeom>
+          <a:ln>
+            <a:solidFill>
+              <a:schemeClr val="tx1"/>
+            </a:solidFill>
+          </a:ln>
+        </p:spPr>
+        <p:txBody>
+          <a:bodyPr wrap="square" rtlCol="0" anchor="ctr">
+            <a:noAutofit/>
+          </a:bodyPr>
+          <a:lstStyle/>
+          <a:p>
+            <a:pPr algn="ctr"/>
+            <a:endParaRPr lang="zh-CN" altLang="en-US" dirty="0">
+              <a:latin typeface="微软雅黑" pitchFamily="34" charset="-122"/>
+              <a:ea typeface="微软雅黑" pitchFamily="34" charset="-122"/>
+            </a:endParaRPr>
+          </a:p>
+        </p:txBody>
+      </p:sp>
+      <p:sp>
+        <p:nvSpPr>
+          <p:cNvPr id="231" name="椭圆 230">
+            <a:extLst>
+              <a:ext uri="{FF2B5EF4-FFF2-40B4-BE49-F238E27FC236}">
+                <a16:creationId xmlns:a16="http://schemas.microsoft.com/office/drawing/2014/main" id="{9C7AB634-115D-9EF4-8875-FDE614BFCDC1}"/>
+              </a:ext>
+            </a:extLst>
+          </p:cNvPr>
+          <p:cNvSpPr>
+            <a:spLocks noChangeAspect="1"/>
+          </p:cNvSpPr>
+          <p:nvPr/>
+        </p:nvSpPr>
+        <p:spPr>
+          <a:xfrm>
+            <a:off x="1305749" y="2773090"/>
+            <a:ext cx="144000" cy="144000"/>
+          </a:xfrm>
+          <a:prstGeom prst="ellipse">
+            <a:avLst/>
+          </a:prstGeom>
+          <a:ln>
+            <a:solidFill>
+              <a:schemeClr val="tx1"/>
+            </a:solidFill>
+          </a:ln>
+        </p:spPr>
+        <p:txBody>
+          <a:bodyPr wrap="square" rtlCol="0" anchor="ctr">
+            <a:noAutofit/>
+          </a:bodyPr>
+          <a:lstStyle/>
+          <a:p>
+            <a:pPr algn="ctr"/>
+            <a:endParaRPr lang="zh-CN" altLang="en-US" dirty="0">
+              <a:latin typeface="微软雅黑" pitchFamily="34" charset="-122"/>
+              <a:ea typeface="微软雅黑" pitchFamily="34" charset="-122"/>
+            </a:endParaRPr>
+          </a:p>
+        </p:txBody>
+      </p:sp>
+      <p:sp>
+        <p:nvSpPr>
+          <p:cNvPr id="233" name="椭圆 232">
+            <a:extLst>
+              <a:ext uri="{FF2B5EF4-FFF2-40B4-BE49-F238E27FC236}">
+                <a16:creationId xmlns:a16="http://schemas.microsoft.com/office/drawing/2014/main" id="{E52536AB-92E7-3961-601F-CF75CF84C534}"/>
+              </a:ext>
+            </a:extLst>
+          </p:cNvPr>
+          <p:cNvSpPr>
+            <a:spLocks noChangeAspect="1"/>
+          </p:cNvSpPr>
+          <p:nvPr/>
+        </p:nvSpPr>
+        <p:spPr>
+          <a:xfrm>
+            <a:off x="1970694" y="2773090"/>
+            <a:ext cx="144000" cy="144000"/>
+          </a:xfrm>
+          <a:prstGeom prst="ellipse">
+            <a:avLst/>
+          </a:prstGeom>
+          <a:ln>
+            <a:solidFill>
+              <a:schemeClr val="tx1"/>
+            </a:solidFill>
+          </a:ln>
+        </p:spPr>
+        <p:txBody>
+          <a:bodyPr wrap="square" rtlCol="0" anchor="ctr">
+            <a:noAutofit/>
+          </a:bodyPr>
+          <a:lstStyle/>
+          <a:p>
+            <a:pPr algn="ctr"/>
+            <a:endParaRPr lang="zh-CN" altLang="en-US" dirty="0">
+              <a:latin typeface="微软雅黑" pitchFamily="34" charset="-122"/>
+              <a:ea typeface="微软雅黑" pitchFamily="34" charset="-122"/>
+            </a:endParaRPr>
+          </a:p>
+        </p:txBody>
+      </p:sp>
+      <p:sp>
+        <p:nvSpPr>
+          <p:cNvPr id="235" name="椭圆 234">
+            <a:extLst>
+              <a:ext uri="{FF2B5EF4-FFF2-40B4-BE49-F238E27FC236}">
+                <a16:creationId xmlns:a16="http://schemas.microsoft.com/office/drawing/2014/main" id="{D6B2A118-F49C-0474-CC0B-FAE0DD2A3634}"/>
+              </a:ext>
+            </a:extLst>
+          </p:cNvPr>
+          <p:cNvSpPr>
+            <a:spLocks noChangeAspect="1"/>
+          </p:cNvSpPr>
+          <p:nvPr/>
+        </p:nvSpPr>
+        <p:spPr>
+          <a:xfrm>
+            <a:off x="2635639" y="2773090"/>
+            <a:ext cx="144000" cy="144000"/>
+          </a:xfrm>
+          <a:prstGeom prst="ellipse">
+            <a:avLst/>
+          </a:prstGeom>
+          <a:ln>
+            <a:solidFill>
+              <a:schemeClr val="tx1"/>
+            </a:solidFill>
+          </a:ln>
+        </p:spPr>
+        <p:txBody>
+          <a:bodyPr wrap="square" rtlCol="0" anchor="ctr">
+            <a:noAutofit/>
+          </a:bodyPr>
+          <a:lstStyle/>
+          <a:p>
+            <a:pPr algn="ctr"/>
+            <a:endParaRPr lang="zh-CN" altLang="en-US" dirty="0">
+              <a:latin typeface="微软雅黑" pitchFamily="34" charset="-122"/>
+              <a:ea typeface="微软雅黑" pitchFamily="34" charset="-122"/>
+            </a:endParaRPr>
+          </a:p>
+        </p:txBody>
+      </p:sp>
+      <p:sp>
+        <p:nvSpPr>
+          <p:cNvPr id="237" name="椭圆 236">
+            <a:extLst>
+              <a:ext uri="{FF2B5EF4-FFF2-40B4-BE49-F238E27FC236}">
+                <a16:creationId xmlns:a16="http://schemas.microsoft.com/office/drawing/2014/main" id="{D64D1DF6-D082-29CB-5765-5DC7BDED8504}"/>
+              </a:ext>
+            </a:extLst>
+          </p:cNvPr>
+          <p:cNvSpPr>
+            <a:spLocks noChangeAspect="1"/>
+          </p:cNvSpPr>
+          <p:nvPr/>
+        </p:nvSpPr>
+        <p:spPr>
+          <a:xfrm>
+            <a:off x="3300585" y="2773090"/>
+            <a:ext cx="144000" cy="144000"/>
+          </a:xfrm>
+          <a:prstGeom prst="ellipse">
+            <a:avLst/>
+          </a:prstGeom>
+          <a:ln>
+            <a:solidFill>
+              <a:schemeClr val="tx1"/>
+            </a:solidFill>
+          </a:ln>
+        </p:spPr>
+        <p:txBody>
+          <a:bodyPr wrap="square" rtlCol="0" anchor="ctr">
+            <a:noAutofit/>
+          </a:bodyPr>
+          <a:lstStyle/>
+          <a:p>
+            <a:pPr algn="ctr"/>
+            <a:endParaRPr lang="zh-CN" altLang="en-US" dirty="0">
+              <a:latin typeface="微软雅黑" pitchFamily="34" charset="-122"/>
+              <a:ea typeface="微软雅黑" pitchFamily="34" charset="-122"/>
+            </a:endParaRPr>
+          </a:p>
+        </p:txBody>
+      </p:sp>
+      <p:sp>
+        <p:nvSpPr>
+          <p:cNvPr id="239" name="椭圆 238">
+            <a:extLst>
+              <a:ext uri="{FF2B5EF4-FFF2-40B4-BE49-F238E27FC236}">
+                <a16:creationId xmlns:a16="http://schemas.microsoft.com/office/drawing/2014/main" id="{B9595FFB-DCF0-D969-4CDD-D0213E712D57}"/>
+              </a:ext>
+            </a:extLst>
+          </p:cNvPr>
+          <p:cNvSpPr>
+            <a:spLocks noChangeAspect="1"/>
+          </p:cNvSpPr>
+          <p:nvPr/>
+        </p:nvSpPr>
+        <p:spPr>
+          <a:xfrm>
+            <a:off x="640804" y="3156496"/>
+            <a:ext cx="144000" cy="144000"/>
+          </a:xfrm>
+          <a:prstGeom prst="ellipse">
+            <a:avLst/>
+          </a:prstGeom>
+          <a:ln>
+            <a:solidFill>
+              <a:schemeClr val="tx1"/>
+            </a:solidFill>
+          </a:ln>
+        </p:spPr>
+        <p:txBody>
+          <a:bodyPr wrap="square" rtlCol="0" anchor="ctr">
+            <a:noAutofit/>
+          </a:bodyPr>
+          <a:lstStyle/>
+          <a:p>
+            <a:pPr algn="ctr"/>
+            <a:endParaRPr lang="zh-CN" altLang="en-US" dirty="0">
+              <a:latin typeface="微软雅黑" pitchFamily="34" charset="-122"/>
+              <a:ea typeface="微软雅黑" pitchFamily="34" charset="-122"/>
+            </a:endParaRPr>
+          </a:p>
+        </p:txBody>
+      </p:sp>
+      <p:sp>
+        <p:nvSpPr>
+          <p:cNvPr id="241" name="椭圆 240">
+            <a:extLst>
+              <a:ext uri="{FF2B5EF4-FFF2-40B4-BE49-F238E27FC236}">
+                <a16:creationId xmlns:a16="http://schemas.microsoft.com/office/drawing/2014/main" id="{83F98790-AB7B-FBEF-D4FF-029350AE045B}"/>
+              </a:ext>
+            </a:extLst>
+          </p:cNvPr>
+          <p:cNvSpPr>
+            <a:spLocks noChangeAspect="1"/>
+          </p:cNvSpPr>
+          <p:nvPr/>
+        </p:nvSpPr>
+        <p:spPr>
+          <a:xfrm>
+            <a:off x="1305749" y="3156496"/>
+            <a:ext cx="144000" cy="144000"/>
+          </a:xfrm>
+          <a:prstGeom prst="ellipse">
+            <a:avLst/>
+          </a:prstGeom>
+          <a:ln>
+            <a:solidFill>
+              <a:schemeClr val="tx1"/>
+            </a:solidFill>
+          </a:ln>
+        </p:spPr>
+        <p:txBody>
+          <a:bodyPr wrap="square" rtlCol="0" anchor="ctr">
+            <a:noAutofit/>
+          </a:bodyPr>
+          <a:lstStyle/>
+          <a:p>
+            <a:pPr algn="ctr"/>
+            <a:endParaRPr lang="zh-CN" altLang="en-US" dirty="0">
+              <a:latin typeface="微软雅黑" pitchFamily="34" charset="-122"/>
+              <a:ea typeface="微软雅黑" pitchFamily="34" charset="-122"/>
+            </a:endParaRPr>
+          </a:p>
+        </p:txBody>
+      </p:sp>
+      <p:sp>
+        <p:nvSpPr>
+          <p:cNvPr id="243" name="椭圆 242">
+            <a:extLst>
+              <a:ext uri="{FF2B5EF4-FFF2-40B4-BE49-F238E27FC236}">
+                <a16:creationId xmlns:a16="http://schemas.microsoft.com/office/drawing/2014/main" id="{B410717F-5CFC-F9F0-B671-82968A4D6923}"/>
+              </a:ext>
+            </a:extLst>
+          </p:cNvPr>
+          <p:cNvSpPr>
+            <a:spLocks noChangeAspect="1"/>
+          </p:cNvSpPr>
+          <p:nvPr/>
+        </p:nvSpPr>
+        <p:spPr>
+          <a:xfrm>
+            <a:off x="1970694" y="3156496"/>
+            <a:ext cx="144000" cy="144000"/>
+          </a:xfrm>
+          <a:prstGeom prst="ellipse">
+            <a:avLst/>
+          </a:prstGeom>
+          <a:ln>
+            <a:solidFill>
+              <a:schemeClr val="tx1"/>
+            </a:solidFill>
+          </a:ln>
+        </p:spPr>
+        <p:txBody>
+          <a:bodyPr wrap="square" rtlCol="0" anchor="ctr">
+            <a:noAutofit/>
+          </a:bodyPr>
+          <a:lstStyle/>
+          <a:p>
+            <a:pPr algn="ctr"/>
+            <a:endParaRPr lang="zh-CN" altLang="en-US" dirty="0">
+              <a:latin typeface="微软雅黑" pitchFamily="34" charset="-122"/>
+              <a:ea typeface="微软雅黑" pitchFamily="34" charset="-122"/>
+            </a:endParaRPr>
+          </a:p>
+        </p:txBody>
+      </p:sp>
+      <p:sp>
+        <p:nvSpPr>
+          <p:cNvPr id="245" name="椭圆 244">
+            <a:extLst>
+              <a:ext uri="{FF2B5EF4-FFF2-40B4-BE49-F238E27FC236}">
+                <a16:creationId xmlns:a16="http://schemas.microsoft.com/office/drawing/2014/main" id="{F5692BFB-79BE-1E6C-1F06-D5A3FBA6030C}"/>
+              </a:ext>
+            </a:extLst>
+          </p:cNvPr>
+          <p:cNvSpPr>
+            <a:spLocks noChangeAspect="1"/>
+          </p:cNvSpPr>
+          <p:nvPr/>
+        </p:nvSpPr>
+        <p:spPr>
+          <a:xfrm>
+            <a:off x="2635639" y="3156496"/>
+            <a:ext cx="144000" cy="144000"/>
+          </a:xfrm>
+          <a:prstGeom prst="ellipse">
+            <a:avLst/>
+          </a:prstGeom>
+          <a:ln>
+            <a:solidFill>
+              <a:schemeClr val="tx1"/>
+            </a:solidFill>
+          </a:ln>
+        </p:spPr>
+        <p:txBody>
+          <a:bodyPr wrap="square" rtlCol="0" anchor="ctr">
+            <a:noAutofit/>
+          </a:bodyPr>
+          <a:lstStyle/>
+          <a:p>
+            <a:pPr algn="ctr"/>
+            <a:endParaRPr lang="zh-CN" altLang="en-US" dirty="0">
+              <a:latin typeface="微软雅黑" pitchFamily="34" charset="-122"/>
+              <a:ea typeface="微软雅黑" pitchFamily="34" charset="-122"/>
+            </a:endParaRPr>
+          </a:p>
+        </p:txBody>
+      </p:sp>
+      <p:sp>
+        <p:nvSpPr>
+          <p:cNvPr id="247" name="椭圆 246">
+            <a:extLst>
+              <a:ext uri="{FF2B5EF4-FFF2-40B4-BE49-F238E27FC236}">
+                <a16:creationId xmlns:a16="http://schemas.microsoft.com/office/drawing/2014/main" id="{E3087945-5FD3-6994-37D7-645E557B2D1C}"/>
+              </a:ext>
+            </a:extLst>
+          </p:cNvPr>
+          <p:cNvSpPr>
+            <a:spLocks noChangeAspect="1"/>
+          </p:cNvSpPr>
+          <p:nvPr/>
+        </p:nvSpPr>
+        <p:spPr>
+          <a:xfrm>
+            <a:off x="3300585" y="3156496"/>
+            <a:ext cx="144000" cy="144000"/>
+          </a:xfrm>
+          <a:prstGeom prst="ellipse">
+            <a:avLst/>
+          </a:prstGeom>
+          <a:ln>
+            <a:solidFill>
+              <a:schemeClr val="tx1"/>
+            </a:solidFill>
+          </a:ln>
+        </p:spPr>
+        <p:txBody>
+          <a:bodyPr wrap="square" rtlCol="0" anchor="ctr">
+            <a:noAutofit/>
+          </a:bodyPr>
+          <a:lstStyle/>
+          <a:p>
+            <a:pPr algn="ctr"/>
+            <a:endParaRPr lang="zh-CN" altLang="en-US" dirty="0">
+              <a:latin typeface="微软雅黑" pitchFamily="34" charset="-122"/>
+              <a:ea typeface="微软雅黑" pitchFamily="34" charset="-122"/>
+            </a:endParaRPr>
+          </a:p>
+        </p:txBody>
+      </p:sp>
+      <p:sp>
+        <p:nvSpPr>
+          <p:cNvPr id="249" name="矩形 248">
+            <a:extLst>
+              <a:ext uri="{FF2B5EF4-FFF2-40B4-BE49-F238E27FC236}">
+                <a16:creationId xmlns:a16="http://schemas.microsoft.com/office/drawing/2014/main" id="{AD440BFA-7D18-7CD3-4B4A-4FA858951BFD}"/>
+              </a:ext>
+            </a:extLst>
+          </p:cNvPr>
+          <p:cNvSpPr/>
+          <p:nvPr/>
+        </p:nvSpPr>
+        <p:spPr>
+          <a:xfrm>
+            <a:off x="448299" y="2513208"/>
+            <a:ext cx="3229232" cy="1126155"/>
+          </a:xfrm>
+          <a:prstGeom prst="rect">
+            <a:avLst/>
+          </a:prstGeom>
+          <a:solidFill>
+            <a:schemeClr val="accent1">
+              <a:alpha val="20000"/>
+            </a:schemeClr>
+          </a:solidFill>
+          <a:ln>
+            <a:solidFill>
+              <a:schemeClr val="tx1"/>
+            </a:solidFill>
+          </a:ln>
+        </p:spPr>
+        <p:txBody>
+          <a:bodyPr wrap="square" rtlCol="0" anchor="ctr">
+            <a:noAutofit/>
+          </a:bodyPr>
+          <a:lstStyle/>
+          <a:p>
+            <a:pPr algn="ctr"/>
+            <a:endParaRPr lang="zh-CN" altLang="en-US" dirty="0">
+              <a:latin typeface="微软雅黑" pitchFamily="34" charset="-122"/>
+              <a:ea typeface="微软雅黑" pitchFamily="34" charset="-122"/>
+            </a:endParaRPr>
+          </a:p>
+        </p:txBody>
+      </p:sp>
+      <p:sp>
+        <p:nvSpPr>
+          <p:cNvPr id="251" name="矩形 250">
+            <a:extLst>
+              <a:ext uri="{FF2B5EF4-FFF2-40B4-BE49-F238E27FC236}">
+                <a16:creationId xmlns:a16="http://schemas.microsoft.com/office/drawing/2014/main" id="{F1643CC9-CEF4-E647-48D7-D0191E70C5AC}"/>
+              </a:ext>
+            </a:extLst>
+          </p:cNvPr>
+          <p:cNvSpPr/>
+          <p:nvPr/>
+        </p:nvSpPr>
+        <p:spPr>
+          <a:xfrm>
+            <a:off x="448299" y="4293880"/>
+            <a:ext cx="3229232" cy="1674796"/>
+          </a:xfrm>
+          <a:prstGeom prst="rect">
+            <a:avLst/>
+          </a:prstGeom>
+          <a:solidFill>
+            <a:schemeClr val="accent6">
+              <a:alpha val="20000"/>
+            </a:schemeClr>
+          </a:solidFill>
+          <a:ln>
+            <a:solidFill>
+              <a:schemeClr val="tx1"/>
+            </a:solidFill>
+          </a:ln>
+        </p:spPr>
+        <p:txBody>
+          <a:bodyPr wrap="square" rtlCol="0" anchor="ctr">
+            <a:noAutofit/>
+          </a:bodyPr>
+          <a:lstStyle/>
+          <a:p>
+            <a:pPr algn="ctr"/>
+            <a:endParaRPr lang="zh-CN" altLang="en-US" dirty="0">
+              <a:latin typeface="微软雅黑" pitchFamily="34" charset="-122"/>
+              <a:ea typeface="微软雅黑" pitchFamily="34" charset="-122"/>
+            </a:endParaRPr>
+          </a:p>
+        </p:txBody>
+      </p:sp>
+      <p:sp>
+        <p:nvSpPr>
+          <p:cNvPr id="253" name="矩形 252">
+            <a:extLst>
+              <a:ext uri="{FF2B5EF4-FFF2-40B4-BE49-F238E27FC236}">
+                <a16:creationId xmlns:a16="http://schemas.microsoft.com/office/drawing/2014/main" id="{6A85B696-CB61-7F32-FFCA-AF4AC22EB3E7}"/>
+              </a:ext>
+            </a:extLst>
+          </p:cNvPr>
+          <p:cNvSpPr/>
+          <p:nvPr/>
+        </p:nvSpPr>
+        <p:spPr>
+          <a:xfrm>
+            <a:off x="448299" y="1001437"/>
+            <a:ext cx="3229232" cy="890413"/>
+          </a:xfrm>
+          <a:prstGeom prst="rect">
+            <a:avLst/>
+          </a:prstGeom>
+          <a:solidFill>
+            <a:schemeClr val="bg1">
+              <a:lumMod val="50000"/>
+              <a:alpha val="20000"/>
+            </a:schemeClr>
+          </a:solidFill>
+          <a:ln>
+            <a:solidFill>
+              <a:schemeClr val="tx1"/>
+            </a:solidFill>
+          </a:ln>
+        </p:spPr>
+        <p:txBody>
+          <a:bodyPr wrap="square" rtlCol="0" anchor="ctr">
+            <a:noAutofit/>
+          </a:bodyPr>
+          <a:lstStyle/>
+          <a:p>
+            <a:pPr algn="ctr"/>
+            <a:endParaRPr lang="zh-CN" altLang="en-US" dirty="0">
+              <a:latin typeface="微软雅黑" pitchFamily="34" charset="-122"/>
+              <a:ea typeface="微软雅黑" pitchFamily="34" charset="-122"/>
+            </a:endParaRPr>
+          </a:p>
+        </p:txBody>
+      </p:sp>
+      <p:sp>
+        <p:nvSpPr>
+          <p:cNvPr id="255" name="椭圆 254">
+            <a:extLst>
+              <a:ext uri="{FF2B5EF4-FFF2-40B4-BE49-F238E27FC236}">
+                <a16:creationId xmlns:a16="http://schemas.microsoft.com/office/drawing/2014/main" id="{E682059E-D4B7-3378-DBF9-6521C8E9EFDA}"/>
+              </a:ext>
+            </a:extLst>
+          </p:cNvPr>
+          <p:cNvSpPr>
+            <a:spLocks noChangeAspect="1"/>
+          </p:cNvSpPr>
+          <p:nvPr/>
+        </p:nvSpPr>
+        <p:spPr>
+          <a:xfrm>
+            <a:off x="640804" y="5297270"/>
+            <a:ext cx="144000" cy="144000"/>
+          </a:xfrm>
+          <a:prstGeom prst="ellipse">
+            <a:avLst/>
+          </a:prstGeom>
+          <a:ln>
+            <a:solidFill>
+              <a:schemeClr val="tx1"/>
+            </a:solidFill>
+          </a:ln>
+        </p:spPr>
+        <p:txBody>
+          <a:bodyPr wrap="square" rtlCol="0" anchor="ctr">
+            <a:noAutofit/>
+          </a:bodyPr>
+          <a:lstStyle/>
+          <a:p>
+            <a:pPr algn="ctr"/>
+            <a:endParaRPr lang="zh-CN" altLang="en-US" dirty="0">
+              <a:latin typeface="微软雅黑" pitchFamily="34" charset="-122"/>
+              <a:ea typeface="微软雅黑" pitchFamily="34" charset="-122"/>
+            </a:endParaRPr>
+          </a:p>
+        </p:txBody>
+      </p:sp>
+      <p:sp>
+        <p:nvSpPr>
+          <p:cNvPr id="257" name="椭圆 256">
+            <a:extLst>
+              <a:ext uri="{FF2B5EF4-FFF2-40B4-BE49-F238E27FC236}">
+                <a16:creationId xmlns:a16="http://schemas.microsoft.com/office/drawing/2014/main" id="{A3C47E2D-CCE5-3539-CDED-F2DEDE258005}"/>
+              </a:ext>
+            </a:extLst>
+          </p:cNvPr>
+          <p:cNvSpPr>
+            <a:spLocks noChangeAspect="1"/>
+          </p:cNvSpPr>
+          <p:nvPr/>
+        </p:nvSpPr>
+        <p:spPr>
+          <a:xfrm>
+            <a:off x="1305749" y="5297270"/>
+            <a:ext cx="144000" cy="144000"/>
+          </a:xfrm>
+          <a:prstGeom prst="ellipse">
+            <a:avLst/>
+          </a:prstGeom>
+          <a:ln>
+            <a:solidFill>
+              <a:schemeClr val="tx1"/>
+            </a:solidFill>
+          </a:ln>
+        </p:spPr>
+        <p:txBody>
+          <a:bodyPr wrap="square" rtlCol="0" anchor="ctr">
+            <a:noAutofit/>
+          </a:bodyPr>
+          <a:lstStyle/>
+          <a:p>
+            <a:pPr algn="ctr"/>
+            <a:endParaRPr lang="zh-CN" altLang="en-US" dirty="0">
+              <a:latin typeface="微软雅黑" pitchFamily="34" charset="-122"/>
+              <a:ea typeface="微软雅黑" pitchFamily="34" charset="-122"/>
+            </a:endParaRPr>
+          </a:p>
+        </p:txBody>
+      </p:sp>
+      <p:sp>
+        <p:nvSpPr>
+          <p:cNvPr id="259" name="椭圆 258">
+            <a:extLst>
+              <a:ext uri="{FF2B5EF4-FFF2-40B4-BE49-F238E27FC236}">
+                <a16:creationId xmlns:a16="http://schemas.microsoft.com/office/drawing/2014/main" id="{CC896DE5-7123-5020-01DE-444A4D0D67B2}"/>
+              </a:ext>
+            </a:extLst>
+          </p:cNvPr>
+          <p:cNvSpPr>
+            <a:spLocks noChangeAspect="1"/>
+          </p:cNvSpPr>
+          <p:nvPr/>
+        </p:nvSpPr>
+        <p:spPr>
+          <a:xfrm>
+            <a:off x="1970694" y="5297270"/>
+            <a:ext cx="144000" cy="144000"/>
+          </a:xfrm>
+          <a:prstGeom prst="ellipse">
+            <a:avLst/>
+          </a:prstGeom>
+          <a:ln>
+            <a:solidFill>
+              <a:schemeClr val="tx1"/>
+            </a:solidFill>
+          </a:ln>
+        </p:spPr>
+        <p:txBody>
+          <a:bodyPr wrap="square" rtlCol="0" anchor="ctr">
+            <a:noAutofit/>
+          </a:bodyPr>
+          <a:lstStyle/>
+          <a:p>
+            <a:pPr algn="ctr"/>
+            <a:endParaRPr lang="zh-CN" altLang="en-US" dirty="0">
+              <a:latin typeface="微软雅黑" pitchFamily="34" charset="-122"/>
+              <a:ea typeface="微软雅黑" pitchFamily="34" charset="-122"/>
+            </a:endParaRPr>
+          </a:p>
+        </p:txBody>
+      </p:sp>
+      <p:sp>
+        <p:nvSpPr>
+          <p:cNvPr id="261" name="椭圆 260">
+            <a:extLst>
+              <a:ext uri="{FF2B5EF4-FFF2-40B4-BE49-F238E27FC236}">
+                <a16:creationId xmlns:a16="http://schemas.microsoft.com/office/drawing/2014/main" id="{1B6277DF-C778-0101-1059-6AFE065FC5BF}"/>
+              </a:ext>
+            </a:extLst>
+          </p:cNvPr>
+          <p:cNvSpPr>
+            <a:spLocks noChangeAspect="1"/>
+          </p:cNvSpPr>
+          <p:nvPr/>
+        </p:nvSpPr>
+        <p:spPr>
+          <a:xfrm>
+            <a:off x="2635639" y="5297270"/>
+            <a:ext cx="144000" cy="144000"/>
+          </a:xfrm>
+          <a:prstGeom prst="ellipse">
+            <a:avLst/>
+          </a:prstGeom>
+          <a:ln>
+            <a:solidFill>
+              <a:schemeClr val="tx1"/>
+            </a:solidFill>
+          </a:ln>
+        </p:spPr>
+        <p:txBody>
+          <a:bodyPr wrap="square" rtlCol="0" anchor="ctr">
+            <a:noAutofit/>
+          </a:bodyPr>
+          <a:lstStyle/>
+          <a:p>
+            <a:pPr algn="ctr"/>
+            <a:endParaRPr lang="zh-CN" altLang="en-US" dirty="0">
+              <a:latin typeface="微软雅黑" pitchFamily="34" charset="-122"/>
+              <a:ea typeface="微软雅黑" pitchFamily="34" charset="-122"/>
+            </a:endParaRPr>
+          </a:p>
+        </p:txBody>
+      </p:sp>
+      <p:sp>
+        <p:nvSpPr>
+          <p:cNvPr id="263" name="椭圆 262">
+            <a:extLst>
+              <a:ext uri="{FF2B5EF4-FFF2-40B4-BE49-F238E27FC236}">
+                <a16:creationId xmlns:a16="http://schemas.microsoft.com/office/drawing/2014/main" id="{4906CF88-0C04-4063-6A38-E001B7554648}"/>
+              </a:ext>
+            </a:extLst>
+          </p:cNvPr>
+          <p:cNvSpPr>
+            <a:spLocks noChangeAspect="1"/>
+          </p:cNvSpPr>
+          <p:nvPr/>
+        </p:nvSpPr>
+        <p:spPr>
+          <a:xfrm>
+            <a:off x="3300585" y="5297270"/>
+            <a:ext cx="144000" cy="144000"/>
+          </a:xfrm>
+          <a:prstGeom prst="ellipse">
+            <a:avLst/>
+          </a:prstGeom>
+          <a:ln>
+            <a:solidFill>
+              <a:schemeClr val="tx1"/>
+            </a:solidFill>
+          </a:ln>
+        </p:spPr>
+        <p:txBody>
+          <a:bodyPr wrap="square" rtlCol="0" anchor="ctr">
+            <a:noAutofit/>
+          </a:bodyPr>
+          <a:lstStyle/>
+          <a:p>
+            <a:pPr algn="ctr"/>
+            <a:endParaRPr lang="zh-CN" altLang="en-US" dirty="0">
+              <a:latin typeface="微软雅黑" pitchFamily="34" charset="-122"/>
+              <a:ea typeface="微软雅黑" pitchFamily="34" charset="-122"/>
+            </a:endParaRPr>
+          </a:p>
+        </p:txBody>
+      </p:sp>
+      <p:sp>
+        <p:nvSpPr>
+          <p:cNvPr id="265" name="椭圆 264">
+            <a:extLst>
+              <a:ext uri="{FF2B5EF4-FFF2-40B4-BE49-F238E27FC236}">
+                <a16:creationId xmlns:a16="http://schemas.microsoft.com/office/drawing/2014/main" id="{4026E040-6CC7-F58C-6B60-0AE963F9222F}"/>
+              </a:ext>
+            </a:extLst>
+          </p:cNvPr>
+          <p:cNvSpPr>
+            <a:spLocks noChangeAspect="1"/>
+          </p:cNvSpPr>
+          <p:nvPr/>
+        </p:nvSpPr>
+        <p:spPr>
+          <a:xfrm>
+            <a:off x="640804" y="5680676"/>
+            <a:ext cx="144000" cy="144000"/>
+          </a:xfrm>
+          <a:prstGeom prst="ellipse">
+            <a:avLst/>
+          </a:prstGeom>
+          <a:ln>
+            <a:solidFill>
+              <a:schemeClr val="tx1"/>
+            </a:solidFill>
+          </a:ln>
+        </p:spPr>
+        <p:txBody>
+          <a:bodyPr wrap="square" rtlCol="0" anchor="ctr">
+            <a:noAutofit/>
+          </a:bodyPr>
+          <a:lstStyle/>
+          <a:p>
+            <a:pPr algn="ctr"/>
+            <a:endParaRPr lang="zh-CN" altLang="en-US" dirty="0">
+              <a:latin typeface="微软雅黑" pitchFamily="34" charset="-122"/>
+              <a:ea typeface="微软雅黑" pitchFamily="34" charset="-122"/>
+            </a:endParaRPr>
+          </a:p>
+        </p:txBody>
+      </p:sp>
+      <p:sp>
+        <p:nvSpPr>
+          <p:cNvPr id="267" name="椭圆 266">
+            <a:extLst>
+              <a:ext uri="{FF2B5EF4-FFF2-40B4-BE49-F238E27FC236}">
+                <a16:creationId xmlns:a16="http://schemas.microsoft.com/office/drawing/2014/main" id="{C21F4797-8C7B-4679-B423-2CA38628B751}"/>
+              </a:ext>
+            </a:extLst>
+          </p:cNvPr>
+          <p:cNvSpPr>
+            <a:spLocks noChangeAspect="1"/>
+          </p:cNvSpPr>
+          <p:nvPr/>
+        </p:nvSpPr>
+        <p:spPr>
+          <a:xfrm>
+            <a:off x="1305749" y="5680676"/>
+            <a:ext cx="144000" cy="144000"/>
+          </a:xfrm>
+          <a:prstGeom prst="ellipse">
+            <a:avLst/>
+          </a:prstGeom>
+          <a:ln>
+            <a:solidFill>
+              <a:schemeClr val="tx1"/>
+            </a:solidFill>
+          </a:ln>
+        </p:spPr>
+        <p:txBody>
+          <a:bodyPr wrap="square" rtlCol="0" anchor="ctr">
+            <a:noAutofit/>
+          </a:bodyPr>
+          <a:lstStyle/>
+          <a:p>
+            <a:pPr algn="ctr"/>
+            <a:endParaRPr lang="zh-CN" altLang="en-US" dirty="0">
+              <a:latin typeface="微软雅黑" pitchFamily="34" charset="-122"/>
+              <a:ea typeface="微软雅黑" pitchFamily="34" charset="-122"/>
+            </a:endParaRPr>
+          </a:p>
+        </p:txBody>
+      </p:sp>
+      <p:sp>
+        <p:nvSpPr>
+          <p:cNvPr id="269" name="椭圆 268">
+            <a:extLst>
+              <a:ext uri="{FF2B5EF4-FFF2-40B4-BE49-F238E27FC236}">
+                <a16:creationId xmlns:a16="http://schemas.microsoft.com/office/drawing/2014/main" id="{E267BBCB-86F0-E9B2-E1BA-804CBD8FCD70}"/>
+              </a:ext>
+            </a:extLst>
+          </p:cNvPr>
+          <p:cNvSpPr>
+            <a:spLocks noChangeAspect="1"/>
+          </p:cNvSpPr>
+          <p:nvPr/>
+        </p:nvSpPr>
+        <p:spPr>
+          <a:xfrm>
+            <a:off x="1970694" y="5680676"/>
+            <a:ext cx="144000" cy="144000"/>
+          </a:xfrm>
+          <a:prstGeom prst="ellipse">
+            <a:avLst/>
+          </a:prstGeom>
+          <a:ln>
+            <a:solidFill>
+              <a:schemeClr val="tx1"/>
+            </a:solidFill>
+          </a:ln>
+        </p:spPr>
+        <p:txBody>
+          <a:bodyPr wrap="square" rtlCol="0" anchor="ctr">
+            <a:noAutofit/>
+          </a:bodyPr>
+          <a:lstStyle/>
+          <a:p>
+            <a:pPr algn="ctr"/>
+            <a:endParaRPr lang="zh-CN" altLang="en-US" dirty="0">
+              <a:latin typeface="微软雅黑" pitchFamily="34" charset="-122"/>
+              <a:ea typeface="微软雅黑" pitchFamily="34" charset="-122"/>
+            </a:endParaRPr>
+          </a:p>
+        </p:txBody>
+      </p:sp>
+      <p:sp>
+        <p:nvSpPr>
+          <p:cNvPr id="271" name="椭圆 270">
+            <a:extLst>
+              <a:ext uri="{FF2B5EF4-FFF2-40B4-BE49-F238E27FC236}">
+                <a16:creationId xmlns:a16="http://schemas.microsoft.com/office/drawing/2014/main" id="{3E79AAB6-C606-EF37-AC6D-7A28054393FD}"/>
+              </a:ext>
+            </a:extLst>
+          </p:cNvPr>
+          <p:cNvSpPr>
+            <a:spLocks noChangeAspect="1"/>
+          </p:cNvSpPr>
+          <p:nvPr/>
+        </p:nvSpPr>
+        <p:spPr>
+          <a:xfrm>
+            <a:off x="2635639" y="5680676"/>
+            <a:ext cx="144000" cy="144000"/>
+          </a:xfrm>
+          <a:prstGeom prst="ellipse">
+            <a:avLst/>
+          </a:prstGeom>
+          <a:ln>
+            <a:solidFill>
+              <a:schemeClr val="tx1"/>
+            </a:solidFill>
+          </a:ln>
+        </p:spPr>
+        <p:txBody>
+          <a:bodyPr wrap="square" rtlCol="0" anchor="ctr">
+            <a:noAutofit/>
+          </a:bodyPr>
+          <a:lstStyle/>
+          <a:p>
+            <a:pPr algn="ctr"/>
+            <a:endParaRPr lang="zh-CN" altLang="en-US" dirty="0">
+              <a:latin typeface="微软雅黑" pitchFamily="34" charset="-122"/>
+              <a:ea typeface="微软雅黑" pitchFamily="34" charset="-122"/>
+            </a:endParaRPr>
+          </a:p>
+        </p:txBody>
+      </p:sp>
+      <p:sp>
+        <p:nvSpPr>
+          <p:cNvPr id="273" name="椭圆 272">
+            <a:extLst>
+              <a:ext uri="{FF2B5EF4-FFF2-40B4-BE49-F238E27FC236}">
+                <a16:creationId xmlns:a16="http://schemas.microsoft.com/office/drawing/2014/main" id="{92AE9914-C501-09D8-33CD-A6272ED4C52D}"/>
+              </a:ext>
+            </a:extLst>
+          </p:cNvPr>
+          <p:cNvSpPr>
+            <a:spLocks noChangeAspect="1"/>
+          </p:cNvSpPr>
+          <p:nvPr/>
+        </p:nvSpPr>
+        <p:spPr>
+          <a:xfrm>
+            <a:off x="3300585" y="5680676"/>
+            <a:ext cx="144000" cy="144000"/>
+          </a:xfrm>
+          <a:prstGeom prst="ellipse">
+            <a:avLst/>
+          </a:prstGeom>
+          <a:ln>
+            <a:solidFill>
+              <a:schemeClr val="tx1"/>
+            </a:solidFill>
+          </a:ln>
+        </p:spPr>
+        <p:txBody>
+          <a:bodyPr wrap="square" rtlCol="0" anchor="ctr">
+            <a:noAutofit/>
+          </a:bodyPr>
+          <a:lstStyle/>
+          <a:p>
+            <a:pPr algn="ctr"/>
+            <a:endParaRPr lang="zh-CN" altLang="en-US" dirty="0">
+              <a:latin typeface="微软雅黑" pitchFamily="34" charset="-122"/>
+              <a:ea typeface="微软雅黑" pitchFamily="34" charset="-122"/>
+            </a:endParaRPr>
+          </a:p>
+        </p:txBody>
+      </p:sp>
+      <p:sp>
+        <p:nvSpPr>
+          <p:cNvPr id="295" name="椭圆 294">
+            <a:extLst>
+              <a:ext uri="{FF2B5EF4-FFF2-40B4-BE49-F238E27FC236}">
+                <a16:creationId xmlns:a16="http://schemas.microsoft.com/office/drawing/2014/main" id="{4CED8A3E-6F32-B26A-2EDD-BAE44E4D4B2C}"/>
+              </a:ext>
+            </a:extLst>
+          </p:cNvPr>
+          <p:cNvSpPr>
+            <a:spLocks noChangeAspect="1"/>
+          </p:cNvSpPr>
+          <p:nvPr/>
+        </p:nvSpPr>
+        <p:spPr>
+          <a:xfrm>
+            <a:off x="784804" y="2772477"/>
+            <a:ext cx="144000" cy="144000"/>
+          </a:xfrm>
+          <a:prstGeom prst="ellipse">
+            <a:avLst/>
+          </a:prstGeom>
+          <a:ln>
+            <a:solidFill>
+              <a:schemeClr val="tx1"/>
+            </a:solidFill>
+          </a:ln>
+        </p:spPr>
+        <p:txBody>
+          <a:bodyPr wrap="square" rtlCol="0" anchor="ctr">
+            <a:noAutofit/>
+          </a:bodyPr>
+          <a:lstStyle/>
+          <a:p>
+            <a:pPr algn="ctr"/>
+            <a:endParaRPr lang="zh-CN" altLang="en-US" dirty="0">
+              <a:latin typeface="微软雅黑" pitchFamily="34" charset="-122"/>
+              <a:ea typeface="微软雅黑" pitchFamily="34" charset="-122"/>
+            </a:endParaRPr>
+          </a:p>
+        </p:txBody>
+      </p:sp>
+      <p:sp>
+        <p:nvSpPr>
+          <p:cNvPr id="297" name="椭圆 296">
+            <a:extLst>
+              <a:ext uri="{FF2B5EF4-FFF2-40B4-BE49-F238E27FC236}">
+                <a16:creationId xmlns:a16="http://schemas.microsoft.com/office/drawing/2014/main" id="{1C534026-5218-A757-0B14-EA2010F6F13A}"/>
+              </a:ext>
+            </a:extLst>
+          </p:cNvPr>
+          <p:cNvSpPr>
+            <a:spLocks noChangeAspect="1"/>
+          </p:cNvSpPr>
+          <p:nvPr/>
+        </p:nvSpPr>
+        <p:spPr>
+          <a:xfrm>
+            <a:off x="1449749" y="2772477"/>
+            <a:ext cx="144000" cy="144000"/>
+          </a:xfrm>
+          <a:prstGeom prst="ellipse">
+            <a:avLst/>
+          </a:prstGeom>
+          <a:ln>
+            <a:solidFill>
+              <a:schemeClr val="tx1"/>
+            </a:solidFill>
+          </a:ln>
+        </p:spPr>
+        <p:txBody>
+          <a:bodyPr wrap="square" rtlCol="0" anchor="ctr">
+            <a:noAutofit/>
+          </a:bodyPr>
+          <a:lstStyle/>
+          <a:p>
+            <a:pPr algn="ctr"/>
+            <a:endParaRPr lang="zh-CN" altLang="en-US" dirty="0">
+              <a:latin typeface="微软雅黑" pitchFamily="34" charset="-122"/>
+              <a:ea typeface="微软雅黑" pitchFamily="34" charset="-122"/>
+            </a:endParaRPr>
+          </a:p>
+        </p:txBody>
+      </p:sp>
+      <p:sp>
+        <p:nvSpPr>
+          <p:cNvPr id="299" name="椭圆 298">
+            <a:extLst>
+              <a:ext uri="{FF2B5EF4-FFF2-40B4-BE49-F238E27FC236}">
+                <a16:creationId xmlns:a16="http://schemas.microsoft.com/office/drawing/2014/main" id="{F724EE83-9244-0CFD-BFED-2D9EC96A6229}"/>
+              </a:ext>
+            </a:extLst>
+          </p:cNvPr>
+          <p:cNvSpPr>
+            <a:spLocks noChangeAspect="1"/>
+          </p:cNvSpPr>
+          <p:nvPr/>
+        </p:nvSpPr>
+        <p:spPr>
+          <a:xfrm>
+            <a:off x="2114694" y="2772477"/>
+            <a:ext cx="144000" cy="144000"/>
+          </a:xfrm>
+          <a:prstGeom prst="ellipse">
+            <a:avLst/>
+          </a:prstGeom>
+          <a:ln>
+            <a:solidFill>
+              <a:schemeClr val="tx1"/>
+            </a:solidFill>
+          </a:ln>
+        </p:spPr>
+        <p:txBody>
+          <a:bodyPr wrap="square" rtlCol="0" anchor="ctr">
+            <a:noAutofit/>
+          </a:bodyPr>
+          <a:lstStyle/>
+          <a:p>
+            <a:pPr algn="ctr"/>
+            <a:endParaRPr lang="zh-CN" altLang="en-US" dirty="0">
+              <a:latin typeface="微软雅黑" pitchFamily="34" charset="-122"/>
+              <a:ea typeface="微软雅黑" pitchFamily="34" charset="-122"/>
+            </a:endParaRPr>
+          </a:p>
+        </p:txBody>
+      </p:sp>
+      <p:sp>
+        <p:nvSpPr>
+          <p:cNvPr id="301" name="椭圆 300">
+            <a:extLst>
+              <a:ext uri="{FF2B5EF4-FFF2-40B4-BE49-F238E27FC236}">
+                <a16:creationId xmlns:a16="http://schemas.microsoft.com/office/drawing/2014/main" id="{18898BB7-CDFA-8F8C-1E59-F5D8E83515B9}"/>
+              </a:ext>
+            </a:extLst>
+          </p:cNvPr>
+          <p:cNvSpPr>
+            <a:spLocks noChangeAspect="1"/>
+          </p:cNvSpPr>
+          <p:nvPr/>
+        </p:nvSpPr>
+        <p:spPr>
+          <a:xfrm>
+            <a:off x="2779639" y="2772477"/>
+            <a:ext cx="144000" cy="144000"/>
+          </a:xfrm>
+          <a:prstGeom prst="ellipse">
+            <a:avLst/>
+          </a:prstGeom>
+          <a:ln>
+            <a:solidFill>
+              <a:schemeClr val="tx1"/>
+            </a:solidFill>
+          </a:ln>
+        </p:spPr>
+        <p:txBody>
+          <a:bodyPr wrap="square" rtlCol="0" anchor="ctr">
+            <a:noAutofit/>
+          </a:bodyPr>
+          <a:lstStyle/>
+          <a:p>
+            <a:pPr algn="ctr"/>
+            <a:endParaRPr lang="zh-CN" altLang="en-US" dirty="0">
+              <a:latin typeface="微软雅黑" pitchFamily="34" charset="-122"/>
+              <a:ea typeface="微软雅黑" pitchFamily="34" charset="-122"/>
+            </a:endParaRPr>
+          </a:p>
+        </p:txBody>
+      </p:sp>
+      <p:sp>
+        <p:nvSpPr>
+          <p:cNvPr id="303" name="椭圆 302">
+            <a:extLst>
+              <a:ext uri="{FF2B5EF4-FFF2-40B4-BE49-F238E27FC236}">
+                <a16:creationId xmlns:a16="http://schemas.microsoft.com/office/drawing/2014/main" id="{9B9E4E3B-5B2A-511F-CCCE-2CCF4D044C6D}"/>
+              </a:ext>
+            </a:extLst>
+          </p:cNvPr>
+          <p:cNvSpPr>
+            <a:spLocks noChangeAspect="1"/>
+          </p:cNvSpPr>
+          <p:nvPr/>
+        </p:nvSpPr>
+        <p:spPr>
+          <a:xfrm>
+            <a:off x="3444585" y="2772477"/>
+            <a:ext cx="144000" cy="144000"/>
+          </a:xfrm>
+          <a:prstGeom prst="ellipse">
+            <a:avLst/>
+          </a:prstGeom>
+          <a:ln>
+            <a:solidFill>
+              <a:schemeClr val="tx1"/>
+            </a:solidFill>
+          </a:ln>
+        </p:spPr>
+        <p:txBody>
+          <a:bodyPr wrap="square" rtlCol="0" anchor="ctr">
+            <a:noAutofit/>
+          </a:bodyPr>
+          <a:lstStyle/>
+          <a:p>
+            <a:pPr algn="ctr"/>
+            <a:endParaRPr lang="zh-CN" altLang="en-US" dirty="0">
+              <a:latin typeface="微软雅黑" pitchFamily="34" charset="-122"/>
+              <a:ea typeface="微软雅黑" pitchFamily="34" charset="-122"/>
+            </a:endParaRPr>
+          </a:p>
+        </p:txBody>
+      </p:sp>
+      <p:sp>
+        <p:nvSpPr>
+          <p:cNvPr id="305" name="椭圆 304">
+            <a:extLst>
+              <a:ext uri="{FF2B5EF4-FFF2-40B4-BE49-F238E27FC236}">
+                <a16:creationId xmlns:a16="http://schemas.microsoft.com/office/drawing/2014/main" id="{0DC1EA6B-402F-5A6D-27B3-EDF6EB283380}"/>
+              </a:ext>
+            </a:extLst>
+          </p:cNvPr>
+          <p:cNvSpPr>
+            <a:spLocks noChangeAspect="1"/>
+          </p:cNvSpPr>
+          <p:nvPr/>
+        </p:nvSpPr>
+        <p:spPr>
+          <a:xfrm>
+            <a:off x="784804" y="3155883"/>
+            <a:ext cx="144000" cy="144000"/>
+          </a:xfrm>
+          <a:prstGeom prst="ellipse">
+            <a:avLst/>
+          </a:prstGeom>
+          <a:ln>
+            <a:solidFill>
+              <a:schemeClr val="tx1"/>
+            </a:solidFill>
+          </a:ln>
+        </p:spPr>
+        <p:txBody>
+          <a:bodyPr wrap="square" rtlCol="0" anchor="ctr">
+            <a:noAutofit/>
+          </a:bodyPr>
+          <a:lstStyle/>
+          <a:p>
+            <a:pPr algn="ctr"/>
+            <a:endParaRPr lang="zh-CN" altLang="en-US" dirty="0">
+              <a:latin typeface="微软雅黑" pitchFamily="34" charset="-122"/>
+              <a:ea typeface="微软雅黑" pitchFamily="34" charset="-122"/>
+            </a:endParaRPr>
+          </a:p>
+        </p:txBody>
+      </p:sp>
+      <p:sp>
+        <p:nvSpPr>
+          <p:cNvPr id="307" name="椭圆 306">
+            <a:extLst>
+              <a:ext uri="{FF2B5EF4-FFF2-40B4-BE49-F238E27FC236}">
+                <a16:creationId xmlns:a16="http://schemas.microsoft.com/office/drawing/2014/main" id="{0730C5A7-1421-EA06-3DE2-1AC5C0D1793E}"/>
+              </a:ext>
+            </a:extLst>
+          </p:cNvPr>
+          <p:cNvSpPr>
+            <a:spLocks noChangeAspect="1"/>
+          </p:cNvSpPr>
+          <p:nvPr/>
+        </p:nvSpPr>
+        <p:spPr>
+          <a:xfrm>
+            <a:off x="1449749" y="3155883"/>
+            <a:ext cx="144000" cy="144000"/>
+          </a:xfrm>
+          <a:prstGeom prst="ellipse">
+            <a:avLst/>
+          </a:prstGeom>
+          <a:ln>
+            <a:solidFill>
+              <a:schemeClr val="tx1"/>
+            </a:solidFill>
+          </a:ln>
+        </p:spPr>
+        <p:txBody>
+          <a:bodyPr wrap="square" rtlCol="0" anchor="ctr">
+            <a:noAutofit/>
+          </a:bodyPr>
+          <a:lstStyle/>
+          <a:p>
+            <a:pPr algn="ctr"/>
+            <a:endParaRPr lang="zh-CN" altLang="en-US" dirty="0">
+              <a:latin typeface="微软雅黑" pitchFamily="34" charset="-122"/>
+              <a:ea typeface="微软雅黑" pitchFamily="34" charset="-122"/>
+            </a:endParaRPr>
+          </a:p>
+        </p:txBody>
+      </p:sp>
+      <p:sp>
+        <p:nvSpPr>
+          <p:cNvPr id="309" name="椭圆 308">
+            <a:extLst>
+              <a:ext uri="{FF2B5EF4-FFF2-40B4-BE49-F238E27FC236}">
+                <a16:creationId xmlns:a16="http://schemas.microsoft.com/office/drawing/2014/main" id="{C0057789-65BC-255E-142A-8F66A01739FA}"/>
+              </a:ext>
+            </a:extLst>
+          </p:cNvPr>
+          <p:cNvSpPr>
+            <a:spLocks noChangeAspect="1"/>
+          </p:cNvSpPr>
+          <p:nvPr/>
+        </p:nvSpPr>
+        <p:spPr>
+          <a:xfrm>
+            <a:off x="2114694" y="3155883"/>
+            <a:ext cx="144000" cy="144000"/>
+          </a:xfrm>
+          <a:prstGeom prst="ellipse">
+            <a:avLst/>
+          </a:prstGeom>
+          <a:ln>
+            <a:solidFill>
+              <a:schemeClr val="tx1"/>
+            </a:solidFill>
+          </a:ln>
+        </p:spPr>
+        <p:txBody>
+          <a:bodyPr wrap="square" rtlCol="0" anchor="ctr">
+            <a:noAutofit/>
+          </a:bodyPr>
+          <a:lstStyle/>
+          <a:p>
+            <a:pPr algn="ctr"/>
+            <a:endParaRPr lang="zh-CN" altLang="en-US" dirty="0">
+              <a:latin typeface="微软雅黑" pitchFamily="34" charset="-122"/>
+              <a:ea typeface="微软雅黑" pitchFamily="34" charset="-122"/>
+            </a:endParaRPr>
+          </a:p>
+        </p:txBody>
+      </p:sp>
+      <p:sp>
+        <p:nvSpPr>
+          <p:cNvPr id="311" name="椭圆 310">
+            <a:extLst>
+              <a:ext uri="{FF2B5EF4-FFF2-40B4-BE49-F238E27FC236}">
+                <a16:creationId xmlns:a16="http://schemas.microsoft.com/office/drawing/2014/main" id="{E05AA190-AB39-86BF-0253-A03B813CF973}"/>
+              </a:ext>
+            </a:extLst>
+          </p:cNvPr>
+          <p:cNvSpPr>
+            <a:spLocks noChangeAspect="1"/>
+          </p:cNvSpPr>
+          <p:nvPr/>
+        </p:nvSpPr>
+        <p:spPr>
+          <a:xfrm>
+            <a:off x="2779639" y="3155883"/>
+            <a:ext cx="144000" cy="144000"/>
+          </a:xfrm>
+          <a:prstGeom prst="ellipse">
+            <a:avLst/>
+          </a:prstGeom>
+          <a:ln>
+            <a:solidFill>
+              <a:schemeClr val="tx1"/>
+            </a:solidFill>
+          </a:ln>
+        </p:spPr>
+        <p:txBody>
+          <a:bodyPr wrap="square" rtlCol="0" anchor="ctr">
+            <a:noAutofit/>
+          </a:bodyPr>
+          <a:lstStyle/>
+          <a:p>
+            <a:pPr algn="ctr"/>
+            <a:endParaRPr lang="zh-CN" altLang="en-US" dirty="0">
+              <a:latin typeface="微软雅黑" pitchFamily="34" charset="-122"/>
+              <a:ea typeface="微软雅黑" pitchFamily="34" charset="-122"/>
+            </a:endParaRPr>
+          </a:p>
+        </p:txBody>
+      </p:sp>
+      <p:sp>
+        <p:nvSpPr>
+          <p:cNvPr id="313" name="椭圆 312">
+            <a:extLst>
+              <a:ext uri="{FF2B5EF4-FFF2-40B4-BE49-F238E27FC236}">
+                <a16:creationId xmlns:a16="http://schemas.microsoft.com/office/drawing/2014/main" id="{3F939984-504E-C144-A95B-FFBD08EA675A}"/>
+              </a:ext>
+            </a:extLst>
+          </p:cNvPr>
+          <p:cNvSpPr>
+            <a:spLocks noChangeAspect="1"/>
+          </p:cNvSpPr>
+          <p:nvPr/>
+        </p:nvSpPr>
+        <p:spPr>
+          <a:xfrm>
+            <a:off x="3444585" y="3155883"/>
+            <a:ext cx="144000" cy="144000"/>
+          </a:xfrm>
+          <a:prstGeom prst="ellipse">
+            <a:avLst/>
+          </a:prstGeom>
+          <a:ln>
+            <a:solidFill>
+              <a:schemeClr val="tx1"/>
+            </a:solidFill>
+          </a:ln>
+        </p:spPr>
+        <p:txBody>
+          <a:bodyPr wrap="square" rtlCol="0" anchor="ctr">
+            <a:noAutofit/>
+          </a:bodyPr>
+          <a:lstStyle/>
+          <a:p>
+            <a:pPr algn="ctr"/>
+            <a:endParaRPr lang="zh-CN" altLang="en-US" dirty="0">
+              <a:latin typeface="微软雅黑" pitchFamily="34" charset="-122"/>
+              <a:ea typeface="微软雅黑" pitchFamily="34" charset="-122"/>
+            </a:endParaRPr>
+          </a:p>
+        </p:txBody>
+      </p:sp>
+      <p:sp>
+        <p:nvSpPr>
+          <p:cNvPr id="314" name="文本框 313">
+            <a:extLst>
+              <a:ext uri="{FF2B5EF4-FFF2-40B4-BE49-F238E27FC236}">
+                <a16:creationId xmlns:a16="http://schemas.microsoft.com/office/drawing/2014/main" id="{DF1D4A3A-B71B-2E7A-CEA2-1BEBD99C1F43}"/>
+              </a:ext>
+            </a:extLst>
+          </p:cNvPr>
+          <p:cNvSpPr txBox="1"/>
+          <p:nvPr/>
+        </p:nvSpPr>
+        <p:spPr>
+          <a:xfrm>
+            <a:off x="9278753" y="1510787"/>
+            <a:ext cx="2451312" cy="1477328"/>
+          </a:xfrm>
+          <a:prstGeom prst="rect">
+            <a:avLst/>
+          </a:prstGeom>
+          <a:noFill/>
+        </p:spPr>
+        <p:txBody>
+          <a:bodyPr wrap="none" rtlCol="0">
+            <a:spAutoFit/>
+          </a:bodyPr>
+          <a:lstStyle/>
+          <a:p>
+            <a:pPr algn="l"/>
+            <a:r>
+              <a:rPr lang="zh-CN" altLang="en-US" dirty="0">
+                <a:latin typeface="微软雅黑" panose="020B0503020204020204" pitchFamily="34" charset="-122"/>
+                <a:ea typeface="微软雅黑" panose="020B0503020204020204" pitchFamily="34" charset="-122"/>
+              </a:rPr>
+              <a:t>有无可能</a:t>
+            </a:r>
+            <a:r>
+              <a:rPr lang="en-US" altLang="zh-CN" dirty="0">
+                <a:latin typeface="微软雅黑" panose="020B0503020204020204" pitchFamily="34" charset="-122"/>
+                <a:ea typeface="微软雅黑" panose="020B0503020204020204" pitchFamily="34" charset="-122"/>
+              </a:rPr>
+              <a:t>&gt;3</a:t>
+            </a:r>
+            <a:r>
+              <a:rPr lang="zh-CN" altLang="en-US" dirty="0">
+                <a:latin typeface="微软雅黑" panose="020B0503020204020204" pitchFamily="34" charset="-122"/>
+                <a:ea typeface="微软雅黑" panose="020B0503020204020204" pitchFamily="34" charset="-122"/>
+              </a:rPr>
+              <a:t>个区域</a:t>
+            </a:r>
+            <a:endParaRPr lang="en-US" altLang="zh-CN" dirty="0">
+              <a:latin typeface="微软雅黑" panose="020B0503020204020204" pitchFamily="34" charset="-122"/>
+              <a:ea typeface="微软雅黑" panose="020B0503020204020204" pitchFamily="34" charset="-122"/>
+            </a:endParaRPr>
+          </a:p>
+          <a:p>
+            <a:pPr algn="l"/>
+            <a:endParaRPr lang="en-US" altLang="zh-CN" dirty="0">
+              <a:latin typeface="微软雅黑" panose="020B0503020204020204" pitchFamily="34" charset="-122"/>
+              <a:ea typeface="微软雅黑" panose="020B0503020204020204" pitchFamily="34" charset="-122"/>
+            </a:endParaRPr>
+          </a:p>
+          <a:p>
+            <a:pPr algn="l"/>
+            <a:r>
+              <a:rPr lang="zh-CN" altLang="en-US" dirty="0">
+                <a:latin typeface="微软雅黑" panose="020B0503020204020204" pitchFamily="34" charset="-122"/>
+                <a:ea typeface="微软雅黑" panose="020B0503020204020204" pitchFamily="34" charset="-122"/>
+              </a:rPr>
+              <a:t>描述接口</a:t>
+            </a:r>
+            <a:endParaRPr lang="en-US" altLang="zh-CN" dirty="0">
+              <a:latin typeface="微软雅黑" panose="020B0503020204020204" pitchFamily="34" charset="-122"/>
+              <a:ea typeface="微软雅黑" panose="020B0503020204020204" pitchFamily="34" charset="-122"/>
+            </a:endParaRPr>
+          </a:p>
+          <a:p>
+            <a:pPr marL="342900" indent="-342900" algn="l">
+              <a:buFont typeface="+mj-lt"/>
+              <a:buAutoNum type="arabicPeriod"/>
+            </a:pPr>
+            <a:r>
+              <a:rPr lang="zh-CN" altLang="en-US" dirty="0">
+                <a:latin typeface="微软雅黑" panose="020B0503020204020204" pitchFamily="34" charset="-122"/>
+                <a:ea typeface="微软雅黑" panose="020B0503020204020204" pitchFamily="34" charset="-122"/>
+              </a:rPr>
+              <a:t>每个</a:t>
+            </a:r>
+            <a:r>
+              <a:rPr lang="en-US" altLang="zh-CN" dirty="0">
+                <a:latin typeface="微软雅黑" panose="020B0503020204020204" pitchFamily="34" charset="-122"/>
+                <a:ea typeface="微软雅黑" panose="020B0503020204020204" pitchFamily="34" charset="-122"/>
+              </a:rPr>
+              <a:t>zone</a:t>
+            </a:r>
+            <a:r>
+              <a:rPr lang="zh-CN" altLang="en-US" dirty="0">
+                <a:latin typeface="微软雅黑" panose="020B0503020204020204" pitchFamily="34" charset="-122"/>
+                <a:ea typeface="微软雅黑" panose="020B0503020204020204" pitchFamily="34" charset="-122"/>
+              </a:rPr>
+              <a:t>覆盖区域</a:t>
+            </a:r>
+            <a:endParaRPr lang="en-US" altLang="zh-CN" dirty="0">
+              <a:latin typeface="微软雅黑" panose="020B0503020204020204" pitchFamily="34" charset="-122"/>
+              <a:ea typeface="微软雅黑" panose="020B0503020204020204" pitchFamily="34" charset="-122"/>
+            </a:endParaRPr>
+          </a:p>
+          <a:p>
+            <a:pPr marL="342900" indent="-342900" algn="l">
+              <a:buFont typeface="+mj-lt"/>
+              <a:buAutoNum type="arabicPeriod"/>
+            </a:pPr>
+            <a:r>
+              <a:rPr lang="zh-CN" altLang="en-US" dirty="0">
+                <a:latin typeface="微软雅黑" panose="020B0503020204020204" pitchFamily="34" charset="-122"/>
+                <a:ea typeface="微软雅黑" panose="020B0503020204020204" pitchFamily="34" charset="-122"/>
+              </a:rPr>
+              <a:t>每个</a:t>
+            </a:r>
+            <a:r>
+              <a:rPr lang="en-US" altLang="zh-CN" dirty="0">
+                <a:latin typeface="微软雅黑" panose="020B0503020204020204" pitchFamily="34" charset="-122"/>
+                <a:ea typeface="微软雅黑" panose="020B0503020204020204" pitchFamily="34" charset="-122"/>
+              </a:rPr>
+              <a:t>SLM trap</a:t>
+            </a:r>
+            <a:r>
+              <a:rPr lang="zh-CN" altLang="en-US" dirty="0">
+                <a:latin typeface="微软雅黑" panose="020B0503020204020204" pitchFamily="34" charset="-122"/>
+                <a:ea typeface="微软雅黑" panose="020B0503020204020204" pitchFamily="34" charset="-122"/>
+              </a:rPr>
+              <a:t>坐标</a:t>
+            </a:r>
+          </a:p>
+        </p:txBody>
+      </p:sp>
+      <p:sp>
+        <p:nvSpPr>
+          <p:cNvPr id="316" name="椭圆 315">
+            <a:extLst>
+              <a:ext uri="{FF2B5EF4-FFF2-40B4-BE49-F238E27FC236}">
+                <a16:creationId xmlns:a16="http://schemas.microsoft.com/office/drawing/2014/main" id="{893ABDBD-0FE0-BC04-C621-548058B59ECD}"/>
+              </a:ext>
+            </a:extLst>
+          </p:cNvPr>
+          <p:cNvSpPr>
+            <a:spLocks noChangeAspect="1"/>
+          </p:cNvSpPr>
+          <p:nvPr/>
+        </p:nvSpPr>
+        <p:spPr>
+          <a:xfrm>
+            <a:off x="5200135" y="1175295"/>
+            <a:ext cx="144000" cy="144000"/>
+          </a:xfrm>
+          <a:prstGeom prst="ellipse">
+            <a:avLst/>
+          </a:prstGeom>
+          <a:ln>
+            <a:solidFill>
+              <a:schemeClr val="tx1"/>
+            </a:solidFill>
+          </a:ln>
+        </p:spPr>
+        <p:txBody>
+          <a:bodyPr wrap="square" rtlCol="0" anchor="ctr">
+            <a:noAutofit/>
+          </a:bodyPr>
+          <a:lstStyle/>
+          <a:p>
+            <a:pPr algn="ctr"/>
+            <a:endParaRPr lang="zh-CN" altLang="en-US" dirty="0">
+              <a:latin typeface="微软雅黑" pitchFamily="34" charset="-122"/>
+              <a:ea typeface="微软雅黑" pitchFamily="34" charset="-122"/>
+            </a:endParaRPr>
+          </a:p>
+        </p:txBody>
+      </p:sp>
+      <p:sp>
+        <p:nvSpPr>
+          <p:cNvPr id="318" name="椭圆 317">
+            <a:extLst>
+              <a:ext uri="{FF2B5EF4-FFF2-40B4-BE49-F238E27FC236}">
+                <a16:creationId xmlns:a16="http://schemas.microsoft.com/office/drawing/2014/main" id="{77808E93-1331-BB12-3D2C-A7AF8400F5B5}"/>
+              </a:ext>
+            </a:extLst>
+          </p:cNvPr>
+          <p:cNvSpPr>
+            <a:spLocks noChangeAspect="1"/>
+          </p:cNvSpPr>
+          <p:nvPr/>
+        </p:nvSpPr>
+        <p:spPr>
+          <a:xfrm>
+            <a:off x="5865080" y="1175295"/>
+            <a:ext cx="144000" cy="144000"/>
+          </a:xfrm>
+          <a:prstGeom prst="ellipse">
+            <a:avLst/>
+          </a:prstGeom>
+          <a:ln>
+            <a:solidFill>
+              <a:schemeClr val="tx1"/>
+            </a:solidFill>
+          </a:ln>
+        </p:spPr>
+        <p:txBody>
+          <a:bodyPr wrap="square" rtlCol="0" anchor="ctr">
+            <a:noAutofit/>
+          </a:bodyPr>
+          <a:lstStyle/>
+          <a:p>
+            <a:pPr algn="ctr"/>
+            <a:endParaRPr lang="zh-CN" altLang="en-US" dirty="0">
+              <a:latin typeface="微软雅黑" pitchFamily="34" charset="-122"/>
+              <a:ea typeface="微软雅黑" pitchFamily="34" charset="-122"/>
+            </a:endParaRPr>
+          </a:p>
+        </p:txBody>
+      </p:sp>
+      <p:sp>
+        <p:nvSpPr>
+          <p:cNvPr id="320" name="椭圆 319">
+            <a:extLst>
+              <a:ext uri="{FF2B5EF4-FFF2-40B4-BE49-F238E27FC236}">
+                <a16:creationId xmlns:a16="http://schemas.microsoft.com/office/drawing/2014/main" id="{6D332327-76E4-11E6-2786-4EDA2C85A73E}"/>
+              </a:ext>
+            </a:extLst>
+          </p:cNvPr>
+          <p:cNvSpPr>
+            <a:spLocks noChangeAspect="1"/>
+          </p:cNvSpPr>
+          <p:nvPr/>
+        </p:nvSpPr>
+        <p:spPr>
+          <a:xfrm>
+            <a:off x="6530025" y="1175295"/>
+            <a:ext cx="144000" cy="144000"/>
+          </a:xfrm>
+          <a:prstGeom prst="ellipse">
+            <a:avLst/>
+          </a:prstGeom>
+          <a:ln>
+            <a:solidFill>
+              <a:schemeClr val="tx1"/>
+            </a:solidFill>
+          </a:ln>
+        </p:spPr>
+        <p:txBody>
+          <a:bodyPr wrap="square" rtlCol="0" anchor="ctr">
+            <a:noAutofit/>
+          </a:bodyPr>
+          <a:lstStyle/>
+          <a:p>
+            <a:pPr algn="ctr"/>
+            <a:endParaRPr lang="zh-CN" altLang="en-US" dirty="0">
+              <a:latin typeface="微软雅黑" pitchFamily="34" charset="-122"/>
+              <a:ea typeface="微软雅黑" pitchFamily="34" charset="-122"/>
+            </a:endParaRPr>
+          </a:p>
+        </p:txBody>
+      </p:sp>
+      <p:sp>
+        <p:nvSpPr>
+          <p:cNvPr id="322" name="椭圆 321">
+            <a:extLst>
+              <a:ext uri="{FF2B5EF4-FFF2-40B4-BE49-F238E27FC236}">
+                <a16:creationId xmlns:a16="http://schemas.microsoft.com/office/drawing/2014/main" id="{A5F8CD55-BC1E-3A91-5183-BADA23E6B0B5}"/>
+              </a:ext>
+            </a:extLst>
+          </p:cNvPr>
+          <p:cNvSpPr>
+            <a:spLocks noChangeAspect="1"/>
+          </p:cNvSpPr>
+          <p:nvPr/>
+        </p:nvSpPr>
+        <p:spPr>
+          <a:xfrm>
+            <a:off x="7194970" y="1175295"/>
+            <a:ext cx="144000" cy="144000"/>
+          </a:xfrm>
+          <a:prstGeom prst="ellipse">
+            <a:avLst/>
+          </a:prstGeom>
+          <a:ln>
+            <a:solidFill>
+              <a:schemeClr val="tx1"/>
+            </a:solidFill>
+          </a:ln>
+        </p:spPr>
+        <p:txBody>
+          <a:bodyPr wrap="square" rtlCol="0" anchor="ctr">
+            <a:noAutofit/>
+          </a:bodyPr>
+          <a:lstStyle/>
+          <a:p>
+            <a:pPr algn="ctr"/>
+            <a:endParaRPr lang="zh-CN" altLang="en-US" dirty="0">
+              <a:latin typeface="微软雅黑" pitchFamily="34" charset="-122"/>
+              <a:ea typeface="微软雅黑" pitchFamily="34" charset="-122"/>
+            </a:endParaRPr>
+          </a:p>
+        </p:txBody>
+      </p:sp>
+      <p:sp>
+        <p:nvSpPr>
+          <p:cNvPr id="324" name="椭圆 323">
+            <a:extLst>
+              <a:ext uri="{FF2B5EF4-FFF2-40B4-BE49-F238E27FC236}">
+                <a16:creationId xmlns:a16="http://schemas.microsoft.com/office/drawing/2014/main" id="{D6B3F698-51F5-C54A-EEB8-9431F60C43D3}"/>
+              </a:ext>
+            </a:extLst>
+          </p:cNvPr>
+          <p:cNvSpPr>
+            <a:spLocks noChangeAspect="1"/>
+          </p:cNvSpPr>
+          <p:nvPr/>
+        </p:nvSpPr>
+        <p:spPr>
+          <a:xfrm>
+            <a:off x="7859916" y="1175295"/>
+            <a:ext cx="144000" cy="144000"/>
+          </a:xfrm>
+          <a:prstGeom prst="ellipse">
+            <a:avLst/>
+          </a:prstGeom>
+          <a:ln>
+            <a:solidFill>
+              <a:schemeClr val="tx1"/>
+            </a:solidFill>
+          </a:ln>
+        </p:spPr>
+        <p:txBody>
+          <a:bodyPr wrap="square" rtlCol="0" anchor="ctr">
+            <a:noAutofit/>
+          </a:bodyPr>
+          <a:lstStyle/>
+          <a:p>
+            <a:pPr algn="ctr"/>
+            <a:endParaRPr lang="zh-CN" altLang="en-US" dirty="0">
+              <a:latin typeface="微软雅黑" pitchFamily="34" charset="-122"/>
+              <a:ea typeface="微软雅黑" pitchFamily="34" charset="-122"/>
+            </a:endParaRPr>
+          </a:p>
+        </p:txBody>
+      </p:sp>
+      <p:sp>
+        <p:nvSpPr>
+          <p:cNvPr id="326" name="椭圆 325">
+            <a:extLst>
+              <a:ext uri="{FF2B5EF4-FFF2-40B4-BE49-F238E27FC236}">
+                <a16:creationId xmlns:a16="http://schemas.microsoft.com/office/drawing/2014/main" id="{4A50BDD7-1022-6CC0-272E-4559DE5467DA}"/>
+              </a:ext>
+            </a:extLst>
+          </p:cNvPr>
+          <p:cNvSpPr>
+            <a:spLocks noChangeAspect="1"/>
+          </p:cNvSpPr>
+          <p:nvPr/>
+        </p:nvSpPr>
+        <p:spPr>
+          <a:xfrm>
+            <a:off x="5200135" y="1558701"/>
+            <a:ext cx="144000" cy="144000"/>
+          </a:xfrm>
+          <a:prstGeom prst="ellipse">
+            <a:avLst/>
+          </a:prstGeom>
+          <a:ln>
+            <a:solidFill>
+              <a:schemeClr val="tx1"/>
+            </a:solidFill>
+          </a:ln>
+        </p:spPr>
+        <p:txBody>
+          <a:bodyPr wrap="square" rtlCol="0" anchor="ctr">
+            <a:noAutofit/>
+          </a:bodyPr>
+          <a:lstStyle/>
+          <a:p>
+            <a:pPr algn="ctr"/>
+            <a:endParaRPr lang="zh-CN" altLang="en-US" dirty="0">
+              <a:latin typeface="微软雅黑" pitchFamily="34" charset="-122"/>
+              <a:ea typeface="微软雅黑" pitchFamily="34" charset="-122"/>
+            </a:endParaRPr>
+          </a:p>
+        </p:txBody>
+      </p:sp>
+      <p:sp>
+        <p:nvSpPr>
+          <p:cNvPr id="328" name="椭圆 327">
+            <a:extLst>
+              <a:ext uri="{FF2B5EF4-FFF2-40B4-BE49-F238E27FC236}">
+                <a16:creationId xmlns:a16="http://schemas.microsoft.com/office/drawing/2014/main" id="{864D4FA7-7433-03CC-8131-EF988ABBF872}"/>
+              </a:ext>
+            </a:extLst>
+          </p:cNvPr>
+          <p:cNvSpPr>
+            <a:spLocks noChangeAspect="1"/>
+          </p:cNvSpPr>
+          <p:nvPr/>
+        </p:nvSpPr>
+        <p:spPr>
+          <a:xfrm>
+            <a:off x="5865080" y="1558701"/>
+            <a:ext cx="144000" cy="144000"/>
+          </a:xfrm>
+          <a:prstGeom prst="ellipse">
+            <a:avLst/>
+          </a:prstGeom>
+          <a:ln>
+            <a:solidFill>
+              <a:schemeClr val="tx1"/>
+            </a:solidFill>
+          </a:ln>
+        </p:spPr>
+        <p:txBody>
+          <a:bodyPr wrap="square" rtlCol="0" anchor="ctr">
+            <a:noAutofit/>
+          </a:bodyPr>
+          <a:lstStyle/>
+          <a:p>
+            <a:pPr algn="ctr"/>
+            <a:endParaRPr lang="zh-CN" altLang="en-US" dirty="0">
+              <a:latin typeface="微软雅黑" pitchFamily="34" charset="-122"/>
+              <a:ea typeface="微软雅黑" pitchFamily="34" charset="-122"/>
+            </a:endParaRPr>
+          </a:p>
+        </p:txBody>
+      </p:sp>
+      <p:sp>
+        <p:nvSpPr>
+          <p:cNvPr id="330" name="椭圆 329">
+            <a:extLst>
+              <a:ext uri="{FF2B5EF4-FFF2-40B4-BE49-F238E27FC236}">
+                <a16:creationId xmlns:a16="http://schemas.microsoft.com/office/drawing/2014/main" id="{FD68CC69-C268-C2B8-3037-7862CCFC7BF2}"/>
+              </a:ext>
+            </a:extLst>
+          </p:cNvPr>
+          <p:cNvSpPr>
+            <a:spLocks noChangeAspect="1"/>
+          </p:cNvSpPr>
+          <p:nvPr/>
+        </p:nvSpPr>
+        <p:spPr>
+          <a:xfrm>
+            <a:off x="6530025" y="1558701"/>
+            <a:ext cx="144000" cy="144000"/>
+          </a:xfrm>
+          <a:prstGeom prst="ellipse">
+            <a:avLst/>
+          </a:prstGeom>
+          <a:ln>
+            <a:solidFill>
+              <a:schemeClr val="tx1"/>
+            </a:solidFill>
+          </a:ln>
+        </p:spPr>
+        <p:txBody>
+          <a:bodyPr wrap="square" rtlCol="0" anchor="ctr">
+            <a:noAutofit/>
+          </a:bodyPr>
+          <a:lstStyle/>
+          <a:p>
+            <a:pPr algn="ctr"/>
+            <a:endParaRPr lang="zh-CN" altLang="en-US" dirty="0">
+              <a:latin typeface="微软雅黑" pitchFamily="34" charset="-122"/>
+              <a:ea typeface="微软雅黑" pitchFamily="34" charset="-122"/>
+            </a:endParaRPr>
+          </a:p>
+        </p:txBody>
+      </p:sp>
+      <p:sp>
+        <p:nvSpPr>
+          <p:cNvPr id="332" name="椭圆 331">
+            <a:extLst>
+              <a:ext uri="{FF2B5EF4-FFF2-40B4-BE49-F238E27FC236}">
+                <a16:creationId xmlns:a16="http://schemas.microsoft.com/office/drawing/2014/main" id="{A1C76345-A537-E5D5-1B04-1C15841F0D27}"/>
+              </a:ext>
+            </a:extLst>
+          </p:cNvPr>
+          <p:cNvSpPr>
+            <a:spLocks noChangeAspect="1"/>
+          </p:cNvSpPr>
+          <p:nvPr/>
+        </p:nvSpPr>
+        <p:spPr>
+          <a:xfrm>
+            <a:off x="7194970" y="1558701"/>
+            <a:ext cx="144000" cy="144000"/>
+          </a:xfrm>
+          <a:prstGeom prst="ellipse">
+            <a:avLst/>
+          </a:prstGeom>
+          <a:ln>
+            <a:solidFill>
+              <a:schemeClr val="tx1"/>
+            </a:solidFill>
+          </a:ln>
+        </p:spPr>
+        <p:txBody>
+          <a:bodyPr wrap="square" rtlCol="0" anchor="ctr">
+            <a:noAutofit/>
+          </a:bodyPr>
+          <a:lstStyle/>
+          <a:p>
+            <a:pPr algn="ctr"/>
+            <a:endParaRPr lang="zh-CN" altLang="en-US" dirty="0">
+              <a:latin typeface="微软雅黑" pitchFamily="34" charset="-122"/>
+              <a:ea typeface="微软雅黑" pitchFamily="34" charset="-122"/>
+            </a:endParaRPr>
+          </a:p>
+        </p:txBody>
+      </p:sp>
+      <p:sp>
+        <p:nvSpPr>
+          <p:cNvPr id="334" name="椭圆 333">
+            <a:extLst>
+              <a:ext uri="{FF2B5EF4-FFF2-40B4-BE49-F238E27FC236}">
+                <a16:creationId xmlns:a16="http://schemas.microsoft.com/office/drawing/2014/main" id="{611FD8C2-C027-333E-3A31-70A2870AEBE5}"/>
+              </a:ext>
+            </a:extLst>
+          </p:cNvPr>
+          <p:cNvSpPr>
+            <a:spLocks noChangeAspect="1"/>
+          </p:cNvSpPr>
+          <p:nvPr/>
+        </p:nvSpPr>
+        <p:spPr>
+          <a:xfrm>
+            <a:off x="7859916" y="1558701"/>
+            <a:ext cx="144000" cy="144000"/>
+          </a:xfrm>
+          <a:prstGeom prst="ellipse">
+            <a:avLst/>
+          </a:prstGeom>
+          <a:ln>
+            <a:solidFill>
+              <a:schemeClr val="tx1"/>
+            </a:solidFill>
+          </a:ln>
+        </p:spPr>
+        <p:txBody>
+          <a:bodyPr wrap="square" rtlCol="0" anchor="ctr">
+            <a:noAutofit/>
+          </a:bodyPr>
+          <a:lstStyle/>
+          <a:p>
+            <a:pPr algn="ctr"/>
+            <a:endParaRPr lang="zh-CN" altLang="en-US" dirty="0">
+              <a:latin typeface="微软雅黑" pitchFamily="34" charset="-122"/>
+              <a:ea typeface="微软雅黑" pitchFamily="34" charset="-122"/>
+            </a:endParaRPr>
+          </a:p>
+        </p:txBody>
+      </p:sp>
+      <p:sp>
+        <p:nvSpPr>
+          <p:cNvPr id="336" name="椭圆 335">
+            <a:extLst>
+              <a:ext uri="{FF2B5EF4-FFF2-40B4-BE49-F238E27FC236}">
+                <a16:creationId xmlns:a16="http://schemas.microsoft.com/office/drawing/2014/main" id="{08568DE0-787E-5CB6-83D2-A8FCFE2B61DD}"/>
+              </a:ext>
+            </a:extLst>
+          </p:cNvPr>
+          <p:cNvSpPr>
+            <a:spLocks noChangeAspect="1"/>
+          </p:cNvSpPr>
+          <p:nvPr/>
+        </p:nvSpPr>
+        <p:spPr>
+          <a:xfrm>
+            <a:off x="5200135" y="5131448"/>
+            <a:ext cx="144000" cy="144000"/>
+          </a:xfrm>
+          <a:prstGeom prst="ellipse">
+            <a:avLst/>
+          </a:prstGeom>
+          <a:ln>
+            <a:solidFill>
+              <a:schemeClr val="tx1"/>
+            </a:solidFill>
+          </a:ln>
+        </p:spPr>
+        <p:txBody>
+          <a:bodyPr wrap="square" rtlCol="0" anchor="ctr">
+            <a:noAutofit/>
+          </a:bodyPr>
+          <a:lstStyle/>
+          <a:p>
+            <a:pPr algn="ctr"/>
+            <a:endParaRPr lang="zh-CN" altLang="en-US" dirty="0">
+              <a:latin typeface="微软雅黑" pitchFamily="34" charset="-122"/>
+              <a:ea typeface="微软雅黑" pitchFamily="34" charset="-122"/>
+            </a:endParaRPr>
+          </a:p>
+        </p:txBody>
+      </p:sp>
+      <p:sp>
+        <p:nvSpPr>
+          <p:cNvPr id="338" name="椭圆 337">
+            <a:extLst>
+              <a:ext uri="{FF2B5EF4-FFF2-40B4-BE49-F238E27FC236}">
+                <a16:creationId xmlns:a16="http://schemas.microsoft.com/office/drawing/2014/main" id="{49676B1D-2414-6FE4-4774-917C5D6EA921}"/>
+              </a:ext>
+            </a:extLst>
+          </p:cNvPr>
+          <p:cNvSpPr>
+            <a:spLocks noChangeAspect="1"/>
+          </p:cNvSpPr>
+          <p:nvPr/>
+        </p:nvSpPr>
+        <p:spPr>
+          <a:xfrm>
+            <a:off x="5865080" y="5131448"/>
+            <a:ext cx="144000" cy="144000"/>
+          </a:xfrm>
+          <a:prstGeom prst="ellipse">
+            <a:avLst/>
+          </a:prstGeom>
+          <a:ln>
+            <a:solidFill>
+              <a:schemeClr val="tx1"/>
+            </a:solidFill>
+          </a:ln>
+        </p:spPr>
+        <p:txBody>
+          <a:bodyPr wrap="square" rtlCol="0" anchor="ctr">
+            <a:noAutofit/>
+          </a:bodyPr>
+          <a:lstStyle/>
+          <a:p>
+            <a:pPr algn="ctr"/>
+            <a:endParaRPr lang="zh-CN" altLang="en-US" dirty="0">
+              <a:latin typeface="微软雅黑" pitchFamily="34" charset="-122"/>
+              <a:ea typeface="微软雅黑" pitchFamily="34" charset="-122"/>
+            </a:endParaRPr>
+          </a:p>
+        </p:txBody>
+      </p:sp>
+      <p:sp>
+        <p:nvSpPr>
+          <p:cNvPr id="340" name="椭圆 339">
+            <a:extLst>
+              <a:ext uri="{FF2B5EF4-FFF2-40B4-BE49-F238E27FC236}">
+                <a16:creationId xmlns:a16="http://schemas.microsoft.com/office/drawing/2014/main" id="{6521FCEC-7201-5C36-A12A-C89AF9C73C4C}"/>
+              </a:ext>
+            </a:extLst>
+          </p:cNvPr>
+          <p:cNvSpPr>
+            <a:spLocks noChangeAspect="1"/>
+          </p:cNvSpPr>
+          <p:nvPr/>
+        </p:nvSpPr>
+        <p:spPr>
+          <a:xfrm>
+            <a:off x="6530025" y="5131448"/>
+            <a:ext cx="144000" cy="144000"/>
+          </a:xfrm>
+          <a:prstGeom prst="ellipse">
+            <a:avLst/>
+          </a:prstGeom>
+          <a:ln>
+            <a:solidFill>
+              <a:schemeClr val="tx1"/>
+            </a:solidFill>
+          </a:ln>
+        </p:spPr>
+        <p:txBody>
+          <a:bodyPr wrap="square" rtlCol="0" anchor="ctr">
+            <a:noAutofit/>
+          </a:bodyPr>
+          <a:lstStyle/>
+          <a:p>
+            <a:pPr algn="ctr"/>
+            <a:endParaRPr lang="zh-CN" altLang="en-US" dirty="0">
+              <a:latin typeface="微软雅黑" pitchFamily="34" charset="-122"/>
+              <a:ea typeface="微软雅黑" pitchFamily="34" charset="-122"/>
+            </a:endParaRPr>
+          </a:p>
+        </p:txBody>
+      </p:sp>
+      <p:sp>
+        <p:nvSpPr>
+          <p:cNvPr id="342" name="椭圆 341">
+            <a:extLst>
+              <a:ext uri="{FF2B5EF4-FFF2-40B4-BE49-F238E27FC236}">
+                <a16:creationId xmlns:a16="http://schemas.microsoft.com/office/drawing/2014/main" id="{92863F30-7CF5-FFB1-E1A4-14D6466F3068}"/>
+              </a:ext>
+            </a:extLst>
+          </p:cNvPr>
+          <p:cNvSpPr>
+            <a:spLocks noChangeAspect="1"/>
+          </p:cNvSpPr>
+          <p:nvPr/>
+        </p:nvSpPr>
+        <p:spPr>
+          <a:xfrm>
+            <a:off x="7194970" y="5131448"/>
+            <a:ext cx="144000" cy="144000"/>
+          </a:xfrm>
+          <a:prstGeom prst="ellipse">
+            <a:avLst/>
+          </a:prstGeom>
+          <a:ln>
+            <a:solidFill>
+              <a:schemeClr val="tx1"/>
+            </a:solidFill>
+          </a:ln>
+        </p:spPr>
+        <p:txBody>
+          <a:bodyPr wrap="square" rtlCol="0" anchor="ctr">
+            <a:noAutofit/>
+          </a:bodyPr>
+          <a:lstStyle/>
+          <a:p>
+            <a:pPr algn="ctr"/>
+            <a:endParaRPr lang="zh-CN" altLang="en-US" dirty="0">
+              <a:latin typeface="微软雅黑" pitchFamily="34" charset="-122"/>
+              <a:ea typeface="微软雅黑" pitchFamily="34" charset="-122"/>
+            </a:endParaRPr>
+          </a:p>
+        </p:txBody>
+      </p:sp>
+      <p:sp>
+        <p:nvSpPr>
+          <p:cNvPr id="344" name="椭圆 343">
+            <a:extLst>
+              <a:ext uri="{FF2B5EF4-FFF2-40B4-BE49-F238E27FC236}">
+                <a16:creationId xmlns:a16="http://schemas.microsoft.com/office/drawing/2014/main" id="{34C39B22-D964-A4BA-467C-E68C5CCF1219}"/>
+              </a:ext>
+            </a:extLst>
+          </p:cNvPr>
+          <p:cNvSpPr>
+            <a:spLocks noChangeAspect="1"/>
+          </p:cNvSpPr>
+          <p:nvPr/>
+        </p:nvSpPr>
+        <p:spPr>
+          <a:xfrm>
+            <a:off x="7859916" y="5131448"/>
+            <a:ext cx="144000" cy="144000"/>
+          </a:xfrm>
+          <a:prstGeom prst="ellipse">
+            <a:avLst/>
+          </a:prstGeom>
+          <a:ln>
+            <a:solidFill>
+              <a:schemeClr val="tx1"/>
+            </a:solidFill>
+          </a:ln>
+        </p:spPr>
+        <p:txBody>
+          <a:bodyPr wrap="square" rtlCol="0" anchor="ctr">
+            <a:noAutofit/>
+          </a:bodyPr>
+          <a:lstStyle/>
+          <a:p>
+            <a:pPr algn="ctr"/>
+            <a:endParaRPr lang="zh-CN" altLang="en-US" dirty="0">
+              <a:latin typeface="微软雅黑" pitchFamily="34" charset="-122"/>
+              <a:ea typeface="微软雅黑" pitchFamily="34" charset="-122"/>
+            </a:endParaRPr>
+          </a:p>
+        </p:txBody>
+      </p:sp>
+      <p:sp>
+        <p:nvSpPr>
+          <p:cNvPr id="346" name="椭圆 345">
+            <a:extLst>
+              <a:ext uri="{FF2B5EF4-FFF2-40B4-BE49-F238E27FC236}">
+                <a16:creationId xmlns:a16="http://schemas.microsoft.com/office/drawing/2014/main" id="{6C73A315-A47C-F005-B262-E488D640BD77}"/>
+              </a:ext>
+            </a:extLst>
+          </p:cNvPr>
+          <p:cNvSpPr>
+            <a:spLocks noChangeAspect="1"/>
+          </p:cNvSpPr>
+          <p:nvPr/>
+        </p:nvSpPr>
+        <p:spPr>
+          <a:xfrm>
+            <a:off x="5200135" y="5514854"/>
+            <a:ext cx="144000" cy="144000"/>
+          </a:xfrm>
+          <a:prstGeom prst="ellipse">
+            <a:avLst/>
+          </a:prstGeom>
+          <a:ln>
+            <a:solidFill>
+              <a:schemeClr val="tx1"/>
+            </a:solidFill>
+          </a:ln>
+        </p:spPr>
+        <p:txBody>
+          <a:bodyPr wrap="square" rtlCol="0" anchor="ctr">
+            <a:noAutofit/>
+          </a:bodyPr>
+          <a:lstStyle/>
+          <a:p>
+            <a:pPr algn="ctr"/>
+            <a:endParaRPr lang="zh-CN" altLang="en-US" dirty="0">
+              <a:latin typeface="微软雅黑" pitchFamily="34" charset="-122"/>
+              <a:ea typeface="微软雅黑" pitchFamily="34" charset="-122"/>
+            </a:endParaRPr>
+          </a:p>
+        </p:txBody>
+      </p:sp>
+      <p:sp>
+        <p:nvSpPr>
+          <p:cNvPr id="348" name="椭圆 347">
+            <a:extLst>
+              <a:ext uri="{FF2B5EF4-FFF2-40B4-BE49-F238E27FC236}">
+                <a16:creationId xmlns:a16="http://schemas.microsoft.com/office/drawing/2014/main" id="{C8B6E471-1781-A492-BC16-D0C36591A6F7}"/>
+              </a:ext>
+            </a:extLst>
+          </p:cNvPr>
+          <p:cNvSpPr>
+            <a:spLocks noChangeAspect="1"/>
+          </p:cNvSpPr>
+          <p:nvPr/>
+        </p:nvSpPr>
+        <p:spPr>
+          <a:xfrm>
+            <a:off x="5865080" y="5514854"/>
+            <a:ext cx="144000" cy="144000"/>
+          </a:xfrm>
+          <a:prstGeom prst="ellipse">
+            <a:avLst/>
+          </a:prstGeom>
+          <a:ln>
+            <a:solidFill>
+              <a:schemeClr val="tx1"/>
+            </a:solidFill>
+          </a:ln>
+        </p:spPr>
+        <p:txBody>
+          <a:bodyPr wrap="square" rtlCol="0" anchor="ctr">
+            <a:noAutofit/>
+          </a:bodyPr>
+          <a:lstStyle/>
+          <a:p>
+            <a:pPr algn="ctr"/>
+            <a:endParaRPr lang="zh-CN" altLang="en-US" dirty="0">
+              <a:latin typeface="微软雅黑" pitchFamily="34" charset="-122"/>
+              <a:ea typeface="微软雅黑" pitchFamily="34" charset="-122"/>
+            </a:endParaRPr>
+          </a:p>
+        </p:txBody>
+      </p:sp>
+      <p:sp>
+        <p:nvSpPr>
+          <p:cNvPr id="350" name="椭圆 349">
+            <a:extLst>
+              <a:ext uri="{FF2B5EF4-FFF2-40B4-BE49-F238E27FC236}">
+                <a16:creationId xmlns:a16="http://schemas.microsoft.com/office/drawing/2014/main" id="{0C1B987C-22B8-B89B-E988-253C99DBB07F}"/>
+              </a:ext>
+            </a:extLst>
+          </p:cNvPr>
+          <p:cNvSpPr>
+            <a:spLocks noChangeAspect="1"/>
+          </p:cNvSpPr>
+          <p:nvPr/>
+        </p:nvSpPr>
+        <p:spPr>
+          <a:xfrm>
+            <a:off x="6530025" y="5514854"/>
+            <a:ext cx="144000" cy="144000"/>
+          </a:xfrm>
+          <a:prstGeom prst="ellipse">
+            <a:avLst/>
+          </a:prstGeom>
+          <a:ln>
+            <a:solidFill>
+              <a:schemeClr val="tx1"/>
+            </a:solidFill>
+          </a:ln>
+        </p:spPr>
+        <p:txBody>
+          <a:bodyPr wrap="square" rtlCol="0" anchor="ctr">
+            <a:noAutofit/>
+          </a:bodyPr>
+          <a:lstStyle/>
+          <a:p>
+            <a:pPr algn="ctr"/>
+            <a:endParaRPr lang="zh-CN" altLang="en-US" dirty="0">
+              <a:latin typeface="微软雅黑" pitchFamily="34" charset="-122"/>
+              <a:ea typeface="微软雅黑" pitchFamily="34" charset="-122"/>
+            </a:endParaRPr>
+          </a:p>
+        </p:txBody>
+      </p:sp>
+      <p:sp>
+        <p:nvSpPr>
+          <p:cNvPr id="352" name="椭圆 351">
+            <a:extLst>
+              <a:ext uri="{FF2B5EF4-FFF2-40B4-BE49-F238E27FC236}">
+                <a16:creationId xmlns:a16="http://schemas.microsoft.com/office/drawing/2014/main" id="{C7DD6A64-BA47-6006-019A-3B692C5593EA}"/>
+              </a:ext>
+            </a:extLst>
+          </p:cNvPr>
+          <p:cNvSpPr>
+            <a:spLocks noChangeAspect="1"/>
+          </p:cNvSpPr>
+          <p:nvPr/>
+        </p:nvSpPr>
+        <p:spPr>
+          <a:xfrm>
+            <a:off x="7194970" y="5514854"/>
+            <a:ext cx="144000" cy="144000"/>
+          </a:xfrm>
+          <a:prstGeom prst="ellipse">
+            <a:avLst/>
+          </a:prstGeom>
+          <a:ln>
+            <a:solidFill>
+              <a:schemeClr val="tx1"/>
+            </a:solidFill>
+          </a:ln>
+        </p:spPr>
+        <p:txBody>
+          <a:bodyPr wrap="square" rtlCol="0" anchor="ctr">
+            <a:noAutofit/>
+          </a:bodyPr>
+          <a:lstStyle/>
+          <a:p>
+            <a:pPr algn="ctr"/>
+            <a:endParaRPr lang="zh-CN" altLang="en-US" dirty="0">
+              <a:latin typeface="微软雅黑" pitchFamily="34" charset="-122"/>
+              <a:ea typeface="微软雅黑" pitchFamily="34" charset="-122"/>
+            </a:endParaRPr>
+          </a:p>
+        </p:txBody>
+      </p:sp>
+      <p:sp>
+        <p:nvSpPr>
+          <p:cNvPr id="354" name="椭圆 353">
+            <a:extLst>
+              <a:ext uri="{FF2B5EF4-FFF2-40B4-BE49-F238E27FC236}">
+                <a16:creationId xmlns:a16="http://schemas.microsoft.com/office/drawing/2014/main" id="{0827062E-2804-2935-9A0B-2DB24AF25F56}"/>
+              </a:ext>
+            </a:extLst>
+          </p:cNvPr>
+          <p:cNvSpPr>
+            <a:spLocks noChangeAspect="1"/>
+          </p:cNvSpPr>
+          <p:nvPr/>
+        </p:nvSpPr>
+        <p:spPr>
+          <a:xfrm>
+            <a:off x="7859916" y="5514854"/>
+            <a:ext cx="144000" cy="144000"/>
+          </a:xfrm>
+          <a:prstGeom prst="ellipse">
+            <a:avLst/>
+          </a:prstGeom>
+          <a:ln>
+            <a:solidFill>
+              <a:schemeClr val="tx1"/>
+            </a:solidFill>
+          </a:ln>
+        </p:spPr>
+        <p:txBody>
+          <a:bodyPr wrap="square" rtlCol="0" anchor="ctr">
+            <a:noAutofit/>
+          </a:bodyPr>
+          <a:lstStyle/>
+          <a:p>
+            <a:pPr algn="ctr"/>
+            <a:endParaRPr lang="zh-CN" altLang="en-US" dirty="0">
+              <a:latin typeface="微软雅黑" pitchFamily="34" charset="-122"/>
+              <a:ea typeface="微软雅黑" pitchFamily="34" charset="-122"/>
+            </a:endParaRPr>
+          </a:p>
+        </p:txBody>
+      </p:sp>
+      <p:sp>
+        <p:nvSpPr>
+          <p:cNvPr id="356" name="椭圆 355">
+            <a:extLst>
+              <a:ext uri="{FF2B5EF4-FFF2-40B4-BE49-F238E27FC236}">
+                <a16:creationId xmlns:a16="http://schemas.microsoft.com/office/drawing/2014/main" id="{D8EAA3A5-D66D-41D9-2CB4-E231EE6E5DBF}"/>
+              </a:ext>
+            </a:extLst>
+          </p:cNvPr>
+          <p:cNvSpPr>
+            <a:spLocks noChangeAspect="1"/>
+          </p:cNvSpPr>
+          <p:nvPr/>
+        </p:nvSpPr>
+        <p:spPr>
+          <a:xfrm>
+            <a:off x="5200135" y="3668241"/>
+            <a:ext cx="144000" cy="144000"/>
+          </a:xfrm>
+          <a:prstGeom prst="ellipse">
+            <a:avLst/>
+          </a:prstGeom>
+          <a:ln>
+            <a:solidFill>
+              <a:schemeClr val="tx1"/>
+            </a:solidFill>
+          </a:ln>
+        </p:spPr>
+        <p:txBody>
+          <a:bodyPr wrap="square" rtlCol="0" anchor="ctr">
+            <a:noAutofit/>
+          </a:bodyPr>
+          <a:lstStyle/>
+          <a:p>
+            <a:pPr algn="ctr"/>
+            <a:endParaRPr lang="zh-CN" altLang="en-US" dirty="0">
+              <a:latin typeface="微软雅黑" pitchFamily="34" charset="-122"/>
+              <a:ea typeface="微软雅黑" pitchFamily="34" charset="-122"/>
+            </a:endParaRPr>
+          </a:p>
+        </p:txBody>
+      </p:sp>
+      <p:sp>
+        <p:nvSpPr>
+          <p:cNvPr id="358" name="椭圆 357">
+            <a:extLst>
+              <a:ext uri="{FF2B5EF4-FFF2-40B4-BE49-F238E27FC236}">
+                <a16:creationId xmlns:a16="http://schemas.microsoft.com/office/drawing/2014/main" id="{E39241A1-AC35-082F-4CEB-D4DDD6609792}"/>
+              </a:ext>
+            </a:extLst>
+          </p:cNvPr>
+          <p:cNvSpPr>
+            <a:spLocks noChangeAspect="1"/>
+          </p:cNvSpPr>
+          <p:nvPr/>
+        </p:nvSpPr>
+        <p:spPr>
+          <a:xfrm>
+            <a:off x="5865080" y="3668241"/>
+            <a:ext cx="144000" cy="144000"/>
+          </a:xfrm>
+          <a:prstGeom prst="ellipse">
+            <a:avLst/>
+          </a:prstGeom>
+          <a:ln>
+            <a:solidFill>
+              <a:schemeClr val="tx1"/>
+            </a:solidFill>
+          </a:ln>
+        </p:spPr>
+        <p:txBody>
+          <a:bodyPr wrap="square" rtlCol="0" anchor="ctr">
+            <a:noAutofit/>
+          </a:bodyPr>
+          <a:lstStyle/>
+          <a:p>
+            <a:pPr algn="ctr"/>
+            <a:endParaRPr lang="zh-CN" altLang="en-US" dirty="0">
+              <a:latin typeface="微软雅黑" pitchFamily="34" charset="-122"/>
+              <a:ea typeface="微软雅黑" pitchFamily="34" charset="-122"/>
+            </a:endParaRPr>
+          </a:p>
+        </p:txBody>
+      </p:sp>
+      <p:sp>
+        <p:nvSpPr>
+          <p:cNvPr id="360" name="椭圆 359">
+            <a:extLst>
+              <a:ext uri="{FF2B5EF4-FFF2-40B4-BE49-F238E27FC236}">
+                <a16:creationId xmlns:a16="http://schemas.microsoft.com/office/drawing/2014/main" id="{7AB018F1-0DAA-0C4D-565B-98C1C3873B3A}"/>
+              </a:ext>
+            </a:extLst>
+          </p:cNvPr>
+          <p:cNvSpPr>
+            <a:spLocks noChangeAspect="1"/>
+          </p:cNvSpPr>
+          <p:nvPr/>
+        </p:nvSpPr>
+        <p:spPr>
+          <a:xfrm>
+            <a:off x="6530025" y="3668241"/>
+            <a:ext cx="144000" cy="144000"/>
+          </a:xfrm>
+          <a:prstGeom prst="ellipse">
+            <a:avLst/>
+          </a:prstGeom>
+          <a:ln>
+            <a:solidFill>
+              <a:schemeClr val="tx1"/>
+            </a:solidFill>
+          </a:ln>
+        </p:spPr>
+        <p:txBody>
+          <a:bodyPr wrap="square" rtlCol="0" anchor="ctr">
+            <a:noAutofit/>
+          </a:bodyPr>
+          <a:lstStyle/>
+          <a:p>
+            <a:pPr algn="ctr"/>
+            <a:endParaRPr lang="zh-CN" altLang="en-US" dirty="0">
+              <a:latin typeface="微软雅黑" pitchFamily="34" charset="-122"/>
+              <a:ea typeface="微软雅黑" pitchFamily="34" charset="-122"/>
+            </a:endParaRPr>
+          </a:p>
+        </p:txBody>
+      </p:sp>
+      <p:sp>
+        <p:nvSpPr>
+          <p:cNvPr id="362" name="椭圆 361">
+            <a:extLst>
+              <a:ext uri="{FF2B5EF4-FFF2-40B4-BE49-F238E27FC236}">
+                <a16:creationId xmlns:a16="http://schemas.microsoft.com/office/drawing/2014/main" id="{6829970F-A7BE-FD26-97A3-51C14FBB3ACE}"/>
+              </a:ext>
+            </a:extLst>
+          </p:cNvPr>
+          <p:cNvSpPr>
+            <a:spLocks noChangeAspect="1"/>
+          </p:cNvSpPr>
+          <p:nvPr/>
+        </p:nvSpPr>
+        <p:spPr>
+          <a:xfrm>
+            <a:off x="7194970" y="3668241"/>
+            <a:ext cx="144000" cy="144000"/>
+          </a:xfrm>
+          <a:prstGeom prst="ellipse">
+            <a:avLst/>
+          </a:prstGeom>
+          <a:ln>
+            <a:solidFill>
+              <a:schemeClr val="tx1"/>
+            </a:solidFill>
+          </a:ln>
+        </p:spPr>
+        <p:txBody>
+          <a:bodyPr wrap="square" rtlCol="0" anchor="ctr">
+            <a:noAutofit/>
+          </a:bodyPr>
+          <a:lstStyle/>
+          <a:p>
+            <a:pPr algn="ctr"/>
+            <a:endParaRPr lang="zh-CN" altLang="en-US" dirty="0">
+              <a:latin typeface="微软雅黑" pitchFamily="34" charset="-122"/>
+              <a:ea typeface="微软雅黑" pitchFamily="34" charset="-122"/>
+            </a:endParaRPr>
+          </a:p>
+        </p:txBody>
+      </p:sp>
+      <p:sp>
+        <p:nvSpPr>
+          <p:cNvPr id="364" name="椭圆 363">
+            <a:extLst>
+              <a:ext uri="{FF2B5EF4-FFF2-40B4-BE49-F238E27FC236}">
+                <a16:creationId xmlns:a16="http://schemas.microsoft.com/office/drawing/2014/main" id="{9F967DCE-339F-6F58-C6AD-910AEB557CF0}"/>
+              </a:ext>
+            </a:extLst>
+          </p:cNvPr>
+          <p:cNvSpPr>
+            <a:spLocks noChangeAspect="1"/>
+          </p:cNvSpPr>
+          <p:nvPr/>
+        </p:nvSpPr>
+        <p:spPr>
+          <a:xfrm>
+            <a:off x="7859916" y="3668241"/>
+            <a:ext cx="144000" cy="144000"/>
+          </a:xfrm>
+          <a:prstGeom prst="ellipse">
+            <a:avLst/>
+          </a:prstGeom>
+          <a:ln>
+            <a:solidFill>
+              <a:schemeClr val="tx1"/>
+            </a:solidFill>
+          </a:ln>
+        </p:spPr>
+        <p:txBody>
+          <a:bodyPr wrap="square" rtlCol="0" anchor="ctr">
+            <a:noAutofit/>
+          </a:bodyPr>
+          <a:lstStyle/>
+          <a:p>
+            <a:pPr algn="ctr"/>
+            <a:endParaRPr lang="zh-CN" altLang="en-US" dirty="0">
+              <a:latin typeface="微软雅黑" pitchFamily="34" charset="-122"/>
+              <a:ea typeface="微软雅黑" pitchFamily="34" charset="-122"/>
+            </a:endParaRPr>
+          </a:p>
+        </p:txBody>
+      </p:sp>
+      <p:sp>
+        <p:nvSpPr>
+          <p:cNvPr id="366" name="椭圆 365">
+            <a:extLst>
+              <a:ext uri="{FF2B5EF4-FFF2-40B4-BE49-F238E27FC236}">
+                <a16:creationId xmlns:a16="http://schemas.microsoft.com/office/drawing/2014/main" id="{1D4C960D-9DD1-CD0A-FE20-0CDCEAE99D7A}"/>
+              </a:ext>
+            </a:extLst>
+          </p:cNvPr>
+          <p:cNvSpPr>
+            <a:spLocks noChangeAspect="1"/>
+          </p:cNvSpPr>
+          <p:nvPr/>
+        </p:nvSpPr>
+        <p:spPr>
+          <a:xfrm>
+            <a:off x="5200135" y="4051647"/>
+            <a:ext cx="144000" cy="144000"/>
+          </a:xfrm>
+          <a:prstGeom prst="ellipse">
+            <a:avLst/>
+          </a:prstGeom>
+          <a:ln>
+            <a:solidFill>
+              <a:schemeClr val="tx1"/>
+            </a:solidFill>
+          </a:ln>
+        </p:spPr>
+        <p:txBody>
+          <a:bodyPr wrap="square" rtlCol="0" anchor="ctr">
+            <a:noAutofit/>
+          </a:bodyPr>
+          <a:lstStyle/>
+          <a:p>
+            <a:pPr algn="ctr"/>
+            <a:endParaRPr lang="zh-CN" altLang="en-US" dirty="0">
+              <a:latin typeface="微软雅黑" pitchFamily="34" charset="-122"/>
+              <a:ea typeface="微软雅黑" pitchFamily="34" charset="-122"/>
+            </a:endParaRPr>
+          </a:p>
+        </p:txBody>
+      </p:sp>
+      <p:sp>
+        <p:nvSpPr>
+          <p:cNvPr id="368" name="椭圆 367">
+            <a:extLst>
+              <a:ext uri="{FF2B5EF4-FFF2-40B4-BE49-F238E27FC236}">
+                <a16:creationId xmlns:a16="http://schemas.microsoft.com/office/drawing/2014/main" id="{48ED6C72-6DB8-7E30-133F-48583A0802B0}"/>
+              </a:ext>
+            </a:extLst>
+          </p:cNvPr>
+          <p:cNvSpPr>
+            <a:spLocks noChangeAspect="1"/>
+          </p:cNvSpPr>
+          <p:nvPr/>
+        </p:nvSpPr>
+        <p:spPr>
+          <a:xfrm>
+            <a:off x="5865080" y="4051647"/>
+            <a:ext cx="144000" cy="144000"/>
+          </a:xfrm>
+          <a:prstGeom prst="ellipse">
+            <a:avLst/>
+          </a:prstGeom>
+          <a:ln>
+            <a:solidFill>
+              <a:schemeClr val="tx1"/>
+            </a:solidFill>
+          </a:ln>
+        </p:spPr>
+        <p:txBody>
+          <a:bodyPr wrap="square" rtlCol="0" anchor="ctr">
+            <a:noAutofit/>
+          </a:bodyPr>
+          <a:lstStyle/>
+          <a:p>
+            <a:pPr algn="ctr"/>
+            <a:endParaRPr lang="zh-CN" altLang="en-US" dirty="0">
+              <a:latin typeface="微软雅黑" pitchFamily="34" charset="-122"/>
+              <a:ea typeface="微软雅黑" pitchFamily="34" charset="-122"/>
+            </a:endParaRPr>
+          </a:p>
+        </p:txBody>
+      </p:sp>
+      <p:sp>
+        <p:nvSpPr>
+          <p:cNvPr id="370" name="椭圆 369">
+            <a:extLst>
+              <a:ext uri="{FF2B5EF4-FFF2-40B4-BE49-F238E27FC236}">
+                <a16:creationId xmlns:a16="http://schemas.microsoft.com/office/drawing/2014/main" id="{65084565-F5BF-BF06-FCC3-C94EE44E21D6}"/>
+              </a:ext>
+            </a:extLst>
+          </p:cNvPr>
+          <p:cNvSpPr>
+            <a:spLocks noChangeAspect="1"/>
+          </p:cNvSpPr>
+          <p:nvPr/>
+        </p:nvSpPr>
+        <p:spPr>
+          <a:xfrm>
+            <a:off x="6530025" y="4051647"/>
+            <a:ext cx="144000" cy="144000"/>
+          </a:xfrm>
+          <a:prstGeom prst="ellipse">
+            <a:avLst/>
+          </a:prstGeom>
+          <a:ln>
+            <a:solidFill>
+              <a:schemeClr val="tx1"/>
+            </a:solidFill>
+          </a:ln>
+        </p:spPr>
+        <p:txBody>
+          <a:bodyPr wrap="square" rtlCol="0" anchor="ctr">
+            <a:noAutofit/>
+          </a:bodyPr>
+          <a:lstStyle/>
+          <a:p>
+            <a:pPr algn="ctr"/>
+            <a:endParaRPr lang="zh-CN" altLang="en-US" dirty="0">
+              <a:latin typeface="微软雅黑" pitchFamily="34" charset="-122"/>
+              <a:ea typeface="微软雅黑" pitchFamily="34" charset="-122"/>
+            </a:endParaRPr>
+          </a:p>
+        </p:txBody>
+      </p:sp>
+      <p:sp>
+        <p:nvSpPr>
+          <p:cNvPr id="372" name="椭圆 371">
+            <a:extLst>
+              <a:ext uri="{FF2B5EF4-FFF2-40B4-BE49-F238E27FC236}">
+                <a16:creationId xmlns:a16="http://schemas.microsoft.com/office/drawing/2014/main" id="{FEED4646-CCB7-F5D3-423A-D3FBC46D2ECF}"/>
+              </a:ext>
+            </a:extLst>
+          </p:cNvPr>
+          <p:cNvSpPr>
+            <a:spLocks noChangeAspect="1"/>
+          </p:cNvSpPr>
+          <p:nvPr/>
+        </p:nvSpPr>
+        <p:spPr>
+          <a:xfrm>
+            <a:off x="7194970" y="4051647"/>
+            <a:ext cx="144000" cy="144000"/>
+          </a:xfrm>
+          <a:prstGeom prst="ellipse">
+            <a:avLst/>
+          </a:prstGeom>
+          <a:ln>
+            <a:solidFill>
+              <a:schemeClr val="tx1"/>
+            </a:solidFill>
+          </a:ln>
+        </p:spPr>
+        <p:txBody>
+          <a:bodyPr wrap="square" rtlCol="0" anchor="ctr">
+            <a:noAutofit/>
+          </a:bodyPr>
+          <a:lstStyle/>
+          <a:p>
+            <a:pPr algn="ctr"/>
+            <a:endParaRPr lang="zh-CN" altLang="en-US" dirty="0">
+              <a:latin typeface="微软雅黑" pitchFamily="34" charset="-122"/>
+              <a:ea typeface="微软雅黑" pitchFamily="34" charset="-122"/>
+            </a:endParaRPr>
+          </a:p>
+        </p:txBody>
+      </p:sp>
+      <p:sp>
+        <p:nvSpPr>
+          <p:cNvPr id="374" name="椭圆 373">
+            <a:extLst>
+              <a:ext uri="{FF2B5EF4-FFF2-40B4-BE49-F238E27FC236}">
+                <a16:creationId xmlns:a16="http://schemas.microsoft.com/office/drawing/2014/main" id="{AD32F99A-DF9A-CE03-1475-3B0D586509A0}"/>
+              </a:ext>
+            </a:extLst>
+          </p:cNvPr>
+          <p:cNvSpPr>
+            <a:spLocks noChangeAspect="1"/>
+          </p:cNvSpPr>
+          <p:nvPr/>
+        </p:nvSpPr>
+        <p:spPr>
+          <a:xfrm>
+            <a:off x="7859916" y="4051647"/>
+            <a:ext cx="144000" cy="144000"/>
+          </a:xfrm>
+          <a:prstGeom prst="ellipse">
+            <a:avLst/>
+          </a:prstGeom>
+          <a:ln>
+            <a:solidFill>
+              <a:schemeClr val="tx1"/>
+            </a:solidFill>
+          </a:ln>
+        </p:spPr>
+        <p:txBody>
+          <a:bodyPr wrap="square" rtlCol="0" anchor="ctr">
+            <a:noAutofit/>
+          </a:bodyPr>
+          <a:lstStyle/>
+          <a:p>
+            <a:pPr algn="ctr"/>
+            <a:endParaRPr lang="zh-CN" altLang="en-US" dirty="0">
+              <a:latin typeface="微软雅黑" pitchFamily="34" charset="-122"/>
+              <a:ea typeface="微软雅黑" pitchFamily="34" charset="-122"/>
+            </a:endParaRPr>
+          </a:p>
+        </p:txBody>
+      </p:sp>
+      <p:sp>
+        <p:nvSpPr>
+          <p:cNvPr id="376" name="矩形 375">
+            <a:extLst>
+              <a:ext uri="{FF2B5EF4-FFF2-40B4-BE49-F238E27FC236}">
+                <a16:creationId xmlns:a16="http://schemas.microsoft.com/office/drawing/2014/main" id="{CBA0A645-EFEB-1681-E4EA-EE35D263BA4E}"/>
+              </a:ext>
+            </a:extLst>
+          </p:cNvPr>
+          <p:cNvSpPr/>
+          <p:nvPr/>
+        </p:nvSpPr>
+        <p:spPr>
+          <a:xfrm>
+            <a:off x="5007630" y="3408359"/>
+            <a:ext cx="3229232" cy="1126155"/>
+          </a:xfrm>
+          <a:prstGeom prst="rect">
+            <a:avLst/>
+          </a:prstGeom>
+          <a:solidFill>
+            <a:schemeClr val="accent1">
+              <a:alpha val="20000"/>
+            </a:schemeClr>
+          </a:solidFill>
+          <a:ln>
+            <a:solidFill>
+              <a:schemeClr val="tx1"/>
+            </a:solidFill>
+          </a:ln>
+        </p:spPr>
+        <p:txBody>
+          <a:bodyPr wrap="square" rtlCol="0" anchor="ctr">
+            <a:noAutofit/>
+          </a:bodyPr>
+          <a:lstStyle/>
+          <a:p>
+            <a:pPr algn="ctr"/>
+            <a:endParaRPr lang="zh-CN" altLang="en-US" dirty="0">
+              <a:latin typeface="微软雅黑" pitchFamily="34" charset="-122"/>
+              <a:ea typeface="微软雅黑" pitchFamily="34" charset="-122"/>
+            </a:endParaRPr>
+          </a:p>
+        </p:txBody>
+      </p:sp>
+      <p:sp>
+        <p:nvSpPr>
+          <p:cNvPr id="378" name="矩形 377">
+            <a:extLst>
+              <a:ext uri="{FF2B5EF4-FFF2-40B4-BE49-F238E27FC236}">
+                <a16:creationId xmlns:a16="http://schemas.microsoft.com/office/drawing/2014/main" id="{55EA9498-FFFF-5D63-7E8A-189803A27F4A}"/>
+              </a:ext>
+            </a:extLst>
+          </p:cNvPr>
+          <p:cNvSpPr/>
+          <p:nvPr/>
+        </p:nvSpPr>
+        <p:spPr>
+          <a:xfrm>
+            <a:off x="5007630" y="4998296"/>
+            <a:ext cx="3229232" cy="779645"/>
+          </a:xfrm>
+          <a:prstGeom prst="rect">
+            <a:avLst/>
+          </a:prstGeom>
+          <a:solidFill>
+            <a:schemeClr val="accent6">
+              <a:alpha val="20000"/>
+            </a:schemeClr>
+          </a:solidFill>
+          <a:ln>
+            <a:solidFill>
+              <a:schemeClr val="tx1"/>
+            </a:solidFill>
+          </a:ln>
+        </p:spPr>
+        <p:txBody>
+          <a:bodyPr wrap="square" rtlCol="0" anchor="ctr">
+            <a:noAutofit/>
+          </a:bodyPr>
+          <a:lstStyle/>
+          <a:p>
+            <a:pPr algn="ctr"/>
+            <a:endParaRPr lang="zh-CN" altLang="en-US" dirty="0">
+              <a:latin typeface="微软雅黑" pitchFamily="34" charset="-122"/>
+              <a:ea typeface="微软雅黑" pitchFamily="34" charset="-122"/>
+            </a:endParaRPr>
+          </a:p>
+        </p:txBody>
+      </p:sp>
+      <p:sp>
+        <p:nvSpPr>
+          <p:cNvPr id="380" name="矩形 379">
+            <a:extLst>
+              <a:ext uri="{FF2B5EF4-FFF2-40B4-BE49-F238E27FC236}">
+                <a16:creationId xmlns:a16="http://schemas.microsoft.com/office/drawing/2014/main" id="{65E5ABD3-D7B3-A488-3BDD-5F2FD1045F3B}"/>
+              </a:ext>
+            </a:extLst>
+          </p:cNvPr>
+          <p:cNvSpPr/>
+          <p:nvPr/>
+        </p:nvSpPr>
+        <p:spPr>
+          <a:xfrm>
+            <a:off x="5007630" y="1001437"/>
+            <a:ext cx="3229232" cy="890413"/>
+          </a:xfrm>
+          <a:prstGeom prst="rect">
+            <a:avLst/>
+          </a:prstGeom>
+          <a:solidFill>
+            <a:schemeClr val="bg1">
+              <a:lumMod val="50000"/>
+              <a:alpha val="20000"/>
+            </a:schemeClr>
+          </a:solidFill>
+          <a:ln>
+            <a:solidFill>
+              <a:schemeClr val="tx1"/>
+            </a:solidFill>
+          </a:ln>
+        </p:spPr>
+        <p:txBody>
+          <a:bodyPr wrap="square" rtlCol="0" anchor="ctr">
+            <a:noAutofit/>
+          </a:bodyPr>
+          <a:lstStyle/>
+          <a:p>
+            <a:pPr algn="ctr"/>
+            <a:endParaRPr lang="zh-CN" altLang="en-US" dirty="0">
+              <a:latin typeface="微软雅黑" pitchFamily="34" charset="-122"/>
+              <a:ea typeface="微软雅黑" pitchFamily="34" charset="-122"/>
+            </a:endParaRPr>
+          </a:p>
+        </p:txBody>
+      </p:sp>
+      <p:sp>
+        <p:nvSpPr>
+          <p:cNvPr id="382" name="椭圆 381">
+            <a:extLst>
+              <a:ext uri="{FF2B5EF4-FFF2-40B4-BE49-F238E27FC236}">
+                <a16:creationId xmlns:a16="http://schemas.microsoft.com/office/drawing/2014/main" id="{0F3E8848-C03C-CDEA-DEF2-BEF7832E6C76}"/>
+              </a:ext>
+            </a:extLst>
+          </p:cNvPr>
+          <p:cNvSpPr>
+            <a:spLocks noChangeAspect="1"/>
+          </p:cNvSpPr>
+          <p:nvPr/>
+        </p:nvSpPr>
+        <p:spPr>
+          <a:xfrm>
+            <a:off x="5200135" y="2389071"/>
+            <a:ext cx="144000" cy="144000"/>
+          </a:xfrm>
+          <a:prstGeom prst="ellipse">
+            <a:avLst/>
+          </a:prstGeom>
+          <a:ln>
+            <a:solidFill>
+              <a:schemeClr val="tx1"/>
+            </a:solidFill>
+          </a:ln>
+        </p:spPr>
+        <p:txBody>
+          <a:bodyPr wrap="square" rtlCol="0" anchor="ctr">
+            <a:noAutofit/>
+          </a:bodyPr>
+          <a:lstStyle/>
+          <a:p>
+            <a:pPr algn="ctr"/>
+            <a:endParaRPr lang="zh-CN" altLang="en-US" dirty="0">
+              <a:latin typeface="微软雅黑" pitchFamily="34" charset="-122"/>
+              <a:ea typeface="微软雅黑" pitchFamily="34" charset="-122"/>
+            </a:endParaRPr>
+          </a:p>
+        </p:txBody>
+      </p:sp>
+      <p:sp>
+        <p:nvSpPr>
+          <p:cNvPr id="384" name="椭圆 383">
+            <a:extLst>
+              <a:ext uri="{FF2B5EF4-FFF2-40B4-BE49-F238E27FC236}">
+                <a16:creationId xmlns:a16="http://schemas.microsoft.com/office/drawing/2014/main" id="{F9BE101D-8037-BB28-4961-49532A90A132}"/>
+              </a:ext>
+            </a:extLst>
+          </p:cNvPr>
+          <p:cNvSpPr>
+            <a:spLocks noChangeAspect="1"/>
+          </p:cNvSpPr>
+          <p:nvPr/>
+        </p:nvSpPr>
+        <p:spPr>
+          <a:xfrm>
+            <a:off x="5865080" y="2389071"/>
+            <a:ext cx="144000" cy="144000"/>
+          </a:xfrm>
+          <a:prstGeom prst="ellipse">
+            <a:avLst/>
+          </a:prstGeom>
+          <a:ln>
+            <a:solidFill>
+              <a:schemeClr val="tx1"/>
+            </a:solidFill>
+          </a:ln>
+        </p:spPr>
+        <p:txBody>
+          <a:bodyPr wrap="square" rtlCol="0" anchor="ctr">
+            <a:noAutofit/>
+          </a:bodyPr>
+          <a:lstStyle/>
+          <a:p>
+            <a:pPr algn="ctr"/>
+            <a:endParaRPr lang="zh-CN" altLang="en-US" dirty="0">
+              <a:latin typeface="微软雅黑" pitchFamily="34" charset="-122"/>
+              <a:ea typeface="微软雅黑" pitchFamily="34" charset="-122"/>
+            </a:endParaRPr>
+          </a:p>
+        </p:txBody>
+      </p:sp>
+      <p:sp>
+        <p:nvSpPr>
+          <p:cNvPr id="386" name="椭圆 385">
+            <a:extLst>
+              <a:ext uri="{FF2B5EF4-FFF2-40B4-BE49-F238E27FC236}">
+                <a16:creationId xmlns:a16="http://schemas.microsoft.com/office/drawing/2014/main" id="{7C48C009-AE9D-C800-4359-3DA44AD982DC}"/>
+              </a:ext>
+            </a:extLst>
+          </p:cNvPr>
+          <p:cNvSpPr>
+            <a:spLocks noChangeAspect="1"/>
+          </p:cNvSpPr>
+          <p:nvPr/>
+        </p:nvSpPr>
+        <p:spPr>
+          <a:xfrm>
+            <a:off x="6530025" y="2389071"/>
+            <a:ext cx="144000" cy="144000"/>
+          </a:xfrm>
+          <a:prstGeom prst="ellipse">
+            <a:avLst/>
+          </a:prstGeom>
+          <a:ln>
+            <a:solidFill>
+              <a:schemeClr val="tx1"/>
+            </a:solidFill>
+          </a:ln>
+        </p:spPr>
+        <p:txBody>
+          <a:bodyPr wrap="square" rtlCol="0" anchor="ctr">
+            <a:noAutofit/>
+          </a:bodyPr>
+          <a:lstStyle/>
+          <a:p>
+            <a:pPr algn="ctr"/>
+            <a:endParaRPr lang="zh-CN" altLang="en-US" dirty="0">
+              <a:latin typeface="微软雅黑" pitchFamily="34" charset="-122"/>
+              <a:ea typeface="微软雅黑" pitchFamily="34" charset="-122"/>
+            </a:endParaRPr>
+          </a:p>
+        </p:txBody>
+      </p:sp>
+      <p:sp>
+        <p:nvSpPr>
+          <p:cNvPr id="388" name="椭圆 387">
+            <a:extLst>
+              <a:ext uri="{FF2B5EF4-FFF2-40B4-BE49-F238E27FC236}">
+                <a16:creationId xmlns:a16="http://schemas.microsoft.com/office/drawing/2014/main" id="{0A66E959-A7B3-9DF1-6CED-933E4EADE0F1}"/>
+              </a:ext>
+            </a:extLst>
+          </p:cNvPr>
+          <p:cNvSpPr>
+            <a:spLocks noChangeAspect="1"/>
+          </p:cNvSpPr>
+          <p:nvPr/>
+        </p:nvSpPr>
+        <p:spPr>
+          <a:xfrm>
+            <a:off x="7194970" y="2389071"/>
+            <a:ext cx="144000" cy="144000"/>
+          </a:xfrm>
+          <a:prstGeom prst="ellipse">
+            <a:avLst/>
+          </a:prstGeom>
+          <a:ln>
+            <a:solidFill>
+              <a:schemeClr val="tx1"/>
+            </a:solidFill>
+          </a:ln>
+        </p:spPr>
+        <p:txBody>
+          <a:bodyPr wrap="square" rtlCol="0" anchor="ctr">
+            <a:noAutofit/>
+          </a:bodyPr>
+          <a:lstStyle/>
+          <a:p>
+            <a:pPr algn="ctr"/>
+            <a:endParaRPr lang="zh-CN" altLang="en-US" dirty="0">
+              <a:latin typeface="微软雅黑" pitchFamily="34" charset="-122"/>
+              <a:ea typeface="微软雅黑" pitchFamily="34" charset="-122"/>
+            </a:endParaRPr>
+          </a:p>
+        </p:txBody>
+      </p:sp>
+      <p:sp>
+        <p:nvSpPr>
+          <p:cNvPr id="390" name="椭圆 389">
+            <a:extLst>
+              <a:ext uri="{FF2B5EF4-FFF2-40B4-BE49-F238E27FC236}">
+                <a16:creationId xmlns:a16="http://schemas.microsoft.com/office/drawing/2014/main" id="{32C3B25A-41E4-B129-B572-F57DFA376342}"/>
+              </a:ext>
+            </a:extLst>
+          </p:cNvPr>
+          <p:cNvSpPr>
+            <a:spLocks noChangeAspect="1"/>
+          </p:cNvSpPr>
+          <p:nvPr/>
+        </p:nvSpPr>
+        <p:spPr>
+          <a:xfrm>
+            <a:off x="7859916" y="2389071"/>
+            <a:ext cx="144000" cy="144000"/>
+          </a:xfrm>
+          <a:prstGeom prst="ellipse">
+            <a:avLst/>
+          </a:prstGeom>
+          <a:ln>
+            <a:solidFill>
+              <a:schemeClr val="tx1"/>
+            </a:solidFill>
+          </a:ln>
+        </p:spPr>
+        <p:txBody>
+          <a:bodyPr wrap="square" rtlCol="0" anchor="ctr">
+            <a:noAutofit/>
+          </a:bodyPr>
+          <a:lstStyle/>
+          <a:p>
+            <a:pPr algn="ctr"/>
+            <a:endParaRPr lang="zh-CN" altLang="en-US" dirty="0">
+              <a:latin typeface="微软雅黑" pitchFamily="34" charset="-122"/>
+              <a:ea typeface="微软雅黑" pitchFamily="34" charset="-122"/>
+            </a:endParaRPr>
+          </a:p>
+        </p:txBody>
+      </p:sp>
+      <p:sp>
+        <p:nvSpPr>
+          <p:cNvPr id="392" name="椭圆 391">
+            <a:extLst>
+              <a:ext uri="{FF2B5EF4-FFF2-40B4-BE49-F238E27FC236}">
+                <a16:creationId xmlns:a16="http://schemas.microsoft.com/office/drawing/2014/main" id="{4AA2E2C1-4BD3-9A47-60EE-BACEE84765D0}"/>
+              </a:ext>
+            </a:extLst>
+          </p:cNvPr>
+          <p:cNvSpPr>
+            <a:spLocks noChangeAspect="1"/>
+          </p:cNvSpPr>
+          <p:nvPr/>
+        </p:nvSpPr>
+        <p:spPr>
+          <a:xfrm>
+            <a:off x="5200135" y="2772477"/>
+            <a:ext cx="144000" cy="144000"/>
+          </a:xfrm>
+          <a:prstGeom prst="ellipse">
+            <a:avLst/>
+          </a:prstGeom>
+          <a:ln>
+            <a:solidFill>
+              <a:schemeClr val="tx1"/>
+            </a:solidFill>
+          </a:ln>
+        </p:spPr>
+        <p:txBody>
+          <a:bodyPr wrap="square" rtlCol="0" anchor="ctr">
+            <a:noAutofit/>
+          </a:bodyPr>
+          <a:lstStyle/>
+          <a:p>
+            <a:pPr algn="ctr"/>
+            <a:endParaRPr lang="zh-CN" altLang="en-US" dirty="0">
+              <a:latin typeface="微软雅黑" pitchFamily="34" charset="-122"/>
+              <a:ea typeface="微软雅黑" pitchFamily="34" charset="-122"/>
+            </a:endParaRPr>
+          </a:p>
+        </p:txBody>
+      </p:sp>
+      <p:sp>
+        <p:nvSpPr>
+          <p:cNvPr id="394" name="椭圆 393">
+            <a:extLst>
+              <a:ext uri="{FF2B5EF4-FFF2-40B4-BE49-F238E27FC236}">
+                <a16:creationId xmlns:a16="http://schemas.microsoft.com/office/drawing/2014/main" id="{3F29EB55-9821-EDBD-1427-CB1EA246D67F}"/>
+              </a:ext>
+            </a:extLst>
+          </p:cNvPr>
+          <p:cNvSpPr>
+            <a:spLocks noChangeAspect="1"/>
+          </p:cNvSpPr>
+          <p:nvPr/>
+        </p:nvSpPr>
+        <p:spPr>
+          <a:xfrm>
+            <a:off x="5865080" y="2772477"/>
+            <a:ext cx="144000" cy="144000"/>
+          </a:xfrm>
+          <a:prstGeom prst="ellipse">
+            <a:avLst/>
+          </a:prstGeom>
+          <a:ln>
+            <a:solidFill>
+              <a:schemeClr val="tx1"/>
+            </a:solidFill>
+          </a:ln>
+        </p:spPr>
+        <p:txBody>
+          <a:bodyPr wrap="square" rtlCol="0" anchor="ctr">
+            <a:noAutofit/>
+          </a:bodyPr>
+          <a:lstStyle/>
+          <a:p>
+            <a:pPr algn="ctr"/>
+            <a:endParaRPr lang="zh-CN" altLang="en-US" dirty="0">
+              <a:latin typeface="微软雅黑" pitchFamily="34" charset="-122"/>
+              <a:ea typeface="微软雅黑" pitchFamily="34" charset="-122"/>
+            </a:endParaRPr>
+          </a:p>
+        </p:txBody>
+      </p:sp>
+      <p:sp>
+        <p:nvSpPr>
+          <p:cNvPr id="396" name="椭圆 395">
+            <a:extLst>
+              <a:ext uri="{FF2B5EF4-FFF2-40B4-BE49-F238E27FC236}">
+                <a16:creationId xmlns:a16="http://schemas.microsoft.com/office/drawing/2014/main" id="{2700AD3F-42CB-2538-CC4A-C9581865B4E8}"/>
+              </a:ext>
+            </a:extLst>
+          </p:cNvPr>
+          <p:cNvSpPr>
+            <a:spLocks noChangeAspect="1"/>
+          </p:cNvSpPr>
+          <p:nvPr/>
+        </p:nvSpPr>
+        <p:spPr>
+          <a:xfrm>
+            <a:off x="6530025" y="2772477"/>
+            <a:ext cx="144000" cy="144000"/>
+          </a:xfrm>
+          <a:prstGeom prst="ellipse">
+            <a:avLst/>
+          </a:prstGeom>
+          <a:ln>
+            <a:solidFill>
+              <a:schemeClr val="tx1"/>
+            </a:solidFill>
+          </a:ln>
+        </p:spPr>
+        <p:txBody>
+          <a:bodyPr wrap="square" rtlCol="0" anchor="ctr">
+            <a:noAutofit/>
+          </a:bodyPr>
+          <a:lstStyle/>
+          <a:p>
+            <a:pPr algn="ctr"/>
+            <a:endParaRPr lang="zh-CN" altLang="en-US" dirty="0">
+              <a:latin typeface="微软雅黑" pitchFamily="34" charset="-122"/>
+              <a:ea typeface="微软雅黑" pitchFamily="34" charset="-122"/>
+            </a:endParaRPr>
+          </a:p>
+        </p:txBody>
+      </p:sp>
+      <p:sp>
+        <p:nvSpPr>
+          <p:cNvPr id="398" name="椭圆 397">
+            <a:extLst>
+              <a:ext uri="{FF2B5EF4-FFF2-40B4-BE49-F238E27FC236}">
+                <a16:creationId xmlns:a16="http://schemas.microsoft.com/office/drawing/2014/main" id="{6BE42739-648D-B79F-39F4-D1FA287C9203}"/>
+              </a:ext>
+            </a:extLst>
+          </p:cNvPr>
+          <p:cNvSpPr>
+            <a:spLocks noChangeAspect="1"/>
+          </p:cNvSpPr>
+          <p:nvPr/>
+        </p:nvSpPr>
+        <p:spPr>
+          <a:xfrm>
+            <a:off x="7194970" y="2772477"/>
+            <a:ext cx="144000" cy="144000"/>
+          </a:xfrm>
+          <a:prstGeom prst="ellipse">
+            <a:avLst/>
+          </a:prstGeom>
+          <a:ln>
+            <a:solidFill>
+              <a:schemeClr val="tx1"/>
+            </a:solidFill>
+          </a:ln>
+        </p:spPr>
+        <p:txBody>
+          <a:bodyPr wrap="square" rtlCol="0" anchor="ctr">
+            <a:noAutofit/>
+          </a:bodyPr>
+          <a:lstStyle/>
+          <a:p>
+            <a:pPr algn="ctr"/>
+            <a:endParaRPr lang="zh-CN" altLang="en-US" dirty="0">
+              <a:latin typeface="微软雅黑" pitchFamily="34" charset="-122"/>
+              <a:ea typeface="微软雅黑" pitchFamily="34" charset="-122"/>
+            </a:endParaRPr>
+          </a:p>
+        </p:txBody>
+      </p:sp>
+      <p:sp>
+        <p:nvSpPr>
+          <p:cNvPr id="400" name="椭圆 399">
+            <a:extLst>
+              <a:ext uri="{FF2B5EF4-FFF2-40B4-BE49-F238E27FC236}">
+                <a16:creationId xmlns:a16="http://schemas.microsoft.com/office/drawing/2014/main" id="{C95994E7-E236-E427-9D50-4AB1BA338595}"/>
+              </a:ext>
+            </a:extLst>
+          </p:cNvPr>
+          <p:cNvSpPr>
+            <a:spLocks noChangeAspect="1"/>
+          </p:cNvSpPr>
+          <p:nvPr/>
+        </p:nvSpPr>
+        <p:spPr>
+          <a:xfrm>
+            <a:off x="7859916" y="2772477"/>
+            <a:ext cx="144000" cy="144000"/>
+          </a:xfrm>
+          <a:prstGeom prst="ellipse">
+            <a:avLst/>
+          </a:prstGeom>
+          <a:ln>
+            <a:solidFill>
+              <a:schemeClr val="tx1"/>
+            </a:solidFill>
+          </a:ln>
+        </p:spPr>
+        <p:txBody>
+          <a:bodyPr wrap="square" rtlCol="0" anchor="ctr">
+            <a:noAutofit/>
+          </a:bodyPr>
+          <a:lstStyle/>
+          <a:p>
+            <a:pPr algn="ctr"/>
+            <a:endParaRPr lang="zh-CN" altLang="en-US" dirty="0">
+              <a:latin typeface="微软雅黑" pitchFamily="34" charset="-122"/>
+              <a:ea typeface="微软雅黑" pitchFamily="34" charset="-122"/>
+            </a:endParaRPr>
+          </a:p>
+        </p:txBody>
+      </p:sp>
+      <p:sp>
+        <p:nvSpPr>
+          <p:cNvPr id="402" name="椭圆 401">
+            <a:extLst>
+              <a:ext uri="{FF2B5EF4-FFF2-40B4-BE49-F238E27FC236}">
+                <a16:creationId xmlns:a16="http://schemas.microsoft.com/office/drawing/2014/main" id="{C7EAF944-3FF6-8A84-97B1-62BFB9E43FF6}"/>
+              </a:ext>
+            </a:extLst>
+          </p:cNvPr>
+          <p:cNvSpPr>
+            <a:spLocks noChangeAspect="1"/>
+          </p:cNvSpPr>
+          <p:nvPr/>
+        </p:nvSpPr>
+        <p:spPr>
+          <a:xfrm>
+            <a:off x="5344135" y="3667628"/>
+            <a:ext cx="144000" cy="144000"/>
+          </a:xfrm>
+          <a:prstGeom prst="ellipse">
+            <a:avLst/>
+          </a:prstGeom>
+          <a:ln>
+            <a:solidFill>
+              <a:schemeClr val="tx1"/>
+            </a:solidFill>
+          </a:ln>
+        </p:spPr>
+        <p:txBody>
+          <a:bodyPr wrap="square" rtlCol="0" anchor="ctr">
+            <a:noAutofit/>
+          </a:bodyPr>
+          <a:lstStyle/>
+          <a:p>
+            <a:pPr algn="ctr"/>
+            <a:endParaRPr lang="zh-CN" altLang="en-US" dirty="0">
+              <a:latin typeface="微软雅黑" pitchFamily="34" charset="-122"/>
+              <a:ea typeface="微软雅黑" pitchFamily="34" charset="-122"/>
+            </a:endParaRPr>
+          </a:p>
+        </p:txBody>
+      </p:sp>
+      <p:sp>
+        <p:nvSpPr>
+          <p:cNvPr id="404" name="椭圆 403">
+            <a:extLst>
+              <a:ext uri="{FF2B5EF4-FFF2-40B4-BE49-F238E27FC236}">
+                <a16:creationId xmlns:a16="http://schemas.microsoft.com/office/drawing/2014/main" id="{E19FD9EF-8B11-F8F7-66D4-C53477BC95DE}"/>
+              </a:ext>
+            </a:extLst>
+          </p:cNvPr>
+          <p:cNvSpPr>
+            <a:spLocks noChangeAspect="1"/>
+          </p:cNvSpPr>
+          <p:nvPr/>
+        </p:nvSpPr>
+        <p:spPr>
+          <a:xfrm>
+            <a:off x="6009080" y="3667628"/>
+            <a:ext cx="144000" cy="144000"/>
+          </a:xfrm>
+          <a:prstGeom prst="ellipse">
+            <a:avLst/>
+          </a:prstGeom>
+          <a:ln>
+            <a:solidFill>
+              <a:schemeClr val="tx1"/>
+            </a:solidFill>
+          </a:ln>
+        </p:spPr>
+        <p:txBody>
+          <a:bodyPr wrap="square" rtlCol="0" anchor="ctr">
+            <a:noAutofit/>
+          </a:bodyPr>
+          <a:lstStyle/>
+          <a:p>
+            <a:pPr algn="ctr"/>
+            <a:endParaRPr lang="zh-CN" altLang="en-US" dirty="0">
+              <a:latin typeface="微软雅黑" pitchFamily="34" charset="-122"/>
+              <a:ea typeface="微软雅黑" pitchFamily="34" charset="-122"/>
+            </a:endParaRPr>
+          </a:p>
+        </p:txBody>
+      </p:sp>
+      <p:sp>
+        <p:nvSpPr>
+          <p:cNvPr id="406" name="椭圆 405">
+            <a:extLst>
+              <a:ext uri="{FF2B5EF4-FFF2-40B4-BE49-F238E27FC236}">
+                <a16:creationId xmlns:a16="http://schemas.microsoft.com/office/drawing/2014/main" id="{42E0E61F-5CC1-42F4-6F09-11FCF88C2B61}"/>
+              </a:ext>
+            </a:extLst>
+          </p:cNvPr>
+          <p:cNvSpPr>
+            <a:spLocks noChangeAspect="1"/>
+          </p:cNvSpPr>
+          <p:nvPr/>
+        </p:nvSpPr>
+        <p:spPr>
+          <a:xfrm>
+            <a:off x="6674025" y="3667628"/>
+            <a:ext cx="144000" cy="144000"/>
+          </a:xfrm>
+          <a:prstGeom prst="ellipse">
+            <a:avLst/>
+          </a:prstGeom>
+          <a:ln>
+            <a:solidFill>
+              <a:schemeClr val="tx1"/>
+            </a:solidFill>
+          </a:ln>
+        </p:spPr>
+        <p:txBody>
+          <a:bodyPr wrap="square" rtlCol="0" anchor="ctr">
+            <a:noAutofit/>
+          </a:bodyPr>
+          <a:lstStyle/>
+          <a:p>
+            <a:pPr algn="ctr"/>
+            <a:endParaRPr lang="zh-CN" altLang="en-US" dirty="0">
+              <a:latin typeface="微软雅黑" pitchFamily="34" charset="-122"/>
+              <a:ea typeface="微软雅黑" pitchFamily="34" charset="-122"/>
+            </a:endParaRPr>
+          </a:p>
+        </p:txBody>
+      </p:sp>
+      <p:sp>
+        <p:nvSpPr>
+          <p:cNvPr id="408" name="椭圆 407">
+            <a:extLst>
+              <a:ext uri="{FF2B5EF4-FFF2-40B4-BE49-F238E27FC236}">
+                <a16:creationId xmlns:a16="http://schemas.microsoft.com/office/drawing/2014/main" id="{27802D93-D6FF-A7FD-0F98-F311C0B8E873}"/>
+              </a:ext>
+            </a:extLst>
+          </p:cNvPr>
+          <p:cNvSpPr>
+            <a:spLocks noChangeAspect="1"/>
+          </p:cNvSpPr>
+          <p:nvPr/>
+        </p:nvSpPr>
+        <p:spPr>
+          <a:xfrm>
+            <a:off x="7338970" y="3667628"/>
+            <a:ext cx="144000" cy="144000"/>
+          </a:xfrm>
+          <a:prstGeom prst="ellipse">
+            <a:avLst/>
+          </a:prstGeom>
+          <a:ln>
+            <a:solidFill>
+              <a:schemeClr val="tx1"/>
+            </a:solidFill>
+          </a:ln>
+        </p:spPr>
+        <p:txBody>
+          <a:bodyPr wrap="square" rtlCol="0" anchor="ctr">
+            <a:noAutofit/>
+          </a:bodyPr>
+          <a:lstStyle/>
+          <a:p>
+            <a:pPr algn="ctr"/>
+            <a:endParaRPr lang="zh-CN" altLang="en-US" dirty="0">
+              <a:latin typeface="微软雅黑" pitchFamily="34" charset="-122"/>
+              <a:ea typeface="微软雅黑" pitchFamily="34" charset="-122"/>
+            </a:endParaRPr>
+          </a:p>
+        </p:txBody>
+      </p:sp>
+      <p:sp>
+        <p:nvSpPr>
+          <p:cNvPr id="410" name="椭圆 409">
+            <a:extLst>
+              <a:ext uri="{FF2B5EF4-FFF2-40B4-BE49-F238E27FC236}">
+                <a16:creationId xmlns:a16="http://schemas.microsoft.com/office/drawing/2014/main" id="{03B3019B-F22A-201E-4E24-DF48CBBCE16F}"/>
+              </a:ext>
+            </a:extLst>
+          </p:cNvPr>
+          <p:cNvSpPr>
+            <a:spLocks noChangeAspect="1"/>
+          </p:cNvSpPr>
+          <p:nvPr/>
+        </p:nvSpPr>
+        <p:spPr>
+          <a:xfrm>
+            <a:off x="8003916" y="3667628"/>
+            <a:ext cx="144000" cy="144000"/>
+          </a:xfrm>
+          <a:prstGeom prst="ellipse">
+            <a:avLst/>
+          </a:prstGeom>
+          <a:ln>
+            <a:solidFill>
+              <a:schemeClr val="tx1"/>
+            </a:solidFill>
+          </a:ln>
+        </p:spPr>
+        <p:txBody>
+          <a:bodyPr wrap="square" rtlCol="0" anchor="ctr">
+            <a:noAutofit/>
+          </a:bodyPr>
+          <a:lstStyle/>
+          <a:p>
+            <a:pPr algn="ctr"/>
+            <a:endParaRPr lang="zh-CN" altLang="en-US" dirty="0">
+              <a:latin typeface="微软雅黑" pitchFamily="34" charset="-122"/>
+              <a:ea typeface="微软雅黑" pitchFamily="34" charset="-122"/>
+            </a:endParaRPr>
+          </a:p>
+        </p:txBody>
+      </p:sp>
+      <p:sp>
+        <p:nvSpPr>
+          <p:cNvPr id="412" name="椭圆 411">
+            <a:extLst>
+              <a:ext uri="{FF2B5EF4-FFF2-40B4-BE49-F238E27FC236}">
+                <a16:creationId xmlns:a16="http://schemas.microsoft.com/office/drawing/2014/main" id="{8019F932-7571-E3B8-B0E5-AF2412CCFBE9}"/>
+              </a:ext>
+            </a:extLst>
+          </p:cNvPr>
+          <p:cNvSpPr>
+            <a:spLocks noChangeAspect="1"/>
+          </p:cNvSpPr>
+          <p:nvPr/>
+        </p:nvSpPr>
+        <p:spPr>
+          <a:xfrm>
+            <a:off x="5344135" y="4051034"/>
+            <a:ext cx="144000" cy="144000"/>
+          </a:xfrm>
+          <a:prstGeom prst="ellipse">
+            <a:avLst/>
+          </a:prstGeom>
+          <a:ln>
+            <a:solidFill>
+              <a:schemeClr val="tx1"/>
+            </a:solidFill>
+          </a:ln>
+        </p:spPr>
+        <p:txBody>
+          <a:bodyPr wrap="square" rtlCol="0" anchor="ctr">
+            <a:noAutofit/>
+          </a:bodyPr>
+          <a:lstStyle/>
+          <a:p>
+            <a:pPr algn="ctr"/>
+            <a:endParaRPr lang="zh-CN" altLang="en-US" dirty="0">
+              <a:latin typeface="微软雅黑" pitchFamily="34" charset="-122"/>
+              <a:ea typeface="微软雅黑" pitchFamily="34" charset="-122"/>
+            </a:endParaRPr>
+          </a:p>
+        </p:txBody>
+      </p:sp>
+      <p:sp>
+        <p:nvSpPr>
+          <p:cNvPr id="414" name="椭圆 413">
+            <a:extLst>
+              <a:ext uri="{FF2B5EF4-FFF2-40B4-BE49-F238E27FC236}">
+                <a16:creationId xmlns:a16="http://schemas.microsoft.com/office/drawing/2014/main" id="{7D9CC6D1-D5B3-10E0-04F3-2F3BF0D503E8}"/>
+              </a:ext>
+            </a:extLst>
+          </p:cNvPr>
+          <p:cNvSpPr>
+            <a:spLocks noChangeAspect="1"/>
+          </p:cNvSpPr>
+          <p:nvPr/>
+        </p:nvSpPr>
+        <p:spPr>
+          <a:xfrm>
+            <a:off x="6009080" y="4051034"/>
+            <a:ext cx="144000" cy="144000"/>
+          </a:xfrm>
+          <a:prstGeom prst="ellipse">
+            <a:avLst/>
+          </a:prstGeom>
+          <a:ln>
+            <a:solidFill>
+              <a:schemeClr val="tx1"/>
+            </a:solidFill>
+          </a:ln>
+        </p:spPr>
+        <p:txBody>
+          <a:bodyPr wrap="square" rtlCol="0" anchor="ctr">
+            <a:noAutofit/>
+          </a:bodyPr>
+          <a:lstStyle/>
+          <a:p>
+            <a:pPr algn="ctr"/>
+            <a:endParaRPr lang="zh-CN" altLang="en-US" dirty="0">
+              <a:latin typeface="微软雅黑" pitchFamily="34" charset="-122"/>
+              <a:ea typeface="微软雅黑" pitchFamily="34" charset="-122"/>
+            </a:endParaRPr>
+          </a:p>
+        </p:txBody>
+      </p:sp>
+      <p:sp>
+        <p:nvSpPr>
+          <p:cNvPr id="416" name="椭圆 415">
+            <a:extLst>
+              <a:ext uri="{FF2B5EF4-FFF2-40B4-BE49-F238E27FC236}">
+                <a16:creationId xmlns:a16="http://schemas.microsoft.com/office/drawing/2014/main" id="{C0A5A7E9-D919-FC1D-18DD-7FF300D6213E}"/>
+              </a:ext>
+            </a:extLst>
+          </p:cNvPr>
+          <p:cNvSpPr>
+            <a:spLocks noChangeAspect="1"/>
+          </p:cNvSpPr>
+          <p:nvPr/>
+        </p:nvSpPr>
+        <p:spPr>
+          <a:xfrm>
+            <a:off x="6674025" y="4051034"/>
+            <a:ext cx="144000" cy="144000"/>
+          </a:xfrm>
+          <a:prstGeom prst="ellipse">
+            <a:avLst/>
+          </a:prstGeom>
+          <a:ln>
+            <a:solidFill>
+              <a:schemeClr val="tx1"/>
+            </a:solidFill>
+          </a:ln>
+        </p:spPr>
+        <p:txBody>
+          <a:bodyPr wrap="square" rtlCol="0" anchor="ctr">
+            <a:noAutofit/>
+          </a:bodyPr>
+          <a:lstStyle/>
+          <a:p>
+            <a:pPr algn="ctr"/>
+            <a:endParaRPr lang="zh-CN" altLang="en-US" dirty="0">
+              <a:latin typeface="微软雅黑" pitchFamily="34" charset="-122"/>
+              <a:ea typeface="微软雅黑" pitchFamily="34" charset="-122"/>
+            </a:endParaRPr>
+          </a:p>
+        </p:txBody>
+      </p:sp>
+      <p:sp>
+        <p:nvSpPr>
+          <p:cNvPr id="418" name="椭圆 417">
+            <a:extLst>
+              <a:ext uri="{FF2B5EF4-FFF2-40B4-BE49-F238E27FC236}">
+                <a16:creationId xmlns:a16="http://schemas.microsoft.com/office/drawing/2014/main" id="{43839EB9-A386-B961-C971-C23945B04D9C}"/>
+              </a:ext>
+            </a:extLst>
+          </p:cNvPr>
+          <p:cNvSpPr>
+            <a:spLocks noChangeAspect="1"/>
+          </p:cNvSpPr>
+          <p:nvPr/>
+        </p:nvSpPr>
+        <p:spPr>
+          <a:xfrm>
+            <a:off x="7338970" y="4051034"/>
+            <a:ext cx="144000" cy="144000"/>
+          </a:xfrm>
+          <a:prstGeom prst="ellipse">
+            <a:avLst/>
+          </a:prstGeom>
+          <a:ln>
+            <a:solidFill>
+              <a:schemeClr val="tx1"/>
+            </a:solidFill>
+          </a:ln>
+        </p:spPr>
+        <p:txBody>
+          <a:bodyPr wrap="square" rtlCol="0" anchor="ctr">
+            <a:noAutofit/>
+          </a:bodyPr>
+          <a:lstStyle/>
+          <a:p>
+            <a:pPr algn="ctr"/>
+            <a:endParaRPr lang="zh-CN" altLang="en-US" dirty="0">
+              <a:latin typeface="微软雅黑" pitchFamily="34" charset="-122"/>
+              <a:ea typeface="微软雅黑" pitchFamily="34" charset="-122"/>
+            </a:endParaRPr>
+          </a:p>
+        </p:txBody>
+      </p:sp>
+      <p:sp>
+        <p:nvSpPr>
+          <p:cNvPr id="420" name="椭圆 419">
+            <a:extLst>
+              <a:ext uri="{FF2B5EF4-FFF2-40B4-BE49-F238E27FC236}">
+                <a16:creationId xmlns:a16="http://schemas.microsoft.com/office/drawing/2014/main" id="{94CF8C03-D53D-399C-2D61-CF4CCF3AA247}"/>
+              </a:ext>
+            </a:extLst>
+          </p:cNvPr>
+          <p:cNvSpPr>
+            <a:spLocks noChangeAspect="1"/>
+          </p:cNvSpPr>
+          <p:nvPr/>
+        </p:nvSpPr>
+        <p:spPr>
+          <a:xfrm>
+            <a:off x="8003916" y="4051034"/>
+            <a:ext cx="144000" cy="144000"/>
+          </a:xfrm>
+          <a:prstGeom prst="ellipse">
+            <a:avLst/>
+          </a:prstGeom>
+          <a:ln>
+            <a:solidFill>
+              <a:schemeClr val="tx1"/>
+            </a:solidFill>
+          </a:ln>
+        </p:spPr>
+        <p:txBody>
+          <a:bodyPr wrap="square" rtlCol="0" anchor="ctr">
+            <a:noAutofit/>
+          </a:bodyPr>
+          <a:lstStyle/>
+          <a:p>
+            <a:pPr algn="ctr"/>
+            <a:endParaRPr lang="zh-CN" altLang="en-US" dirty="0">
+              <a:latin typeface="微软雅黑" pitchFamily="34" charset="-122"/>
+              <a:ea typeface="微软雅黑" pitchFamily="34" charset="-122"/>
+            </a:endParaRPr>
+          </a:p>
+        </p:txBody>
+      </p:sp>
+      <p:sp>
+        <p:nvSpPr>
+          <p:cNvPr id="422" name="矩形 421">
+            <a:extLst>
+              <a:ext uri="{FF2B5EF4-FFF2-40B4-BE49-F238E27FC236}">
+                <a16:creationId xmlns:a16="http://schemas.microsoft.com/office/drawing/2014/main" id="{408A8802-D749-BD7A-E5C7-74F49DC01143}"/>
+              </a:ext>
+            </a:extLst>
+          </p:cNvPr>
+          <p:cNvSpPr/>
+          <p:nvPr/>
+        </p:nvSpPr>
+        <p:spPr>
+          <a:xfrm>
+            <a:off x="4987409" y="2259742"/>
+            <a:ext cx="3229232" cy="779645"/>
+          </a:xfrm>
+          <a:prstGeom prst="rect">
+            <a:avLst/>
+          </a:prstGeom>
+          <a:solidFill>
+            <a:schemeClr val="accent6">
+              <a:alpha val="20000"/>
+            </a:schemeClr>
+          </a:solidFill>
+          <a:ln>
+            <a:solidFill>
+              <a:schemeClr val="tx1"/>
+            </a:solidFill>
+          </a:ln>
+        </p:spPr>
+        <p:txBody>
+          <a:bodyPr wrap="square" rtlCol="0" anchor="ctr">
+            <a:noAutofit/>
+          </a:bodyPr>
+          <a:lstStyle/>
+          <a:p>
+            <a:pPr algn="ctr"/>
+            <a:endParaRPr lang="zh-CN" altLang="en-US" dirty="0">
+              <a:latin typeface="微软雅黑" pitchFamily="34" charset="-122"/>
+              <a:ea typeface="微软雅黑" pitchFamily="34" charset="-122"/>
+            </a:endParaRPr>
+          </a:p>
+        </p:txBody>
+      </p:sp>
+    </p:spTree>
+    <p:extLst>
+      <p:ext uri="{BB962C8B-B14F-4D97-AF65-F5344CB8AC3E}">
+        <p14:creationId xmlns:p14="http://schemas.microsoft.com/office/powerpoint/2010/main" val="2697925174"/>
+      </p:ext>
+    </p:extLst>
+  </p:cSld>
+  <p:clrMapOvr>
+    <a:masterClrMapping/>
+  </p:clrMapOvr>
+</p:sld>
+</file>
+
+<file path=ppt/slides/slide9.xml><?xml version="1.0" encoding="utf-8"?>
+<p:sld xmlns:a="http://schemas.openxmlformats.org/drawingml/2006/main" xmlns:r="http://schemas.openxmlformats.org/officeDocument/2006/relationships" xmlns:p="http://schemas.openxmlformats.org/presentationml/2006/main">
+  <p:cSld>
+    <p:spTree>
+      <p:nvGrpSpPr>
+        <p:cNvPr id="1" name=""/>
+        <p:cNvGrpSpPr/>
+        <p:nvPr/>
+      </p:nvGrpSpPr>
+      <p:grpSpPr>
+        <a:xfrm>
+          <a:off x="0" y="0"/>
+          <a:ext cx="0" cy="0"/>
+          <a:chOff x="0" y="0"/>
+          <a:chExt cx="0" cy="0"/>
+        </a:xfrm>
+      </p:grpSpPr>
+      <p:sp>
+        <p:nvSpPr>
+          <p:cNvPr id="2" name="灯片编号占位符 1">
+            <a:extLst>
+              <a:ext uri="{FF2B5EF4-FFF2-40B4-BE49-F238E27FC236}">
+                <a16:creationId xmlns:a16="http://schemas.microsoft.com/office/drawing/2014/main" id="{6F0094E5-D53D-B9A1-9BF0-C8D09ECBCE67}"/>
+              </a:ext>
+            </a:extLst>
+          </p:cNvPr>
+          <p:cNvSpPr>
+            <a:spLocks noGrp="1"/>
+          </p:cNvSpPr>
+          <p:nvPr>
+            <p:ph type="sldNum" sz="quarter" idx="12"/>
+          </p:nvPr>
+        </p:nvSpPr>
+        <p:spPr/>
+        <p:txBody>
+          <a:bodyPr/>
+          <a:lstStyle/>
+          <a:p>
+            <a:fld id="{EB466BE2-40FE-4A59-82BB-128E7E394AEC}" type="slidenum">
+              <a:rPr lang="zh-CN" altLang="en-US" smtClean="0"/>
+              <a:t>9</a:t>
+            </a:fld>
+            <a:endParaRPr lang="zh-CN" altLang="en-US"/>
+          </a:p>
+        </p:txBody>
+      </p:sp>
+      <p:sp>
+        <p:nvSpPr>
+          <p:cNvPr id="3" name="标题 2">
+            <a:extLst>
+              <a:ext uri="{FF2B5EF4-FFF2-40B4-BE49-F238E27FC236}">
+                <a16:creationId xmlns:a16="http://schemas.microsoft.com/office/drawing/2014/main" id="{C6732E6D-F693-E0C2-7CD9-F528C38BBA34}"/>
+              </a:ext>
+            </a:extLst>
+          </p:cNvPr>
+          <p:cNvSpPr>
+            <a:spLocks noGrp="1"/>
+          </p:cNvSpPr>
+          <p:nvPr>
+            <p:ph type="title"/>
+          </p:nvPr>
+        </p:nvSpPr>
+        <p:spPr/>
+        <p:txBody>
+          <a:bodyPr/>
+          <a:lstStyle/>
+          <a:p>
+            <a:r>
+              <a:rPr lang="zh-CN" altLang="en-US" dirty="0"/>
+              <a:t>捕获</a:t>
+            </a:r>
+            <a:r>
+              <a:rPr lang="en-US" altLang="zh-CN" dirty="0"/>
+              <a:t>&amp;</a:t>
+            </a:r>
+            <a:r>
+              <a:rPr lang="zh-CN" altLang="en-US" dirty="0"/>
+              <a:t>初始化原子</a:t>
+            </a:r>
+          </a:p>
+        </p:txBody>
+      </p:sp>
+      <p:sp>
+        <p:nvSpPr>
+          <p:cNvPr id="5" name="椭圆 4">
+            <a:extLst>
+              <a:ext uri="{FF2B5EF4-FFF2-40B4-BE49-F238E27FC236}">
+                <a16:creationId xmlns:a16="http://schemas.microsoft.com/office/drawing/2014/main" id="{14C1D532-1C46-DD36-7C04-D9D363E1C584}"/>
+              </a:ext>
+            </a:extLst>
+          </p:cNvPr>
+          <p:cNvSpPr>
+            <a:spLocks noChangeAspect="1"/>
+          </p:cNvSpPr>
+          <p:nvPr/>
+        </p:nvSpPr>
+        <p:spPr>
+          <a:xfrm>
+            <a:off x="1039528" y="1366787"/>
+            <a:ext cx="144000" cy="144000"/>
+          </a:xfrm>
+          <a:prstGeom prst="ellipse">
+            <a:avLst/>
+          </a:prstGeom>
+          <a:ln>
+            <a:solidFill>
+              <a:schemeClr val="tx1"/>
+            </a:solidFill>
+          </a:ln>
+        </p:spPr>
+        <p:txBody>
+          <a:bodyPr wrap="square" rtlCol="0" anchor="ctr">
+            <a:noAutofit/>
+          </a:bodyPr>
+          <a:lstStyle/>
+          <a:p>
+            <a:pPr algn="ctr"/>
+            <a:endParaRPr lang="zh-CN" altLang="en-US" dirty="0">
+              <a:latin typeface="微软雅黑" pitchFamily="34" charset="-122"/>
+              <a:ea typeface="微软雅黑" pitchFamily="34" charset="-122"/>
+            </a:endParaRPr>
+          </a:p>
+        </p:txBody>
+      </p:sp>
+      <p:sp>
+        <p:nvSpPr>
+          <p:cNvPr id="7" name="椭圆 6">
+            <a:extLst>
+              <a:ext uri="{FF2B5EF4-FFF2-40B4-BE49-F238E27FC236}">
+                <a16:creationId xmlns:a16="http://schemas.microsoft.com/office/drawing/2014/main" id="{58E10D10-D24D-CF27-9D30-7E0A9BBF6FDA}"/>
+              </a:ext>
+            </a:extLst>
+          </p:cNvPr>
+          <p:cNvSpPr>
+            <a:spLocks noChangeAspect="1"/>
+          </p:cNvSpPr>
+          <p:nvPr/>
+        </p:nvSpPr>
+        <p:spPr>
+          <a:xfrm>
+            <a:off x="1704473" y="1366787"/>
+            <a:ext cx="144000" cy="144000"/>
+          </a:xfrm>
+          <a:prstGeom prst="ellipse">
+            <a:avLst/>
+          </a:prstGeom>
+          <a:ln>
+            <a:solidFill>
+              <a:schemeClr val="tx1"/>
+            </a:solidFill>
+          </a:ln>
+        </p:spPr>
+        <p:txBody>
+          <a:bodyPr wrap="square" rtlCol="0" anchor="ctr">
+            <a:noAutofit/>
+          </a:bodyPr>
+          <a:lstStyle/>
+          <a:p>
+            <a:pPr algn="ctr"/>
+            <a:endParaRPr lang="zh-CN" altLang="en-US" dirty="0">
+              <a:latin typeface="微软雅黑" pitchFamily="34" charset="-122"/>
+              <a:ea typeface="微软雅黑" pitchFamily="34" charset="-122"/>
+            </a:endParaRPr>
+          </a:p>
+        </p:txBody>
+      </p:sp>
+      <p:sp>
+        <p:nvSpPr>
+          <p:cNvPr id="9" name="椭圆 8">
+            <a:extLst>
+              <a:ext uri="{FF2B5EF4-FFF2-40B4-BE49-F238E27FC236}">
+                <a16:creationId xmlns:a16="http://schemas.microsoft.com/office/drawing/2014/main" id="{C93F2BEB-AC8F-9343-BC9E-B325D04D403A}"/>
+              </a:ext>
+            </a:extLst>
+          </p:cNvPr>
+          <p:cNvSpPr>
+            <a:spLocks noChangeAspect="1"/>
+          </p:cNvSpPr>
+          <p:nvPr/>
+        </p:nvSpPr>
+        <p:spPr>
+          <a:xfrm>
+            <a:off x="2369418" y="1366787"/>
+            <a:ext cx="144000" cy="144000"/>
+          </a:xfrm>
+          <a:prstGeom prst="ellipse">
+            <a:avLst/>
+          </a:prstGeom>
+          <a:ln>
+            <a:solidFill>
+              <a:schemeClr val="tx1"/>
+            </a:solidFill>
+          </a:ln>
+        </p:spPr>
+        <p:txBody>
+          <a:bodyPr wrap="square" rtlCol="0" anchor="ctr">
+            <a:noAutofit/>
+          </a:bodyPr>
+          <a:lstStyle/>
+          <a:p>
+            <a:pPr algn="ctr"/>
+            <a:endParaRPr lang="zh-CN" altLang="en-US" dirty="0">
+              <a:latin typeface="微软雅黑" pitchFamily="34" charset="-122"/>
+              <a:ea typeface="微软雅黑" pitchFamily="34" charset="-122"/>
+            </a:endParaRPr>
+          </a:p>
+        </p:txBody>
+      </p:sp>
+      <p:sp>
+        <p:nvSpPr>
+          <p:cNvPr id="11" name="椭圆 10">
+            <a:extLst>
+              <a:ext uri="{FF2B5EF4-FFF2-40B4-BE49-F238E27FC236}">
+                <a16:creationId xmlns:a16="http://schemas.microsoft.com/office/drawing/2014/main" id="{32902C55-E14B-69ED-DC33-B0C6DEFE62A7}"/>
+              </a:ext>
+            </a:extLst>
+          </p:cNvPr>
+          <p:cNvSpPr>
+            <a:spLocks noChangeAspect="1"/>
+          </p:cNvSpPr>
+          <p:nvPr/>
+        </p:nvSpPr>
+        <p:spPr>
+          <a:xfrm>
+            <a:off x="3034363" y="1366787"/>
+            <a:ext cx="144000" cy="144000"/>
+          </a:xfrm>
+          <a:prstGeom prst="ellipse">
+            <a:avLst/>
+          </a:prstGeom>
+          <a:ln>
+            <a:solidFill>
+              <a:schemeClr val="tx1"/>
+            </a:solidFill>
+          </a:ln>
+        </p:spPr>
+        <p:txBody>
+          <a:bodyPr wrap="square" rtlCol="0" anchor="ctr">
+            <a:noAutofit/>
+          </a:bodyPr>
+          <a:lstStyle/>
+          <a:p>
+            <a:pPr algn="ctr"/>
+            <a:endParaRPr lang="zh-CN" altLang="en-US" dirty="0">
+              <a:latin typeface="微软雅黑" pitchFamily="34" charset="-122"/>
+              <a:ea typeface="微软雅黑" pitchFamily="34" charset="-122"/>
+            </a:endParaRPr>
+          </a:p>
+        </p:txBody>
+      </p:sp>
+      <p:sp>
+        <p:nvSpPr>
+          <p:cNvPr id="13" name="椭圆 12">
+            <a:extLst>
+              <a:ext uri="{FF2B5EF4-FFF2-40B4-BE49-F238E27FC236}">
+                <a16:creationId xmlns:a16="http://schemas.microsoft.com/office/drawing/2014/main" id="{F45946E0-487C-5F14-071C-F5F176802D7C}"/>
+              </a:ext>
+            </a:extLst>
+          </p:cNvPr>
+          <p:cNvSpPr>
+            <a:spLocks noChangeAspect="1"/>
+          </p:cNvSpPr>
+          <p:nvPr/>
+        </p:nvSpPr>
+        <p:spPr>
+          <a:xfrm>
+            <a:off x="3699309" y="1366787"/>
+            <a:ext cx="144000" cy="144000"/>
+          </a:xfrm>
+          <a:prstGeom prst="ellipse">
+            <a:avLst/>
+          </a:prstGeom>
+          <a:ln>
+            <a:solidFill>
+              <a:schemeClr val="tx1"/>
+            </a:solidFill>
+          </a:ln>
+        </p:spPr>
+        <p:txBody>
+          <a:bodyPr wrap="square" rtlCol="0" anchor="ctr">
+            <a:noAutofit/>
+          </a:bodyPr>
+          <a:lstStyle/>
+          <a:p>
+            <a:pPr algn="ctr"/>
+            <a:endParaRPr lang="zh-CN" altLang="en-US" dirty="0">
+              <a:latin typeface="微软雅黑" pitchFamily="34" charset="-122"/>
+              <a:ea typeface="微软雅黑" pitchFamily="34" charset="-122"/>
+            </a:endParaRPr>
+          </a:p>
+        </p:txBody>
+      </p:sp>
+      <p:sp>
+        <p:nvSpPr>
+          <p:cNvPr id="15" name="椭圆 14">
+            <a:extLst>
+              <a:ext uri="{FF2B5EF4-FFF2-40B4-BE49-F238E27FC236}">
+                <a16:creationId xmlns:a16="http://schemas.microsoft.com/office/drawing/2014/main" id="{4163F3B6-6F58-ED4F-972A-FF52351A0B5F}"/>
+              </a:ext>
+            </a:extLst>
+          </p:cNvPr>
+          <p:cNvSpPr>
+            <a:spLocks noChangeAspect="1"/>
+          </p:cNvSpPr>
+          <p:nvPr/>
+        </p:nvSpPr>
+        <p:spPr>
+          <a:xfrm>
+            <a:off x="1039528" y="1750193"/>
+            <a:ext cx="144000" cy="144000"/>
+          </a:xfrm>
+          <a:prstGeom prst="ellipse">
+            <a:avLst/>
+          </a:prstGeom>
+          <a:ln>
+            <a:solidFill>
+              <a:schemeClr val="tx1"/>
+            </a:solidFill>
+          </a:ln>
+        </p:spPr>
+        <p:txBody>
+          <a:bodyPr wrap="square" rtlCol="0" anchor="ctr">
+            <a:noAutofit/>
+          </a:bodyPr>
+          <a:lstStyle/>
+          <a:p>
+            <a:pPr algn="ctr"/>
+            <a:endParaRPr lang="zh-CN" altLang="en-US" dirty="0">
+              <a:latin typeface="微软雅黑" pitchFamily="34" charset="-122"/>
+              <a:ea typeface="微软雅黑" pitchFamily="34" charset="-122"/>
+            </a:endParaRPr>
+          </a:p>
+        </p:txBody>
+      </p:sp>
+      <p:sp>
+        <p:nvSpPr>
+          <p:cNvPr id="17" name="椭圆 16">
+            <a:extLst>
+              <a:ext uri="{FF2B5EF4-FFF2-40B4-BE49-F238E27FC236}">
+                <a16:creationId xmlns:a16="http://schemas.microsoft.com/office/drawing/2014/main" id="{B1A406E6-6234-A909-B43E-3C8E9A873884}"/>
+              </a:ext>
+            </a:extLst>
+          </p:cNvPr>
+          <p:cNvSpPr>
+            <a:spLocks noChangeAspect="1"/>
+          </p:cNvSpPr>
+          <p:nvPr/>
+        </p:nvSpPr>
+        <p:spPr>
+          <a:xfrm>
+            <a:off x="1704473" y="1750193"/>
+            <a:ext cx="144000" cy="144000"/>
+          </a:xfrm>
+          <a:prstGeom prst="ellipse">
+            <a:avLst/>
+          </a:prstGeom>
+          <a:ln>
+            <a:solidFill>
+              <a:schemeClr val="tx1"/>
+            </a:solidFill>
+          </a:ln>
+        </p:spPr>
+        <p:txBody>
+          <a:bodyPr wrap="square" rtlCol="0" anchor="ctr">
+            <a:noAutofit/>
+          </a:bodyPr>
+          <a:lstStyle/>
+          <a:p>
+            <a:pPr algn="ctr"/>
+            <a:endParaRPr lang="zh-CN" altLang="en-US" dirty="0">
+              <a:latin typeface="微软雅黑" pitchFamily="34" charset="-122"/>
+              <a:ea typeface="微软雅黑" pitchFamily="34" charset="-122"/>
+            </a:endParaRPr>
+          </a:p>
+        </p:txBody>
+      </p:sp>
+      <p:sp>
+        <p:nvSpPr>
+          <p:cNvPr id="19" name="椭圆 18">
+            <a:extLst>
+              <a:ext uri="{FF2B5EF4-FFF2-40B4-BE49-F238E27FC236}">
+                <a16:creationId xmlns:a16="http://schemas.microsoft.com/office/drawing/2014/main" id="{0BEBEF9F-F7C5-198D-61E5-286C0F3493EE}"/>
+              </a:ext>
+            </a:extLst>
+          </p:cNvPr>
+          <p:cNvSpPr>
+            <a:spLocks noChangeAspect="1"/>
+          </p:cNvSpPr>
+          <p:nvPr/>
+        </p:nvSpPr>
+        <p:spPr>
+          <a:xfrm>
+            <a:off x="2369418" y="1750193"/>
+            <a:ext cx="144000" cy="144000"/>
+          </a:xfrm>
+          <a:prstGeom prst="ellipse">
+            <a:avLst/>
+          </a:prstGeom>
+          <a:ln>
+            <a:solidFill>
+              <a:schemeClr val="tx1"/>
+            </a:solidFill>
+          </a:ln>
+        </p:spPr>
+        <p:txBody>
+          <a:bodyPr wrap="square" rtlCol="0" anchor="ctr">
+            <a:noAutofit/>
+          </a:bodyPr>
+          <a:lstStyle/>
+          <a:p>
+            <a:pPr algn="ctr"/>
+            <a:endParaRPr lang="zh-CN" altLang="en-US" dirty="0">
+              <a:latin typeface="微软雅黑" pitchFamily="34" charset="-122"/>
+              <a:ea typeface="微软雅黑" pitchFamily="34" charset="-122"/>
+            </a:endParaRPr>
+          </a:p>
+        </p:txBody>
+      </p:sp>
+      <p:sp>
+        <p:nvSpPr>
+          <p:cNvPr id="21" name="椭圆 20">
+            <a:extLst>
+              <a:ext uri="{FF2B5EF4-FFF2-40B4-BE49-F238E27FC236}">
+                <a16:creationId xmlns:a16="http://schemas.microsoft.com/office/drawing/2014/main" id="{4F188341-073A-A853-535D-9AF9E0343DFB}"/>
+              </a:ext>
+            </a:extLst>
+          </p:cNvPr>
+          <p:cNvSpPr>
+            <a:spLocks noChangeAspect="1"/>
+          </p:cNvSpPr>
+          <p:nvPr/>
+        </p:nvSpPr>
+        <p:spPr>
+          <a:xfrm>
+            <a:off x="3034363" y="1750193"/>
+            <a:ext cx="144000" cy="144000"/>
+          </a:xfrm>
+          <a:prstGeom prst="ellipse">
+            <a:avLst/>
+          </a:prstGeom>
+          <a:ln>
+            <a:solidFill>
+              <a:schemeClr val="tx1"/>
+            </a:solidFill>
+          </a:ln>
+        </p:spPr>
+        <p:txBody>
+          <a:bodyPr wrap="square" rtlCol="0" anchor="ctr">
+            <a:noAutofit/>
+          </a:bodyPr>
+          <a:lstStyle/>
+          <a:p>
+            <a:pPr algn="ctr"/>
+            <a:endParaRPr lang="zh-CN" altLang="en-US" dirty="0">
+              <a:latin typeface="微软雅黑" pitchFamily="34" charset="-122"/>
+              <a:ea typeface="微软雅黑" pitchFamily="34" charset="-122"/>
+            </a:endParaRPr>
+          </a:p>
+        </p:txBody>
+      </p:sp>
+      <p:sp>
+        <p:nvSpPr>
+          <p:cNvPr id="23" name="椭圆 22">
+            <a:extLst>
+              <a:ext uri="{FF2B5EF4-FFF2-40B4-BE49-F238E27FC236}">
+                <a16:creationId xmlns:a16="http://schemas.microsoft.com/office/drawing/2014/main" id="{5D4B4CDE-9C2A-04DA-EC9E-4EACFCA89BAA}"/>
+              </a:ext>
+            </a:extLst>
+          </p:cNvPr>
+          <p:cNvSpPr>
+            <a:spLocks noChangeAspect="1"/>
+          </p:cNvSpPr>
+          <p:nvPr/>
+        </p:nvSpPr>
+        <p:spPr>
+          <a:xfrm>
+            <a:off x="3699309" y="1750193"/>
+            <a:ext cx="144000" cy="144000"/>
+          </a:xfrm>
+          <a:prstGeom prst="ellipse">
+            <a:avLst/>
+          </a:prstGeom>
+          <a:ln>
+            <a:solidFill>
+              <a:schemeClr val="tx1"/>
+            </a:solidFill>
+          </a:ln>
+        </p:spPr>
+        <p:txBody>
+          <a:bodyPr wrap="square" rtlCol="0" anchor="ctr">
+            <a:noAutofit/>
+          </a:bodyPr>
+          <a:lstStyle/>
+          <a:p>
+            <a:pPr algn="ctr"/>
+            <a:endParaRPr lang="zh-CN" altLang="en-US" dirty="0">
+              <a:latin typeface="微软雅黑" pitchFamily="34" charset="-122"/>
+              <a:ea typeface="微软雅黑" pitchFamily="34" charset="-122"/>
+            </a:endParaRPr>
+          </a:p>
+        </p:txBody>
+      </p:sp>
+      <p:sp>
+        <p:nvSpPr>
+          <p:cNvPr id="25" name="椭圆 24">
+            <a:extLst>
+              <a:ext uri="{FF2B5EF4-FFF2-40B4-BE49-F238E27FC236}">
+                <a16:creationId xmlns:a16="http://schemas.microsoft.com/office/drawing/2014/main" id="{CDDD068E-20EC-6F11-1FE1-CD91D21658BF}"/>
+              </a:ext>
+            </a:extLst>
+          </p:cNvPr>
+          <p:cNvSpPr>
+            <a:spLocks noChangeAspect="1"/>
+          </p:cNvSpPr>
+          <p:nvPr/>
+        </p:nvSpPr>
+        <p:spPr>
+          <a:xfrm>
+            <a:off x="1039528" y="4743653"/>
+            <a:ext cx="144000" cy="144000"/>
+          </a:xfrm>
+          <a:prstGeom prst="ellipse">
+            <a:avLst/>
+          </a:prstGeom>
+          <a:ln>
+            <a:solidFill>
+              <a:schemeClr val="tx1"/>
+            </a:solidFill>
+          </a:ln>
+        </p:spPr>
+        <p:txBody>
+          <a:bodyPr wrap="square" rtlCol="0" anchor="ctr">
+            <a:noAutofit/>
+          </a:bodyPr>
+          <a:lstStyle/>
+          <a:p>
+            <a:pPr algn="ctr"/>
+            <a:endParaRPr lang="zh-CN" altLang="en-US" dirty="0">
+              <a:latin typeface="微软雅黑" pitchFamily="34" charset="-122"/>
+              <a:ea typeface="微软雅黑" pitchFamily="34" charset="-122"/>
+            </a:endParaRPr>
+          </a:p>
+        </p:txBody>
+      </p:sp>
+      <p:sp>
+        <p:nvSpPr>
+          <p:cNvPr id="27" name="椭圆 26">
+            <a:extLst>
+              <a:ext uri="{FF2B5EF4-FFF2-40B4-BE49-F238E27FC236}">
+                <a16:creationId xmlns:a16="http://schemas.microsoft.com/office/drawing/2014/main" id="{386CCD4A-3528-EA04-4269-AFCECDFF1F8A}"/>
+              </a:ext>
+            </a:extLst>
+          </p:cNvPr>
+          <p:cNvSpPr>
+            <a:spLocks noChangeAspect="1"/>
+          </p:cNvSpPr>
+          <p:nvPr/>
+        </p:nvSpPr>
+        <p:spPr>
+          <a:xfrm>
+            <a:off x="1704473" y="4743653"/>
+            <a:ext cx="144000" cy="144000"/>
+          </a:xfrm>
+          <a:prstGeom prst="ellipse">
+            <a:avLst/>
+          </a:prstGeom>
+          <a:ln>
+            <a:solidFill>
+              <a:schemeClr val="tx1"/>
+            </a:solidFill>
+          </a:ln>
+        </p:spPr>
+        <p:txBody>
+          <a:bodyPr wrap="square" rtlCol="0" anchor="ctr">
+            <a:noAutofit/>
+          </a:bodyPr>
+          <a:lstStyle/>
+          <a:p>
+            <a:pPr algn="ctr"/>
+            <a:endParaRPr lang="zh-CN" altLang="en-US" dirty="0">
+              <a:latin typeface="微软雅黑" pitchFamily="34" charset="-122"/>
+              <a:ea typeface="微软雅黑" pitchFamily="34" charset="-122"/>
+            </a:endParaRPr>
+          </a:p>
+        </p:txBody>
+      </p:sp>
+      <p:sp>
+        <p:nvSpPr>
+          <p:cNvPr id="29" name="椭圆 28">
+            <a:extLst>
+              <a:ext uri="{FF2B5EF4-FFF2-40B4-BE49-F238E27FC236}">
+                <a16:creationId xmlns:a16="http://schemas.microsoft.com/office/drawing/2014/main" id="{AEB73859-8A94-A4A1-2F94-12A13F467C8E}"/>
+              </a:ext>
+            </a:extLst>
+          </p:cNvPr>
+          <p:cNvSpPr>
+            <a:spLocks noChangeAspect="1"/>
+          </p:cNvSpPr>
+          <p:nvPr/>
+        </p:nvSpPr>
+        <p:spPr>
+          <a:xfrm>
+            <a:off x="2369418" y="4743653"/>
+            <a:ext cx="144000" cy="144000"/>
+          </a:xfrm>
+          <a:prstGeom prst="ellipse">
+            <a:avLst/>
+          </a:prstGeom>
+          <a:ln>
+            <a:solidFill>
+              <a:schemeClr val="tx1"/>
+            </a:solidFill>
+          </a:ln>
+        </p:spPr>
+        <p:txBody>
+          <a:bodyPr wrap="square" rtlCol="0" anchor="ctr">
+            <a:noAutofit/>
+          </a:bodyPr>
+          <a:lstStyle/>
+          <a:p>
+            <a:pPr algn="ctr"/>
+            <a:endParaRPr lang="zh-CN" altLang="en-US" dirty="0">
+              <a:latin typeface="微软雅黑" pitchFamily="34" charset="-122"/>
+              <a:ea typeface="微软雅黑" pitchFamily="34" charset="-122"/>
+            </a:endParaRPr>
+          </a:p>
+        </p:txBody>
+      </p:sp>
+      <p:sp>
+        <p:nvSpPr>
+          <p:cNvPr id="31" name="椭圆 30">
+            <a:extLst>
+              <a:ext uri="{FF2B5EF4-FFF2-40B4-BE49-F238E27FC236}">
+                <a16:creationId xmlns:a16="http://schemas.microsoft.com/office/drawing/2014/main" id="{622C5CDB-31ED-AFD4-AFCA-4F0B07B63D20}"/>
+              </a:ext>
+            </a:extLst>
+          </p:cNvPr>
+          <p:cNvSpPr>
+            <a:spLocks noChangeAspect="1"/>
+          </p:cNvSpPr>
+          <p:nvPr/>
+        </p:nvSpPr>
+        <p:spPr>
+          <a:xfrm>
+            <a:off x="3034363" y="4743653"/>
+            <a:ext cx="144000" cy="144000"/>
+          </a:xfrm>
+          <a:prstGeom prst="ellipse">
+            <a:avLst/>
+          </a:prstGeom>
+          <a:ln>
+            <a:solidFill>
+              <a:schemeClr val="tx1"/>
+            </a:solidFill>
+          </a:ln>
+        </p:spPr>
+        <p:txBody>
+          <a:bodyPr wrap="square" rtlCol="0" anchor="ctr">
+            <a:noAutofit/>
+          </a:bodyPr>
+          <a:lstStyle/>
+          <a:p>
+            <a:pPr algn="ctr"/>
+            <a:endParaRPr lang="zh-CN" altLang="en-US" dirty="0">
+              <a:latin typeface="微软雅黑" pitchFamily="34" charset="-122"/>
+              <a:ea typeface="微软雅黑" pitchFamily="34" charset="-122"/>
+            </a:endParaRPr>
+          </a:p>
+        </p:txBody>
+      </p:sp>
+      <p:sp>
+        <p:nvSpPr>
+          <p:cNvPr id="33" name="椭圆 32">
+            <a:extLst>
+              <a:ext uri="{FF2B5EF4-FFF2-40B4-BE49-F238E27FC236}">
+                <a16:creationId xmlns:a16="http://schemas.microsoft.com/office/drawing/2014/main" id="{E6391578-F369-3E9B-C007-EF410E072F4F}"/>
+              </a:ext>
+            </a:extLst>
+          </p:cNvPr>
+          <p:cNvSpPr>
+            <a:spLocks noChangeAspect="1"/>
+          </p:cNvSpPr>
+          <p:nvPr/>
+        </p:nvSpPr>
+        <p:spPr>
+          <a:xfrm>
+            <a:off x="3699309" y="4743653"/>
+            <a:ext cx="144000" cy="144000"/>
+          </a:xfrm>
+          <a:prstGeom prst="ellipse">
+            <a:avLst/>
+          </a:prstGeom>
+          <a:ln>
+            <a:solidFill>
+              <a:schemeClr val="tx1"/>
+            </a:solidFill>
+          </a:ln>
+        </p:spPr>
+        <p:txBody>
+          <a:bodyPr wrap="square" rtlCol="0" anchor="ctr">
+            <a:noAutofit/>
+          </a:bodyPr>
+          <a:lstStyle/>
+          <a:p>
+            <a:pPr algn="ctr"/>
+            <a:endParaRPr lang="zh-CN" altLang="en-US" dirty="0">
+              <a:latin typeface="微软雅黑" pitchFamily="34" charset="-122"/>
+              <a:ea typeface="微软雅黑" pitchFamily="34" charset="-122"/>
+            </a:endParaRPr>
+          </a:p>
+        </p:txBody>
+      </p:sp>
+      <p:sp>
+        <p:nvSpPr>
+          <p:cNvPr id="35" name="椭圆 34">
+            <a:extLst>
+              <a:ext uri="{FF2B5EF4-FFF2-40B4-BE49-F238E27FC236}">
+                <a16:creationId xmlns:a16="http://schemas.microsoft.com/office/drawing/2014/main" id="{FD47300B-AC4A-0E09-E36E-B2ECE4195D38}"/>
+              </a:ext>
+            </a:extLst>
+          </p:cNvPr>
+          <p:cNvSpPr>
+            <a:spLocks noChangeAspect="1"/>
+          </p:cNvSpPr>
+          <p:nvPr/>
+        </p:nvSpPr>
+        <p:spPr>
+          <a:xfrm>
+            <a:off x="1039528" y="5127059"/>
+            <a:ext cx="144000" cy="144000"/>
+          </a:xfrm>
+          <a:prstGeom prst="ellipse">
+            <a:avLst/>
+          </a:prstGeom>
+          <a:ln>
+            <a:solidFill>
+              <a:schemeClr val="tx1"/>
+            </a:solidFill>
+          </a:ln>
+        </p:spPr>
+        <p:txBody>
+          <a:bodyPr wrap="square" rtlCol="0" anchor="ctr">
+            <a:noAutofit/>
+          </a:bodyPr>
+          <a:lstStyle/>
+          <a:p>
+            <a:pPr algn="ctr"/>
+            <a:endParaRPr lang="zh-CN" altLang="en-US" dirty="0">
+              <a:latin typeface="微软雅黑" pitchFamily="34" charset="-122"/>
+              <a:ea typeface="微软雅黑" pitchFamily="34" charset="-122"/>
+            </a:endParaRPr>
+          </a:p>
+        </p:txBody>
+      </p:sp>
+      <p:sp>
+        <p:nvSpPr>
+          <p:cNvPr id="37" name="椭圆 36">
+            <a:extLst>
+              <a:ext uri="{FF2B5EF4-FFF2-40B4-BE49-F238E27FC236}">
+                <a16:creationId xmlns:a16="http://schemas.microsoft.com/office/drawing/2014/main" id="{355967E5-C082-3D43-5FDE-C57D3CF903C7}"/>
+              </a:ext>
+            </a:extLst>
+          </p:cNvPr>
+          <p:cNvSpPr>
+            <a:spLocks noChangeAspect="1"/>
+          </p:cNvSpPr>
+          <p:nvPr/>
+        </p:nvSpPr>
+        <p:spPr>
+          <a:xfrm>
+            <a:off x="1704473" y="5127059"/>
+            <a:ext cx="144000" cy="144000"/>
+          </a:xfrm>
+          <a:prstGeom prst="ellipse">
+            <a:avLst/>
+          </a:prstGeom>
+          <a:ln>
+            <a:solidFill>
+              <a:schemeClr val="tx1"/>
+            </a:solidFill>
+          </a:ln>
+        </p:spPr>
+        <p:txBody>
+          <a:bodyPr wrap="square" rtlCol="0" anchor="ctr">
+            <a:noAutofit/>
+          </a:bodyPr>
+          <a:lstStyle/>
+          <a:p>
+            <a:pPr algn="ctr"/>
+            <a:endParaRPr lang="zh-CN" altLang="en-US" dirty="0">
+              <a:latin typeface="微软雅黑" pitchFamily="34" charset="-122"/>
+              <a:ea typeface="微软雅黑" pitchFamily="34" charset="-122"/>
+            </a:endParaRPr>
+          </a:p>
+        </p:txBody>
+      </p:sp>
+      <p:sp>
+        <p:nvSpPr>
+          <p:cNvPr id="39" name="椭圆 38">
+            <a:extLst>
+              <a:ext uri="{FF2B5EF4-FFF2-40B4-BE49-F238E27FC236}">
+                <a16:creationId xmlns:a16="http://schemas.microsoft.com/office/drawing/2014/main" id="{A39429C6-908D-AFA1-2BEE-A6F070148BC7}"/>
+              </a:ext>
+            </a:extLst>
+          </p:cNvPr>
+          <p:cNvSpPr>
+            <a:spLocks noChangeAspect="1"/>
+          </p:cNvSpPr>
+          <p:nvPr/>
+        </p:nvSpPr>
+        <p:spPr>
+          <a:xfrm>
+            <a:off x="2369418" y="5127059"/>
+            <a:ext cx="144000" cy="144000"/>
+          </a:xfrm>
+          <a:prstGeom prst="ellipse">
+            <a:avLst/>
+          </a:prstGeom>
+          <a:ln>
+            <a:solidFill>
+              <a:schemeClr val="tx1"/>
+            </a:solidFill>
+          </a:ln>
+        </p:spPr>
+        <p:txBody>
+          <a:bodyPr wrap="square" rtlCol="0" anchor="ctr">
+            <a:noAutofit/>
+          </a:bodyPr>
+          <a:lstStyle/>
+          <a:p>
+            <a:pPr algn="ctr"/>
+            <a:endParaRPr lang="zh-CN" altLang="en-US" dirty="0">
+              <a:latin typeface="微软雅黑" pitchFamily="34" charset="-122"/>
+              <a:ea typeface="微软雅黑" pitchFamily="34" charset="-122"/>
+            </a:endParaRPr>
+          </a:p>
+        </p:txBody>
+      </p:sp>
+      <p:sp>
+        <p:nvSpPr>
+          <p:cNvPr id="41" name="椭圆 40">
+            <a:extLst>
+              <a:ext uri="{FF2B5EF4-FFF2-40B4-BE49-F238E27FC236}">
+                <a16:creationId xmlns:a16="http://schemas.microsoft.com/office/drawing/2014/main" id="{6E575FCE-9E2E-2ACA-5646-7859D2EC5ADB}"/>
+              </a:ext>
+            </a:extLst>
+          </p:cNvPr>
+          <p:cNvSpPr>
+            <a:spLocks noChangeAspect="1"/>
+          </p:cNvSpPr>
+          <p:nvPr/>
+        </p:nvSpPr>
+        <p:spPr>
+          <a:xfrm>
+            <a:off x="3034363" y="5127059"/>
+            <a:ext cx="144000" cy="144000"/>
+          </a:xfrm>
+          <a:prstGeom prst="ellipse">
+            <a:avLst/>
+          </a:prstGeom>
+          <a:ln>
+            <a:solidFill>
+              <a:schemeClr val="tx1"/>
+            </a:solidFill>
+          </a:ln>
+        </p:spPr>
+        <p:txBody>
+          <a:bodyPr wrap="square" rtlCol="0" anchor="ctr">
+            <a:noAutofit/>
+          </a:bodyPr>
+          <a:lstStyle/>
+          <a:p>
+            <a:pPr algn="ctr"/>
+            <a:endParaRPr lang="zh-CN" altLang="en-US" dirty="0">
+              <a:latin typeface="微软雅黑" pitchFamily="34" charset="-122"/>
+              <a:ea typeface="微软雅黑" pitchFamily="34" charset="-122"/>
+            </a:endParaRPr>
+          </a:p>
+        </p:txBody>
+      </p:sp>
+      <p:sp>
+        <p:nvSpPr>
+          <p:cNvPr id="43" name="椭圆 42">
+            <a:extLst>
+              <a:ext uri="{FF2B5EF4-FFF2-40B4-BE49-F238E27FC236}">
+                <a16:creationId xmlns:a16="http://schemas.microsoft.com/office/drawing/2014/main" id="{37BFFD5C-6222-6743-90A8-5D86EB2E2976}"/>
+              </a:ext>
+            </a:extLst>
+          </p:cNvPr>
+          <p:cNvSpPr>
+            <a:spLocks noChangeAspect="1"/>
+          </p:cNvSpPr>
+          <p:nvPr/>
+        </p:nvSpPr>
+        <p:spPr>
+          <a:xfrm>
+            <a:off x="3699309" y="5127059"/>
+            <a:ext cx="144000" cy="144000"/>
+          </a:xfrm>
+          <a:prstGeom prst="ellipse">
+            <a:avLst/>
+          </a:prstGeom>
+          <a:ln>
+            <a:solidFill>
+              <a:schemeClr val="tx1"/>
+            </a:solidFill>
+          </a:ln>
+        </p:spPr>
+        <p:txBody>
+          <a:bodyPr wrap="square" rtlCol="0" anchor="ctr">
+            <a:noAutofit/>
+          </a:bodyPr>
+          <a:lstStyle/>
+          <a:p>
+            <a:pPr algn="ctr"/>
+            <a:endParaRPr lang="zh-CN" altLang="en-US" dirty="0">
+              <a:latin typeface="微软雅黑" pitchFamily="34" charset="-122"/>
+              <a:ea typeface="微软雅黑" pitchFamily="34" charset="-122"/>
+            </a:endParaRPr>
+          </a:p>
+        </p:txBody>
+      </p:sp>
+      <p:sp>
+        <p:nvSpPr>
+          <p:cNvPr id="45" name="椭圆 44">
+            <a:extLst>
+              <a:ext uri="{FF2B5EF4-FFF2-40B4-BE49-F238E27FC236}">
+                <a16:creationId xmlns:a16="http://schemas.microsoft.com/office/drawing/2014/main" id="{62358676-A0A3-E225-7ACF-5C165A804BC6}"/>
+              </a:ext>
+            </a:extLst>
+          </p:cNvPr>
+          <p:cNvSpPr>
+            <a:spLocks noChangeAspect="1"/>
+          </p:cNvSpPr>
+          <p:nvPr/>
+        </p:nvSpPr>
+        <p:spPr>
+          <a:xfrm>
+            <a:off x="1039528" y="2964582"/>
+            <a:ext cx="144000" cy="144000"/>
+          </a:xfrm>
+          <a:prstGeom prst="ellipse">
+            <a:avLst/>
+          </a:prstGeom>
+          <a:ln>
+            <a:solidFill>
+              <a:schemeClr val="tx1"/>
+            </a:solidFill>
+          </a:ln>
+        </p:spPr>
+        <p:txBody>
+          <a:bodyPr wrap="square" rtlCol="0" anchor="ctr">
+            <a:noAutofit/>
+          </a:bodyPr>
+          <a:lstStyle/>
+          <a:p>
+            <a:pPr algn="ctr"/>
+            <a:endParaRPr lang="zh-CN" altLang="en-US" dirty="0">
+              <a:latin typeface="微软雅黑" pitchFamily="34" charset="-122"/>
+              <a:ea typeface="微软雅黑" pitchFamily="34" charset="-122"/>
+            </a:endParaRPr>
+          </a:p>
+        </p:txBody>
+      </p:sp>
+      <p:sp>
+        <p:nvSpPr>
+          <p:cNvPr id="47" name="椭圆 46">
+            <a:extLst>
+              <a:ext uri="{FF2B5EF4-FFF2-40B4-BE49-F238E27FC236}">
+                <a16:creationId xmlns:a16="http://schemas.microsoft.com/office/drawing/2014/main" id="{4396BB8A-565A-4B9E-5FC0-231B9729E29B}"/>
+              </a:ext>
+            </a:extLst>
+          </p:cNvPr>
+          <p:cNvSpPr>
+            <a:spLocks noChangeAspect="1"/>
+          </p:cNvSpPr>
+          <p:nvPr/>
+        </p:nvSpPr>
+        <p:spPr>
+          <a:xfrm>
+            <a:off x="1704473" y="2964582"/>
+            <a:ext cx="144000" cy="144000"/>
+          </a:xfrm>
+          <a:prstGeom prst="ellipse">
+            <a:avLst/>
+          </a:prstGeom>
+          <a:ln>
+            <a:solidFill>
+              <a:schemeClr val="tx1"/>
+            </a:solidFill>
+          </a:ln>
+        </p:spPr>
+        <p:txBody>
+          <a:bodyPr wrap="square" rtlCol="0" anchor="ctr">
+            <a:noAutofit/>
+          </a:bodyPr>
+          <a:lstStyle/>
+          <a:p>
+            <a:pPr algn="ctr"/>
+            <a:endParaRPr lang="zh-CN" altLang="en-US" dirty="0">
+              <a:latin typeface="微软雅黑" pitchFamily="34" charset="-122"/>
+              <a:ea typeface="微软雅黑" pitchFamily="34" charset="-122"/>
+            </a:endParaRPr>
+          </a:p>
+        </p:txBody>
+      </p:sp>
+      <p:sp>
+        <p:nvSpPr>
+          <p:cNvPr id="49" name="椭圆 48">
+            <a:extLst>
+              <a:ext uri="{FF2B5EF4-FFF2-40B4-BE49-F238E27FC236}">
+                <a16:creationId xmlns:a16="http://schemas.microsoft.com/office/drawing/2014/main" id="{43670C56-E683-2D50-EBA2-1C76670F75C9}"/>
+              </a:ext>
+            </a:extLst>
+          </p:cNvPr>
+          <p:cNvSpPr>
+            <a:spLocks noChangeAspect="1"/>
+          </p:cNvSpPr>
+          <p:nvPr/>
+        </p:nvSpPr>
+        <p:spPr>
+          <a:xfrm>
+            <a:off x="2369418" y="2964582"/>
+            <a:ext cx="144000" cy="144000"/>
+          </a:xfrm>
+          <a:prstGeom prst="ellipse">
+            <a:avLst/>
+          </a:prstGeom>
+          <a:ln>
+            <a:solidFill>
+              <a:schemeClr val="tx1"/>
+            </a:solidFill>
+          </a:ln>
+        </p:spPr>
+        <p:txBody>
+          <a:bodyPr wrap="square" rtlCol="0" anchor="ctr">
+            <a:noAutofit/>
+          </a:bodyPr>
+          <a:lstStyle/>
+          <a:p>
+            <a:pPr algn="ctr"/>
+            <a:endParaRPr lang="zh-CN" altLang="en-US" dirty="0">
+              <a:latin typeface="微软雅黑" pitchFamily="34" charset="-122"/>
+              <a:ea typeface="微软雅黑" pitchFamily="34" charset="-122"/>
+            </a:endParaRPr>
+          </a:p>
+        </p:txBody>
+      </p:sp>
+      <p:sp>
+        <p:nvSpPr>
+          <p:cNvPr id="51" name="椭圆 50">
+            <a:extLst>
+              <a:ext uri="{FF2B5EF4-FFF2-40B4-BE49-F238E27FC236}">
+                <a16:creationId xmlns:a16="http://schemas.microsoft.com/office/drawing/2014/main" id="{91C1BFE0-F772-61C9-1550-1174954DB7D8}"/>
+              </a:ext>
+            </a:extLst>
+          </p:cNvPr>
+          <p:cNvSpPr>
+            <a:spLocks noChangeAspect="1"/>
+          </p:cNvSpPr>
+          <p:nvPr/>
+        </p:nvSpPr>
+        <p:spPr>
+          <a:xfrm>
+            <a:off x="3034363" y="2964582"/>
+            <a:ext cx="144000" cy="144000"/>
+          </a:xfrm>
+          <a:prstGeom prst="ellipse">
+            <a:avLst/>
+          </a:prstGeom>
+          <a:ln>
+            <a:solidFill>
+              <a:schemeClr val="tx1"/>
+            </a:solidFill>
+          </a:ln>
+        </p:spPr>
+        <p:txBody>
+          <a:bodyPr wrap="square" rtlCol="0" anchor="ctr">
+            <a:noAutofit/>
+          </a:bodyPr>
+          <a:lstStyle/>
+          <a:p>
+            <a:pPr algn="ctr"/>
+            <a:endParaRPr lang="zh-CN" altLang="en-US" dirty="0">
+              <a:latin typeface="微软雅黑" pitchFamily="34" charset="-122"/>
+              <a:ea typeface="微软雅黑" pitchFamily="34" charset="-122"/>
+            </a:endParaRPr>
+          </a:p>
+        </p:txBody>
+      </p:sp>
+      <p:sp>
+        <p:nvSpPr>
+          <p:cNvPr id="53" name="椭圆 52">
+            <a:extLst>
+              <a:ext uri="{FF2B5EF4-FFF2-40B4-BE49-F238E27FC236}">
+                <a16:creationId xmlns:a16="http://schemas.microsoft.com/office/drawing/2014/main" id="{ADABEDBC-EA0E-7CC1-3502-BD3FF46AB28F}"/>
+              </a:ext>
+            </a:extLst>
+          </p:cNvPr>
+          <p:cNvSpPr>
+            <a:spLocks noChangeAspect="1"/>
+          </p:cNvSpPr>
+          <p:nvPr/>
+        </p:nvSpPr>
+        <p:spPr>
+          <a:xfrm>
+            <a:off x="3699309" y="2964582"/>
+            <a:ext cx="144000" cy="144000"/>
+          </a:xfrm>
+          <a:prstGeom prst="ellipse">
+            <a:avLst/>
+          </a:prstGeom>
+          <a:ln>
+            <a:solidFill>
+              <a:schemeClr val="tx1"/>
+            </a:solidFill>
+          </a:ln>
+        </p:spPr>
+        <p:txBody>
+          <a:bodyPr wrap="square" rtlCol="0" anchor="ctr">
+            <a:noAutofit/>
+          </a:bodyPr>
+          <a:lstStyle/>
+          <a:p>
+            <a:pPr algn="ctr"/>
+            <a:endParaRPr lang="zh-CN" altLang="en-US" dirty="0">
+              <a:latin typeface="微软雅黑" pitchFamily="34" charset="-122"/>
+              <a:ea typeface="微软雅黑" pitchFamily="34" charset="-122"/>
+            </a:endParaRPr>
+          </a:p>
+        </p:txBody>
+      </p:sp>
+      <p:sp>
+        <p:nvSpPr>
+          <p:cNvPr id="55" name="椭圆 54">
+            <a:extLst>
+              <a:ext uri="{FF2B5EF4-FFF2-40B4-BE49-F238E27FC236}">
+                <a16:creationId xmlns:a16="http://schemas.microsoft.com/office/drawing/2014/main" id="{1F46B13B-8959-90EF-7D01-A5C5EF4EC008}"/>
+              </a:ext>
+            </a:extLst>
+          </p:cNvPr>
+          <p:cNvSpPr>
+            <a:spLocks noChangeAspect="1"/>
+          </p:cNvSpPr>
+          <p:nvPr/>
+        </p:nvSpPr>
+        <p:spPr>
+          <a:xfrm>
+            <a:off x="1039528" y="3347988"/>
+            <a:ext cx="144000" cy="144000"/>
+          </a:xfrm>
+          <a:prstGeom prst="ellipse">
+            <a:avLst/>
+          </a:prstGeom>
+          <a:ln>
+            <a:solidFill>
+              <a:schemeClr val="tx1"/>
+            </a:solidFill>
+          </a:ln>
+        </p:spPr>
+        <p:txBody>
+          <a:bodyPr wrap="square" rtlCol="0" anchor="ctr">
+            <a:noAutofit/>
+          </a:bodyPr>
+          <a:lstStyle/>
+          <a:p>
+            <a:pPr algn="ctr"/>
+            <a:endParaRPr lang="zh-CN" altLang="en-US" dirty="0">
+              <a:latin typeface="微软雅黑" pitchFamily="34" charset="-122"/>
+              <a:ea typeface="微软雅黑" pitchFamily="34" charset="-122"/>
+            </a:endParaRPr>
+          </a:p>
+        </p:txBody>
+      </p:sp>
+      <p:sp>
+        <p:nvSpPr>
+          <p:cNvPr id="57" name="椭圆 56">
+            <a:extLst>
+              <a:ext uri="{FF2B5EF4-FFF2-40B4-BE49-F238E27FC236}">
+                <a16:creationId xmlns:a16="http://schemas.microsoft.com/office/drawing/2014/main" id="{F36DD593-0789-89B1-0316-0629185C3582}"/>
+              </a:ext>
+            </a:extLst>
+          </p:cNvPr>
+          <p:cNvSpPr>
+            <a:spLocks noChangeAspect="1"/>
+          </p:cNvSpPr>
+          <p:nvPr/>
+        </p:nvSpPr>
+        <p:spPr>
+          <a:xfrm>
+            <a:off x="1704473" y="3347988"/>
+            <a:ext cx="144000" cy="144000"/>
+          </a:xfrm>
+          <a:prstGeom prst="ellipse">
+            <a:avLst/>
+          </a:prstGeom>
+          <a:ln>
+            <a:solidFill>
+              <a:schemeClr val="tx1"/>
+            </a:solidFill>
+          </a:ln>
+        </p:spPr>
+        <p:txBody>
+          <a:bodyPr wrap="square" rtlCol="0" anchor="ctr">
+            <a:noAutofit/>
+          </a:bodyPr>
+          <a:lstStyle/>
+          <a:p>
+            <a:pPr algn="ctr"/>
+            <a:endParaRPr lang="zh-CN" altLang="en-US" dirty="0">
+              <a:latin typeface="微软雅黑" pitchFamily="34" charset="-122"/>
+              <a:ea typeface="微软雅黑" pitchFamily="34" charset="-122"/>
+            </a:endParaRPr>
+          </a:p>
+        </p:txBody>
+      </p:sp>
+      <p:sp>
+        <p:nvSpPr>
+          <p:cNvPr id="59" name="椭圆 58">
+            <a:extLst>
+              <a:ext uri="{FF2B5EF4-FFF2-40B4-BE49-F238E27FC236}">
+                <a16:creationId xmlns:a16="http://schemas.microsoft.com/office/drawing/2014/main" id="{DBEE8D85-0BD8-00EB-BB63-5917849F5526}"/>
+              </a:ext>
+            </a:extLst>
+          </p:cNvPr>
+          <p:cNvSpPr>
+            <a:spLocks noChangeAspect="1"/>
+          </p:cNvSpPr>
+          <p:nvPr/>
+        </p:nvSpPr>
+        <p:spPr>
+          <a:xfrm>
+            <a:off x="2369418" y="3347988"/>
+            <a:ext cx="144000" cy="144000"/>
+          </a:xfrm>
+          <a:prstGeom prst="ellipse">
+            <a:avLst/>
+          </a:prstGeom>
+          <a:ln>
+            <a:solidFill>
+              <a:schemeClr val="tx1"/>
+            </a:solidFill>
+          </a:ln>
+        </p:spPr>
+        <p:txBody>
+          <a:bodyPr wrap="square" rtlCol="0" anchor="ctr">
+            <a:noAutofit/>
+          </a:bodyPr>
+          <a:lstStyle/>
+          <a:p>
+            <a:pPr algn="ctr"/>
+            <a:endParaRPr lang="zh-CN" altLang="en-US" dirty="0">
+              <a:latin typeface="微软雅黑" pitchFamily="34" charset="-122"/>
+              <a:ea typeface="微软雅黑" pitchFamily="34" charset="-122"/>
+            </a:endParaRPr>
+          </a:p>
+        </p:txBody>
+      </p:sp>
+      <p:sp>
+        <p:nvSpPr>
+          <p:cNvPr id="61" name="椭圆 60">
+            <a:extLst>
+              <a:ext uri="{FF2B5EF4-FFF2-40B4-BE49-F238E27FC236}">
+                <a16:creationId xmlns:a16="http://schemas.microsoft.com/office/drawing/2014/main" id="{C3C7C52C-E921-0E8F-8F7E-59C1D9030EC8}"/>
+              </a:ext>
+            </a:extLst>
+          </p:cNvPr>
+          <p:cNvSpPr>
+            <a:spLocks noChangeAspect="1"/>
+          </p:cNvSpPr>
+          <p:nvPr/>
+        </p:nvSpPr>
+        <p:spPr>
+          <a:xfrm>
+            <a:off x="3034363" y="3347988"/>
+            <a:ext cx="144000" cy="144000"/>
+          </a:xfrm>
+          <a:prstGeom prst="ellipse">
+            <a:avLst/>
+          </a:prstGeom>
+          <a:ln>
+            <a:solidFill>
+              <a:schemeClr val="tx1"/>
+            </a:solidFill>
+          </a:ln>
+        </p:spPr>
+        <p:txBody>
+          <a:bodyPr wrap="square" rtlCol="0" anchor="ctr">
+            <a:noAutofit/>
+          </a:bodyPr>
+          <a:lstStyle/>
+          <a:p>
+            <a:pPr algn="ctr"/>
+            <a:endParaRPr lang="zh-CN" altLang="en-US" dirty="0">
+              <a:latin typeface="微软雅黑" pitchFamily="34" charset="-122"/>
+              <a:ea typeface="微软雅黑" pitchFamily="34" charset="-122"/>
+            </a:endParaRPr>
+          </a:p>
+        </p:txBody>
+      </p:sp>
+      <p:sp>
+        <p:nvSpPr>
+          <p:cNvPr id="63" name="椭圆 62">
+            <a:extLst>
+              <a:ext uri="{FF2B5EF4-FFF2-40B4-BE49-F238E27FC236}">
+                <a16:creationId xmlns:a16="http://schemas.microsoft.com/office/drawing/2014/main" id="{2F0E3061-D5BB-C2BE-27E3-571B6EB03781}"/>
+              </a:ext>
+            </a:extLst>
+          </p:cNvPr>
+          <p:cNvSpPr>
+            <a:spLocks noChangeAspect="1"/>
+          </p:cNvSpPr>
+          <p:nvPr/>
+        </p:nvSpPr>
+        <p:spPr>
+          <a:xfrm>
+            <a:off x="3699309" y="3347988"/>
+            <a:ext cx="144000" cy="144000"/>
+          </a:xfrm>
+          <a:prstGeom prst="ellipse">
+            <a:avLst/>
+          </a:prstGeom>
+          <a:ln>
+            <a:solidFill>
+              <a:schemeClr val="tx1"/>
+            </a:solidFill>
+          </a:ln>
+        </p:spPr>
+        <p:txBody>
+          <a:bodyPr wrap="square" rtlCol="0" anchor="ctr">
+            <a:noAutofit/>
+          </a:bodyPr>
+          <a:lstStyle/>
+          <a:p>
+            <a:pPr algn="ctr"/>
+            <a:endParaRPr lang="zh-CN" altLang="en-US" dirty="0">
+              <a:latin typeface="微软雅黑" pitchFamily="34" charset="-122"/>
+              <a:ea typeface="微软雅黑" pitchFamily="34" charset="-122"/>
+            </a:endParaRPr>
+          </a:p>
+        </p:txBody>
+      </p:sp>
+      <p:sp>
+        <p:nvSpPr>
+          <p:cNvPr id="65" name="矩形 64">
+            <a:extLst>
+              <a:ext uri="{FF2B5EF4-FFF2-40B4-BE49-F238E27FC236}">
+                <a16:creationId xmlns:a16="http://schemas.microsoft.com/office/drawing/2014/main" id="{790BCADD-31FF-BA75-466E-6BC19AF2E77D}"/>
+              </a:ext>
+            </a:extLst>
+          </p:cNvPr>
+          <p:cNvSpPr/>
+          <p:nvPr/>
+        </p:nvSpPr>
+        <p:spPr>
+          <a:xfrm>
+            <a:off x="847023" y="2704700"/>
+            <a:ext cx="3229232" cy="1126155"/>
+          </a:xfrm>
+          <a:prstGeom prst="rect">
+            <a:avLst/>
+          </a:prstGeom>
+          <a:solidFill>
+            <a:schemeClr val="accent1">
+              <a:alpha val="20000"/>
+            </a:schemeClr>
+          </a:solidFill>
+          <a:ln>
+            <a:solidFill>
+              <a:schemeClr val="tx1"/>
+            </a:solidFill>
+          </a:ln>
+        </p:spPr>
+        <p:txBody>
+          <a:bodyPr wrap="square" rtlCol="0" anchor="ctr">
+            <a:noAutofit/>
+          </a:bodyPr>
+          <a:lstStyle/>
+          <a:p>
+            <a:pPr algn="ctr"/>
+            <a:endParaRPr lang="zh-CN" altLang="en-US" dirty="0">
+              <a:latin typeface="微软雅黑" pitchFamily="34" charset="-122"/>
+              <a:ea typeface="微软雅黑" pitchFamily="34" charset="-122"/>
+            </a:endParaRPr>
+          </a:p>
+        </p:txBody>
+      </p:sp>
+      <p:sp>
+        <p:nvSpPr>
+          <p:cNvPr id="67" name="矩形 66">
+            <a:extLst>
+              <a:ext uri="{FF2B5EF4-FFF2-40B4-BE49-F238E27FC236}">
+                <a16:creationId xmlns:a16="http://schemas.microsoft.com/office/drawing/2014/main" id="{F778F8D1-8CA4-35F2-0686-216F760416B3}"/>
+              </a:ext>
+            </a:extLst>
+          </p:cNvPr>
+          <p:cNvSpPr/>
+          <p:nvPr/>
+        </p:nvSpPr>
+        <p:spPr>
+          <a:xfrm>
+            <a:off x="847023" y="4610501"/>
+            <a:ext cx="3229232" cy="1674796"/>
+          </a:xfrm>
+          <a:prstGeom prst="rect">
+            <a:avLst/>
+          </a:prstGeom>
+          <a:solidFill>
+            <a:schemeClr val="accent6">
+              <a:alpha val="20000"/>
+            </a:schemeClr>
+          </a:solidFill>
+          <a:ln>
+            <a:solidFill>
+              <a:schemeClr val="tx1"/>
+            </a:solidFill>
+          </a:ln>
+        </p:spPr>
+        <p:txBody>
+          <a:bodyPr wrap="square" rtlCol="0" anchor="ctr">
+            <a:noAutofit/>
+          </a:bodyPr>
+          <a:lstStyle/>
+          <a:p>
+            <a:pPr algn="ctr"/>
+            <a:endParaRPr lang="zh-CN" altLang="en-US" dirty="0">
+              <a:latin typeface="微软雅黑" pitchFamily="34" charset="-122"/>
+              <a:ea typeface="微软雅黑" pitchFamily="34" charset="-122"/>
+            </a:endParaRPr>
+          </a:p>
+        </p:txBody>
+      </p:sp>
+      <p:sp>
+        <p:nvSpPr>
+          <p:cNvPr id="69" name="矩形 68">
+            <a:extLst>
+              <a:ext uri="{FF2B5EF4-FFF2-40B4-BE49-F238E27FC236}">
+                <a16:creationId xmlns:a16="http://schemas.microsoft.com/office/drawing/2014/main" id="{B3527141-0400-603A-B1AC-A8653C5D6278}"/>
+              </a:ext>
+            </a:extLst>
+          </p:cNvPr>
+          <p:cNvSpPr/>
+          <p:nvPr/>
+        </p:nvSpPr>
+        <p:spPr>
+          <a:xfrm>
+            <a:off x="847023" y="1192929"/>
+            <a:ext cx="3229232" cy="890413"/>
+          </a:xfrm>
+          <a:prstGeom prst="rect">
+            <a:avLst/>
+          </a:prstGeom>
+          <a:solidFill>
+            <a:schemeClr val="bg1">
+              <a:lumMod val="50000"/>
+              <a:alpha val="20000"/>
+            </a:schemeClr>
+          </a:solidFill>
+          <a:ln>
+            <a:solidFill>
+              <a:schemeClr val="tx1"/>
+            </a:solidFill>
+          </a:ln>
+        </p:spPr>
+        <p:txBody>
+          <a:bodyPr wrap="square" rtlCol="0" anchor="ctr">
+            <a:noAutofit/>
+          </a:bodyPr>
+          <a:lstStyle/>
+          <a:p>
+            <a:pPr algn="ctr"/>
+            <a:endParaRPr lang="zh-CN" altLang="en-US" dirty="0">
+              <a:latin typeface="微软雅黑" pitchFamily="34" charset="-122"/>
+              <a:ea typeface="微软雅黑" pitchFamily="34" charset="-122"/>
+            </a:endParaRPr>
+          </a:p>
+        </p:txBody>
+      </p:sp>
+      <p:sp>
+        <p:nvSpPr>
+          <p:cNvPr id="71" name="椭圆 70">
+            <a:extLst>
+              <a:ext uri="{FF2B5EF4-FFF2-40B4-BE49-F238E27FC236}">
+                <a16:creationId xmlns:a16="http://schemas.microsoft.com/office/drawing/2014/main" id="{F89FCCF2-976A-E98B-FAC7-8B1480E7B4FC}"/>
+              </a:ext>
+            </a:extLst>
+          </p:cNvPr>
+          <p:cNvSpPr>
+            <a:spLocks noChangeAspect="1"/>
+          </p:cNvSpPr>
+          <p:nvPr/>
+        </p:nvSpPr>
+        <p:spPr>
+          <a:xfrm>
+            <a:off x="1039528" y="5613891"/>
+            <a:ext cx="144000" cy="144000"/>
+          </a:xfrm>
+          <a:prstGeom prst="ellipse">
+            <a:avLst/>
+          </a:prstGeom>
+          <a:ln>
+            <a:solidFill>
+              <a:schemeClr val="tx1"/>
+            </a:solidFill>
+          </a:ln>
+        </p:spPr>
+        <p:txBody>
+          <a:bodyPr wrap="square" rtlCol="0" anchor="ctr">
+            <a:noAutofit/>
+          </a:bodyPr>
+          <a:lstStyle/>
+          <a:p>
+            <a:pPr algn="ctr"/>
+            <a:endParaRPr lang="zh-CN" altLang="en-US" dirty="0">
+              <a:latin typeface="微软雅黑" pitchFamily="34" charset="-122"/>
+              <a:ea typeface="微软雅黑" pitchFamily="34" charset="-122"/>
+            </a:endParaRPr>
+          </a:p>
+        </p:txBody>
+      </p:sp>
+      <p:sp>
+        <p:nvSpPr>
+          <p:cNvPr id="73" name="椭圆 72">
+            <a:extLst>
+              <a:ext uri="{FF2B5EF4-FFF2-40B4-BE49-F238E27FC236}">
+                <a16:creationId xmlns:a16="http://schemas.microsoft.com/office/drawing/2014/main" id="{638C7A02-6A6B-4292-60E6-FE66FC9A297E}"/>
+              </a:ext>
+            </a:extLst>
+          </p:cNvPr>
+          <p:cNvSpPr>
+            <a:spLocks noChangeAspect="1"/>
+          </p:cNvSpPr>
+          <p:nvPr/>
+        </p:nvSpPr>
+        <p:spPr>
+          <a:xfrm>
+            <a:off x="1704473" y="5613891"/>
+            <a:ext cx="144000" cy="144000"/>
+          </a:xfrm>
+          <a:prstGeom prst="ellipse">
+            <a:avLst/>
+          </a:prstGeom>
+          <a:ln>
+            <a:solidFill>
+              <a:schemeClr val="tx1"/>
+            </a:solidFill>
+          </a:ln>
+        </p:spPr>
+        <p:txBody>
+          <a:bodyPr wrap="square" rtlCol="0" anchor="ctr">
+            <a:noAutofit/>
+          </a:bodyPr>
+          <a:lstStyle/>
+          <a:p>
+            <a:pPr algn="ctr"/>
+            <a:endParaRPr lang="zh-CN" altLang="en-US" dirty="0">
+              <a:latin typeface="微软雅黑" pitchFamily="34" charset="-122"/>
+              <a:ea typeface="微软雅黑" pitchFamily="34" charset="-122"/>
+            </a:endParaRPr>
+          </a:p>
+        </p:txBody>
+      </p:sp>
+      <p:sp>
+        <p:nvSpPr>
+          <p:cNvPr id="75" name="椭圆 74">
+            <a:extLst>
+              <a:ext uri="{FF2B5EF4-FFF2-40B4-BE49-F238E27FC236}">
+                <a16:creationId xmlns:a16="http://schemas.microsoft.com/office/drawing/2014/main" id="{3EE52A21-AEFF-AE02-9116-0FB6DEADA37D}"/>
+              </a:ext>
+            </a:extLst>
+          </p:cNvPr>
+          <p:cNvSpPr>
+            <a:spLocks noChangeAspect="1"/>
+          </p:cNvSpPr>
+          <p:nvPr/>
+        </p:nvSpPr>
+        <p:spPr>
+          <a:xfrm>
+            <a:off x="2369418" y="5613891"/>
+            <a:ext cx="144000" cy="144000"/>
+          </a:xfrm>
+          <a:prstGeom prst="ellipse">
+            <a:avLst/>
+          </a:prstGeom>
+          <a:ln>
+            <a:solidFill>
+              <a:schemeClr val="tx1"/>
+            </a:solidFill>
+          </a:ln>
+        </p:spPr>
+        <p:txBody>
+          <a:bodyPr wrap="square" rtlCol="0" anchor="ctr">
+            <a:noAutofit/>
+          </a:bodyPr>
+          <a:lstStyle/>
+          <a:p>
+            <a:pPr algn="ctr"/>
+            <a:endParaRPr lang="zh-CN" altLang="en-US" dirty="0">
+              <a:latin typeface="微软雅黑" pitchFamily="34" charset="-122"/>
+              <a:ea typeface="微软雅黑" pitchFamily="34" charset="-122"/>
+            </a:endParaRPr>
+          </a:p>
+        </p:txBody>
+      </p:sp>
+      <p:sp>
+        <p:nvSpPr>
+          <p:cNvPr id="77" name="椭圆 76">
+            <a:extLst>
+              <a:ext uri="{FF2B5EF4-FFF2-40B4-BE49-F238E27FC236}">
+                <a16:creationId xmlns:a16="http://schemas.microsoft.com/office/drawing/2014/main" id="{E12AD3EE-DDD3-7CCB-A524-ADDE2B95464A}"/>
+              </a:ext>
+            </a:extLst>
+          </p:cNvPr>
+          <p:cNvSpPr>
+            <a:spLocks noChangeAspect="1"/>
+          </p:cNvSpPr>
+          <p:nvPr/>
+        </p:nvSpPr>
+        <p:spPr>
+          <a:xfrm>
+            <a:off x="3034363" y="5613891"/>
+            <a:ext cx="144000" cy="144000"/>
+          </a:xfrm>
+          <a:prstGeom prst="ellipse">
+            <a:avLst/>
+          </a:prstGeom>
+          <a:ln>
+            <a:solidFill>
+              <a:schemeClr val="tx1"/>
+            </a:solidFill>
+          </a:ln>
+        </p:spPr>
+        <p:txBody>
+          <a:bodyPr wrap="square" rtlCol="0" anchor="ctr">
+            <a:noAutofit/>
+          </a:bodyPr>
+          <a:lstStyle/>
+          <a:p>
+            <a:pPr algn="ctr"/>
+            <a:endParaRPr lang="zh-CN" altLang="en-US" dirty="0">
+              <a:latin typeface="微软雅黑" pitchFamily="34" charset="-122"/>
+              <a:ea typeface="微软雅黑" pitchFamily="34" charset="-122"/>
+            </a:endParaRPr>
+          </a:p>
+        </p:txBody>
+      </p:sp>
+      <p:sp>
+        <p:nvSpPr>
+          <p:cNvPr id="79" name="椭圆 78">
+            <a:extLst>
+              <a:ext uri="{FF2B5EF4-FFF2-40B4-BE49-F238E27FC236}">
+                <a16:creationId xmlns:a16="http://schemas.microsoft.com/office/drawing/2014/main" id="{37F9AA55-B9BE-8CBF-7A0A-E0EC8E251210}"/>
+              </a:ext>
+            </a:extLst>
+          </p:cNvPr>
+          <p:cNvSpPr>
+            <a:spLocks noChangeAspect="1"/>
+          </p:cNvSpPr>
+          <p:nvPr/>
+        </p:nvSpPr>
+        <p:spPr>
+          <a:xfrm>
+            <a:off x="3699309" y="5613891"/>
+            <a:ext cx="144000" cy="144000"/>
+          </a:xfrm>
+          <a:prstGeom prst="ellipse">
+            <a:avLst/>
+          </a:prstGeom>
+          <a:ln>
+            <a:solidFill>
+              <a:schemeClr val="tx1"/>
+            </a:solidFill>
+          </a:ln>
+        </p:spPr>
+        <p:txBody>
+          <a:bodyPr wrap="square" rtlCol="0" anchor="ctr">
+            <a:noAutofit/>
+          </a:bodyPr>
+          <a:lstStyle/>
+          <a:p>
+            <a:pPr algn="ctr"/>
+            <a:endParaRPr lang="zh-CN" altLang="en-US" dirty="0">
+              <a:latin typeface="微软雅黑" pitchFamily="34" charset="-122"/>
+              <a:ea typeface="微软雅黑" pitchFamily="34" charset="-122"/>
+            </a:endParaRPr>
+          </a:p>
+        </p:txBody>
+      </p:sp>
+      <p:sp>
+        <p:nvSpPr>
+          <p:cNvPr id="81" name="椭圆 80">
+            <a:extLst>
+              <a:ext uri="{FF2B5EF4-FFF2-40B4-BE49-F238E27FC236}">
+                <a16:creationId xmlns:a16="http://schemas.microsoft.com/office/drawing/2014/main" id="{666A62AC-D5CA-2FB6-5373-183D21AD5AE1}"/>
+              </a:ext>
+            </a:extLst>
+          </p:cNvPr>
+          <p:cNvSpPr>
+            <a:spLocks noChangeAspect="1"/>
+          </p:cNvSpPr>
+          <p:nvPr/>
+        </p:nvSpPr>
+        <p:spPr>
+          <a:xfrm>
+            <a:off x="1039528" y="5997297"/>
+            <a:ext cx="144000" cy="144000"/>
+          </a:xfrm>
+          <a:prstGeom prst="ellipse">
+            <a:avLst/>
+          </a:prstGeom>
+          <a:ln>
+            <a:solidFill>
+              <a:schemeClr val="tx1"/>
+            </a:solidFill>
+          </a:ln>
+        </p:spPr>
+        <p:txBody>
+          <a:bodyPr wrap="square" rtlCol="0" anchor="ctr">
+            <a:noAutofit/>
+          </a:bodyPr>
+          <a:lstStyle/>
+          <a:p>
+            <a:pPr algn="ctr"/>
+            <a:endParaRPr lang="zh-CN" altLang="en-US" dirty="0">
+              <a:latin typeface="微软雅黑" pitchFamily="34" charset="-122"/>
+              <a:ea typeface="微软雅黑" pitchFamily="34" charset="-122"/>
+            </a:endParaRPr>
+          </a:p>
+        </p:txBody>
+      </p:sp>
+      <p:sp>
+        <p:nvSpPr>
+          <p:cNvPr id="83" name="椭圆 82">
+            <a:extLst>
+              <a:ext uri="{FF2B5EF4-FFF2-40B4-BE49-F238E27FC236}">
+                <a16:creationId xmlns:a16="http://schemas.microsoft.com/office/drawing/2014/main" id="{78DCE7F9-9106-7466-EDAB-AB8B6C973FBE}"/>
+              </a:ext>
+            </a:extLst>
+          </p:cNvPr>
+          <p:cNvSpPr>
+            <a:spLocks noChangeAspect="1"/>
+          </p:cNvSpPr>
+          <p:nvPr/>
+        </p:nvSpPr>
+        <p:spPr>
+          <a:xfrm>
+            <a:off x="1704473" y="5997297"/>
+            <a:ext cx="144000" cy="144000"/>
+          </a:xfrm>
+          <a:prstGeom prst="ellipse">
+            <a:avLst/>
+          </a:prstGeom>
+          <a:ln>
+            <a:solidFill>
+              <a:schemeClr val="tx1"/>
+            </a:solidFill>
+          </a:ln>
+        </p:spPr>
+        <p:txBody>
+          <a:bodyPr wrap="square" rtlCol="0" anchor="ctr">
+            <a:noAutofit/>
+          </a:bodyPr>
+          <a:lstStyle/>
+          <a:p>
+            <a:pPr algn="ctr"/>
+            <a:endParaRPr lang="zh-CN" altLang="en-US" dirty="0">
+              <a:latin typeface="微软雅黑" pitchFamily="34" charset="-122"/>
+              <a:ea typeface="微软雅黑" pitchFamily="34" charset="-122"/>
+            </a:endParaRPr>
+          </a:p>
+        </p:txBody>
+      </p:sp>
+      <p:sp>
+        <p:nvSpPr>
+          <p:cNvPr id="85" name="椭圆 84">
+            <a:extLst>
+              <a:ext uri="{FF2B5EF4-FFF2-40B4-BE49-F238E27FC236}">
+                <a16:creationId xmlns:a16="http://schemas.microsoft.com/office/drawing/2014/main" id="{1A6020AA-EA98-1CBA-28CD-FC293101A39E}"/>
+              </a:ext>
+            </a:extLst>
+          </p:cNvPr>
+          <p:cNvSpPr>
+            <a:spLocks noChangeAspect="1"/>
+          </p:cNvSpPr>
+          <p:nvPr/>
+        </p:nvSpPr>
+        <p:spPr>
+          <a:xfrm>
+            <a:off x="2369418" y="5997297"/>
+            <a:ext cx="144000" cy="144000"/>
+          </a:xfrm>
+          <a:prstGeom prst="ellipse">
+            <a:avLst/>
+          </a:prstGeom>
+          <a:ln>
+            <a:solidFill>
+              <a:schemeClr val="tx1"/>
+            </a:solidFill>
+          </a:ln>
+        </p:spPr>
+        <p:txBody>
+          <a:bodyPr wrap="square" rtlCol="0" anchor="ctr">
+            <a:noAutofit/>
+          </a:bodyPr>
+          <a:lstStyle/>
+          <a:p>
+            <a:pPr algn="ctr"/>
+            <a:endParaRPr lang="zh-CN" altLang="en-US" dirty="0">
+              <a:latin typeface="微软雅黑" pitchFamily="34" charset="-122"/>
+              <a:ea typeface="微软雅黑" pitchFamily="34" charset="-122"/>
+            </a:endParaRPr>
+          </a:p>
+        </p:txBody>
+      </p:sp>
+      <p:sp>
+        <p:nvSpPr>
+          <p:cNvPr id="87" name="椭圆 86">
+            <a:extLst>
+              <a:ext uri="{FF2B5EF4-FFF2-40B4-BE49-F238E27FC236}">
+                <a16:creationId xmlns:a16="http://schemas.microsoft.com/office/drawing/2014/main" id="{7716C256-AE08-93CD-9D51-093AB7AEFE75}"/>
+              </a:ext>
+            </a:extLst>
+          </p:cNvPr>
+          <p:cNvSpPr>
+            <a:spLocks noChangeAspect="1"/>
+          </p:cNvSpPr>
+          <p:nvPr/>
+        </p:nvSpPr>
+        <p:spPr>
+          <a:xfrm>
+            <a:off x="3034363" y="5997297"/>
+            <a:ext cx="144000" cy="144000"/>
+          </a:xfrm>
+          <a:prstGeom prst="ellipse">
+            <a:avLst/>
+          </a:prstGeom>
+          <a:ln>
+            <a:solidFill>
+              <a:schemeClr val="tx1"/>
+            </a:solidFill>
+          </a:ln>
+        </p:spPr>
+        <p:txBody>
+          <a:bodyPr wrap="square" rtlCol="0" anchor="ctr">
+            <a:noAutofit/>
+          </a:bodyPr>
+          <a:lstStyle/>
+          <a:p>
+            <a:pPr algn="ctr"/>
+            <a:endParaRPr lang="zh-CN" altLang="en-US" dirty="0">
+              <a:latin typeface="微软雅黑" pitchFamily="34" charset="-122"/>
+              <a:ea typeface="微软雅黑" pitchFamily="34" charset="-122"/>
+            </a:endParaRPr>
+          </a:p>
+        </p:txBody>
+      </p:sp>
+      <p:sp>
+        <p:nvSpPr>
+          <p:cNvPr id="89" name="椭圆 88">
+            <a:extLst>
+              <a:ext uri="{FF2B5EF4-FFF2-40B4-BE49-F238E27FC236}">
+                <a16:creationId xmlns:a16="http://schemas.microsoft.com/office/drawing/2014/main" id="{EFD63B16-62F6-D188-372B-A2B85093A2F9}"/>
+              </a:ext>
+            </a:extLst>
+          </p:cNvPr>
+          <p:cNvSpPr>
+            <a:spLocks noChangeAspect="1"/>
+          </p:cNvSpPr>
+          <p:nvPr/>
+        </p:nvSpPr>
+        <p:spPr>
+          <a:xfrm>
+            <a:off x="3699309" y="5997297"/>
+            <a:ext cx="144000" cy="144000"/>
+          </a:xfrm>
+          <a:prstGeom prst="ellipse">
+            <a:avLst/>
+          </a:prstGeom>
+          <a:ln>
+            <a:solidFill>
+              <a:schemeClr val="tx1"/>
+            </a:solidFill>
+          </a:ln>
+        </p:spPr>
+        <p:txBody>
+          <a:bodyPr wrap="square" rtlCol="0" anchor="ctr">
+            <a:noAutofit/>
+          </a:bodyPr>
+          <a:lstStyle/>
+          <a:p>
+            <a:pPr algn="ctr"/>
+            <a:endParaRPr lang="zh-CN" altLang="en-US" dirty="0">
+              <a:latin typeface="微软雅黑" pitchFamily="34" charset="-122"/>
+              <a:ea typeface="微软雅黑" pitchFamily="34" charset="-122"/>
+            </a:endParaRPr>
+          </a:p>
+        </p:txBody>
+      </p:sp>
+      <p:sp>
+        <p:nvSpPr>
+          <p:cNvPr id="91" name="椭圆 90">
+            <a:extLst>
+              <a:ext uri="{FF2B5EF4-FFF2-40B4-BE49-F238E27FC236}">
+                <a16:creationId xmlns:a16="http://schemas.microsoft.com/office/drawing/2014/main" id="{F6030B68-1340-5766-72F6-31F871C874EF}"/>
+              </a:ext>
+            </a:extLst>
+          </p:cNvPr>
+          <p:cNvSpPr>
+            <a:spLocks noChangeAspect="1"/>
+          </p:cNvSpPr>
+          <p:nvPr/>
+        </p:nvSpPr>
+        <p:spPr>
+          <a:xfrm>
+            <a:off x="5573873" y="4743653"/>
+            <a:ext cx="144000" cy="144000"/>
+          </a:xfrm>
+          <a:prstGeom prst="ellipse">
+            <a:avLst/>
+          </a:prstGeom>
+          <a:ln>
+            <a:solidFill>
+              <a:schemeClr val="tx1"/>
+            </a:solidFill>
+          </a:ln>
+        </p:spPr>
+        <p:txBody>
+          <a:bodyPr wrap="square" rtlCol="0" anchor="ctr">
+            <a:noAutofit/>
+          </a:bodyPr>
+          <a:lstStyle/>
+          <a:p>
+            <a:pPr algn="ctr"/>
+            <a:endParaRPr lang="zh-CN" altLang="en-US" dirty="0">
+              <a:latin typeface="微软雅黑" pitchFamily="34" charset="-122"/>
+              <a:ea typeface="微软雅黑" pitchFamily="34" charset="-122"/>
+            </a:endParaRPr>
+          </a:p>
+        </p:txBody>
+      </p:sp>
+      <p:sp>
+        <p:nvSpPr>
+          <p:cNvPr id="93" name="椭圆 92">
+            <a:extLst>
+              <a:ext uri="{FF2B5EF4-FFF2-40B4-BE49-F238E27FC236}">
+                <a16:creationId xmlns:a16="http://schemas.microsoft.com/office/drawing/2014/main" id="{D73C96F7-0911-F8ED-98E6-81B8E24D0A42}"/>
+              </a:ext>
+            </a:extLst>
+          </p:cNvPr>
+          <p:cNvSpPr>
+            <a:spLocks noChangeAspect="1"/>
+          </p:cNvSpPr>
+          <p:nvPr/>
+        </p:nvSpPr>
+        <p:spPr>
+          <a:xfrm>
+            <a:off x="6238818" y="4743653"/>
+            <a:ext cx="144000" cy="144000"/>
+          </a:xfrm>
+          <a:prstGeom prst="ellipse">
+            <a:avLst/>
+          </a:prstGeom>
+          <a:ln>
+            <a:solidFill>
+              <a:schemeClr val="tx1"/>
+            </a:solidFill>
+          </a:ln>
+        </p:spPr>
+        <p:txBody>
+          <a:bodyPr wrap="square" rtlCol="0" anchor="ctr">
+            <a:noAutofit/>
+          </a:bodyPr>
+          <a:lstStyle/>
+          <a:p>
+            <a:pPr algn="ctr"/>
+            <a:endParaRPr lang="zh-CN" altLang="en-US" dirty="0">
+              <a:latin typeface="微软雅黑" pitchFamily="34" charset="-122"/>
+              <a:ea typeface="微软雅黑" pitchFamily="34" charset="-122"/>
+            </a:endParaRPr>
+          </a:p>
+        </p:txBody>
+      </p:sp>
+      <p:sp>
+        <p:nvSpPr>
+          <p:cNvPr id="95" name="椭圆 94">
+            <a:extLst>
+              <a:ext uri="{FF2B5EF4-FFF2-40B4-BE49-F238E27FC236}">
+                <a16:creationId xmlns:a16="http://schemas.microsoft.com/office/drawing/2014/main" id="{4AC2A3FC-B580-E4BC-FFCB-E6C33D25988B}"/>
+              </a:ext>
+            </a:extLst>
+          </p:cNvPr>
+          <p:cNvSpPr>
+            <a:spLocks noChangeAspect="1"/>
+          </p:cNvSpPr>
+          <p:nvPr/>
+        </p:nvSpPr>
+        <p:spPr>
+          <a:xfrm>
+            <a:off x="6903763" y="4743653"/>
+            <a:ext cx="144000" cy="144000"/>
+          </a:xfrm>
+          <a:prstGeom prst="ellipse">
+            <a:avLst/>
+          </a:prstGeom>
+          <a:ln>
+            <a:solidFill>
+              <a:schemeClr val="tx1"/>
+            </a:solidFill>
+          </a:ln>
+        </p:spPr>
+        <p:txBody>
+          <a:bodyPr wrap="square" rtlCol="0" anchor="ctr">
+            <a:noAutofit/>
+          </a:bodyPr>
+          <a:lstStyle/>
+          <a:p>
+            <a:pPr algn="ctr"/>
+            <a:endParaRPr lang="zh-CN" altLang="en-US" dirty="0">
+              <a:latin typeface="微软雅黑" pitchFamily="34" charset="-122"/>
+              <a:ea typeface="微软雅黑" pitchFamily="34" charset="-122"/>
+            </a:endParaRPr>
+          </a:p>
+        </p:txBody>
+      </p:sp>
+      <p:sp>
+        <p:nvSpPr>
+          <p:cNvPr id="97" name="椭圆 96">
+            <a:extLst>
+              <a:ext uri="{FF2B5EF4-FFF2-40B4-BE49-F238E27FC236}">
+                <a16:creationId xmlns:a16="http://schemas.microsoft.com/office/drawing/2014/main" id="{022E4EF7-3074-A162-1354-E1687A54E5B0}"/>
+              </a:ext>
+            </a:extLst>
+          </p:cNvPr>
+          <p:cNvSpPr>
+            <a:spLocks noChangeAspect="1"/>
+          </p:cNvSpPr>
+          <p:nvPr/>
+        </p:nvSpPr>
+        <p:spPr>
+          <a:xfrm>
+            <a:off x="7568708" y="4743653"/>
+            <a:ext cx="144000" cy="144000"/>
+          </a:xfrm>
+          <a:prstGeom prst="ellipse">
+            <a:avLst/>
+          </a:prstGeom>
+          <a:ln>
+            <a:solidFill>
+              <a:schemeClr val="tx1"/>
+            </a:solidFill>
+          </a:ln>
+        </p:spPr>
+        <p:txBody>
+          <a:bodyPr wrap="square" rtlCol="0" anchor="ctr">
+            <a:noAutofit/>
+          </a:bodyPr>
+          <a:lstStyle/>
+          <a:p>
+            <a:pPr algn="ctr"/>
+            <a:endParaRPr lang="zh-CN" altLang="en-US" dirty="0">
+              <a:latin typeface="微软雅黑" pitchFamily="34" charset="-122"/>
+              <a:ea typeface="微软雅黑" pitchFamily="34" charset="-122"/>
+            </a:endParaRPr>
+          </a:p>
+        </p:txBody>
+      </p:sp>
+      <p:sp>
+        <p:nvSpPr>
+          <p:cNvPr id="99" name="椭圆 98">
+            <a:extLst>
+              <a:ext uri="{FF2B5EF4-FFF2-40B4-BE49-F238E27FC236}">
+                <a16:creationId xmlns:a16="http://schemas.microsoft.com/office/drawing/2014/main" id="{74821E0E-C5A0-D8AF-DCA5-3BCAE8D3D872}"/>
+              </a:ext>
+            </a:extLst>
+          </p:cNvPr>
+          <p:cNvSpPr>
+            <a:spLocks noChangeAspect="1"/>
+          </p:cNvSpPr>
+          <p:nvPr/>
+        </p:nvSpPr>
+        <p:spPr>
+          <a:xfrm>
+            <a:off x="8233654" y="4743653"/>
+            <a:ext cx="144000" cy="144000"/>
+          </a:xfrm>
+          <a:prstGeom prst="ellipse">
+            <a:avLst/>
+          </a:prstGeom>
+          <a:ln>
+            <a:solidFill>
+              <a:schemeClr val="tx1"/>
+            </a:solidFill>
+          </a:ln>
+        </p:spPr>
+        <p:txBody>
+          <a:bodyPr wrap="square" rtlCol="0" anchor="ctr">
+            <a:noAutofit/>
+          </a:bodyPr>
+          <a:lstStyle/>
+          <a:p>
+            <a:pPr algn="ctr"/>
+            <a:endParaRPr lang="zh-CN" altLang="en-US" dirty="0">
+              <a:latin typeface="微软雅黑" pitchFamily="34" charset="-122"/>
+              <a:ea typeface="微软雅黑" pitchFamily="34" charset="-122"/>
+            </a:endParaRPr>
+          </a:p>
+        </p:txBody>
+      </p:sp>
+      <p:sp>
+        <p:nvSpPr>
+          <p:cNvPr id="101" name="椭圆 100">
+            <a:extLst>
+              <a:ext uri="{FF2B5EF4-FFF2-40B4-BE49-F238E27FC236}">
+                <a16:creationId xmlns:a16="http://schemas.microsoft.com/office/drawing/2014/main" id="{569B87E4-18C3-1196-7216-B4FAC0D8FEDA}"/>
+              </a:ext>
+            </a:extLst>
+          </p:cNvPr>
+          <p:cNvSpPr>
+            <a:spLocks noChangeAspect="1"/>
+          </p:cNvSpPr>
+          <p:nvPr/>
+        </p:nvSpPr>
+        <p:spPr>
+          <a:xfrm>
+            <a:off x="5573873" y="5127059"/>
+            <a:ext cx="144000" cy="144000"/>
+          </a:xfrm>
+          <a:prstGeom prst="ellipse">
+            <a:avLst/>
+          </a:prstGeom>
+          <a:ln>
+            <a:solidFill>
+              <a:schemeClr val="tx1"/>
+            </a:solidFill>
+          </a:ln>
+        </p:spPr>
+        <p:txBody>
+          <a:bodyPr wrap="square" rtlCol="0" anchor="ctr">
+            <a:noAutofit/>
+          </a:bodyPr>
+          <a:lstStyle/>
+          <a:p>
+            <a:pPr algn="ctr"/>
+            <a:endParaRPr lang="zh-CN" altLang="en-US" dirty="0">
+              <a:latin typeface="微软雅黑" pitchFamily="34" charset="-122"/>
+              <a:ea typeface="微软雅黑" pitchFamily="34" charset="-122"/>
+            </a:endParaRPr>
+          </a:p>
+        </p:txBody>
+      </p:sp>
+      <p:sp>
+        <p:nvSpPr>
+          <p:cNvPr id="103" name="椭圆 102">
+            <a:extLst>
+              <a:ext uri="{FF2B5EF4-FFF2-40B4-BE49-F238E27FC236}">
+                <a16:creationId xmlns:a16="http://schemas.microsoft.com/office/drawing/2014/main" id="{AC50CC63-C76F-7738-DD54-C9EA270626C3}"/>
+              </a:ext>
+            </a:extLst>
+          </p:cNvPr>
+          <p:cNvSpPr>
+            <a:spLocks noChangeAspect="1"/>
+          </p:cNvSpPr>
+          <p:nvPr/>
+        </p:nvSpPr>
+        <p:spPr>
+          <a:xfrm>
+            <a:off x="6238818" y="5127059"/>
+            <a:ext cx="144000" cy="144000"/>
+          </a:xfrm>
+          <a:prstGeom prst="ellipse">
+            <a:avLst/>
+          </a:prstGeom>
+          <a:ln>
+            <a:solidFill>
+              <a:schemeClr val="tx1"/>
+            </a:solidFill>
+          </a:ln>
+        </p:spPr>
+        <p:txBody>
+          <a:bodyPr wrap="square" rtlCol="0" anchor="ctr">
+            <a:noAutofit/>
+          </a:bodyPr>
+          <a:lstStyle/>
+          <a:p>
+            <a:pPr algn="ctr"/>
+            <a:endParaRPr lang="zh-CN" altLang="en-US" dirty="0">
+              <a:latin typeface="微软雅黑" pitchFamily="34" charset="-122"/>
+              <a:ea typeface="微软雅黑" pitchFamily="34" charset="-122"/>
+            </a:endParaRPr>
+          </a:p>
+        </p:txBody>
+      </p:sp>
+      <p:sp>
+        <p:nvSpPr>
+          <p:cNvPr id="105" name="椭圆 104">
+            <a:extLst>
+              <a:ext uri="{FF2B5EF4-FFF2-40B4-BE49-F238E27FC236}">
+                <a16:creationId xmlns:a16="http://schemas.microsoft.com/office/drawing/2014/main" id="{E1AD9B5C-7FF0-9DB5-BBF0-0B8D3ED55C67}"/>
+              </a:ext>
+            </a:extLst>
+          </p:cNvPr>
+          <p:cNvSpPr>
+            <a:spLocks noChangeAspect="1"/>
+          </p:cNvSpPr>
+          <p:nvPr/>
+        </p:nvSpPr>
+        <p:spPr>
+          <a:xfrm>
+            <a:off x="6903763" y="5127059"/>
+            <a:ext cx="144000" cy="144000"/>
+          </a:xfrm>
+          <a:prstGeom prst="ellipse">
+            <a:avLst/>
+          </a:prstGeom>
+          <a:ln>
+            <a:solidFill>
+              <a:schemeClr val="tx1"/>
+            </a:solidFill>
+          </a:ln>
+        </p:spPr>
+        <p:txBody>
+          <a:bodyPr wrap="square" rtlCol="0" anchor="ctr">
+            <a:noAutofit/>
+          </a:bodyPr>
+          <a:lstStyle/>
+          <a:p>
+            <a:pPr algn="ctr"/>
+            <a:endParaRPr lang="zh-CN" altLang="en-US" dirty="0">
+              <a:latin typeface="微软雅黑" pitchFamily="34" charset="-122"/>
+              <a:ea typeface="微软雅黑" pitchFamily="34" charset="-122"/>
+            </a:endParaRPr>
+          </a:p>
+        </p:txBody>
+      </p:sp>
+      <p:sp>
+        <p:nvSpPr>
+          <p:cNvPr id="107" name="椭圆 106">
+            <a:extLst>
+              <a:ext uri="{FF2B5EF4-FFF2-40B4-BE49-F238E27FC236}">
+                <a16:creationId xmlns:a16="http://schemas.microsoft.com/office/drawing/2014/main" id="{EC2230E4-FC35-B714-2D95-D30A748F585F}"/>
+              </a:ext>
+            </a:extLst>
+          </p:cNvPr>
+          <p:cNvSpPr>
+            <a:spLocks noChangeAspect="1"/>
+          </p:cNvSpPr>
+          <p:nvPr/>
+        </p:nvSpPr>
+        <p:spPr>
+          <a:xfrm>
+            <a:off x="7568708" y="5127059"/>
+            <a:ext cx="144000" cy="144000"/>
+          </a:xfrm>
+          <a:prstGeom prst="ellipse">
+            <a:avLst/>
+          </a:prstGeom>
+          <a:ln>
+            <a:solidFill>
+              <a:schemeClr val="tx1"/>
+            </a:solidFill>
+          </a:ln>
+        </p:spPr>
+        <p:txBody>
+          <a:bodyPr wrap="square" rtlCol="0" anchor="ctr">
+            <a:noAutofit/>
+          </a:bodyPr>
+          <a:lstStyle/>
+          <a:p>
+            <a:pPr algn="ctr"/>
+            <a:endParaRPr lang="zh-CN" altLang="en-US" dirty="0">
+              <a:latin typeface="微软雅黑" pitchFamily="34" charset="-122"/>
+              <a:ea typeface="微软雅黑" pitchFamily="34" charset="-122"/>
+            </a:endParaRPr>
+          </a:p>
+        </p:txBody>
+      </p:sp>
+      <p:sp>
+        <p:nvSpPr>
+          <p:cNvPr id="109" name="椭圆 108">
+            <a:extLst>
+              <a:ext uri="{FF2B5EF4-FFF2-40B4-BE49-F238E27FC236}">
+                <a16:creationId xmlns:a16="http://schemas.microsoft.com/office/drawing/2014/main" id="{573718A9-7C55-0573-F5A8-AC03C3C5DF0C}"/>
+              </a:ext>
+            </a:extLst>
+          </p:cNvPr>
+          <p:cNvSpPr>
+            <a:spLocks noChangeAspect="1"/>
+          </p:cNvSpPr>
+          <p:nvPr/>
+        </p:nvSpPr>
+        <p:spPr>
+          <a:xfrm>
+            <a:off x="8233654" y="5127059"/>
+            <a:ext cx="144000" cy="144000"/>
+          </a:xfrm>
+          <a:prstGeom prst="ellipse">
+            <a:avLst/>
+          </a:prstGeom>
+          <a:ln>
+            <a:solidFill>
+              <a:schemeClr val="tx1"/>
+            </a:solidFill>
+          </a:ln>
+        </p:spPr>
+        <p:txBody>
+          <a:bodyPr wrap="square" rtlCol="0" anchor="ctr">
+            <a:noAutofit/>
+          </a:bodyPr>
+          <a:lstStyle/>
+          <a:p>
+            <a:pPr algn="ctr"/>
+            <a:endParaRPr lang="zh-CN" altLang="en-US" dirty="0">
+              <a:latin typeface="微软雅黑" pitchFamily="34" charset="-122"/>
+              <a:ea typeface="微软雅黑" pitchFamily="34" charset="-122"/>
+            </a:endParaRPr>
+          </a:p>
+        </p:txBody>
+      </p:sp>
+      <p:sp>
+        <p:nvSpPr>
+          <p:cNvPr id="111" name="矩形 110">
+            <a:extLst>
+              <a:ext uri="{FF2B5EF4-FFF2-40B4-BE49-F238E27FC236}">
+                <a16:creationId xmlns:a16="http://schemas.microsoft.com/office/drawing/2014/main" id="{1BF02020-4BF6-5892-7CD2-02CE9F273D8A}"/>
+              </a:ext>
+            </a:extLst>
+          </p:cNvPr>
+          <p:cNvSpPr/>
+          <p:nvPr/>
+        </p:nvSpPr>
+        <p:spPr>
+          <a:xfrm>
+            <a:off x="5381368" y="4610501"/>
+            <a:ext cx="3229232" cy="1674796"/>
+          </a:xfrm>
+          <a:prstGeom prst="rect">
+            <a:avLst/>
+          </a:prstGeom>
+          <a:solidFill>
+            <a:srgbClr val="FF0000">
+              <a:alpha val="20000"/>
+            </a:srgbClr>
+          </a:solidFill>
+          <a:ln>
+            <a:solidFill>
+              <a:schemeClr val="tx1"/>
+            </a:solidFill>
+          </a:ln>
+        </p:spPr>
+        <p:txBody>
+          <a:bodyPr wrap="square" rtlCol="0" anchor="ctr">
+            <a:noAutofit/>
+          </a:bodyPr>
+          <a:lstStyle/>
+          <a:p>
+            <a:pPr algn="ctr"/>
+            <a:endParaRPr lang="zh-CN" altLang="en-US" dirty="0">
+              <a:latin typeface="微软雅黑" pitchFamily="34" charset="-122"/>
+              <a:ea typeface="微软雅黑" pitchFamily="34" charset="-122"/>
+            </a:endParaRPr>
+          </a:p>
+        </p:txBody>
+      </p:sp>
+      <p:sp>
+        <p:nvSpPr>
+          <p:cNvPr id="113" name="椭圆 112">
+            <a:extLst>
+              <a:ext uri="{FF2B5EF4-FFF2-40B4-BE49-F238E27FC236}">
+                <a16:creationId xmlns:a16="http://schemas.microsoft.com/office/drawing/2014/main" id="{FD2BE84E-ACB0-09A5-E6DF-752813050FB5}"/>
+              </a:ext>
+            </a:extLst>
+          </p:cNvPr>
+          <p:cNvSpPr>
+            <a:spLocks noChangeAspect="1"/>
+          </p:cNvSpPr>
+          <p:nvPr/>
+        </p:nvSpPr>
+        <p:spPr>
+          <a:xfrm>
+            <a:off x="5573873" y="5613891"/>
+            <a:ext cx="144000" cy="144000"/>
+          </a:xfrm>
+          <a:prstGeom prst="ellipse">
+            <a:avLst/>
+          </a:prstGeom>
+          <a:ln>
+            <a:solidFill>
+              <a:schemeClr val="tx1"/>
+            </a:solidFill>
+          </a:ln>
+        </p:spPr>
+        <p:txBody>
+          <a:bodyPr wrap="square" rtlCol="0" anchor="ctr">
+            <a:noAutofit/>
+          </a:bodyPr>
+          <a:lstStyle/>
+          <a:p>
+            <a:pPr algn="ctr"/>
+            <a:endParaRPr lang="zh-CN" altLang="en-US" dirty="0">
+              <a:latin typeface="微软雅黑" pitchFamily="34" charset="-122"/>
+              <a:ea typeface="微软雅黑" pitchFamily="34" charset="-122"/>
+            </a:endParaRPr>
+          </a:p>
+        </p:txBody>
+      </p:sp>
+      <p:sp>
+        <p:nvSpPr>
+          <p:cNvPr id="115" name="椭圆 114">
+            <a:extLst>
+              <a:ext uri="{FF2B5EF4-FFF2-40B4-BE49-F238E27FC236}">
+                <a16:creationId xmlns:a16="http://schemas.microsoft.com/office/drawing/2014/main" id="{1A41EEDF-B023-CA22-C4E5-F5F5C4E83237}"/>
+              </a:ext>
+            </a:extLst>
+          </p:cNvPr>
+          <p:cNvSpPr>
+            <a:spLocks noChangeAspect="1"/>
+          </p:cNvSpPr>
+          <p:nvPr/>
+        </p:nvSpPr>
+        <p:spPr>
+          <a:xfrm>
+            <a:off x="6238818" y="5613891"/>
+            <a:ext cx="144000" cy="144000"/>
+          </a:xfrm>
+          <a:prstGeom prst="ellipse">
+            <a:avLst/>
+          </a:prstGeom>
+          <a:ln>
+            <a:solidFill>
+              <a:schemeClr val="tx1"/>
+            </a:solidFill>
+          </a:ln>
+        </p:spPr>
+        <p:txBody>
+          <a:bodyPr wrap="square" rtlCol="0" anchor="ctr">
+            <a:noAutofit/>
+          </a:bodyPr>
+          <a:lstStyle/>
+          <a:p>
+            <a:pPr algn="ctr"/>
+            <a:endParaRPr lang="zh-CN" altLang="en-US" dirty="0">
+              <a:latin typeface="微软雅黑" pitchFamily="34" charset="-122"/>
+              <a:ea typeface="微软雅黑" pitchFamily="34" charset="-122"/>
+            </a:endParaRPr>
+          </a:p>
+        </p:txBody>
+      </p:sp>
+      <p:sp>
+        <p:nvSpPr>
+          <p:cNvPr id="117" name="椭圆 116">
+            <a:extLst>
+              <a:ext uri="{FF2B5EF4-FFF2-40B4-BE49-F238E27FC236}">
+                <a16:creationId xmlns:a16="http://schemas.microsoft.com/office/drawing/2014/main" id="{531E0640-38A7-431A-FCAA-F296C6A7A85B}"/>
+              </a:ext>
+            </a:extLst>
+          </p:cNvPr>
+          <p:cNvSpPr>
+            <a:spLocks noChangeAspect="1"/>
+          </p:cNvSpPr>
+          <p:nvPr/>
+        </p:nvSpPr>
+        <p:spPr>
+          <a:xfrm>
+            <a:off x="6903763" y="5613891"/>
+            <a:ext cx="144000" cy="144000"/>
+          </a:xfrm>
+          <a:prstGeom prst="ellipse">
+            <a:avLst/>
+          </a:prstGeom>
+          <a:ln>
+            <a:solidFill>
+              <a:schemeClr val="tx1"/>
+            </a:solidFill>
+          </a:ln>
+        </p:spPr>
+        <p:txBody>
+          <a:bodyPr wrap="square" rtlCol="0" anchor="ctr">
+            <a:noAutofit/>
+          </a:bodyPr>
+          <a:lstStyle/>
+          <a:p>
+            <a:pPr algn="ctr"/>
+            <a:endParaRPr lang="zh-CN" altLang="en-US" dirty="0">
+              <a:latin typeface="微软雅黑" pitchFamily="34" charset="-122"/>
+              <a:ea typeface="微软雅黑" pitchFamily="34" charset="-122"/>
+            </a:endParaRPr>
+          </a:p>
+        </p:txBody>
+      </p:sp>
+      <p:sp>
+        <p:nvSpPr>
+          <p:cNvPr id="119" name="椭圆 118">
+            <a:extLst>
+              <a:ext uri="{FF2B5EF4-FFF2-40B4-BE49-F238E27FC236}">
+                <a16:creationId xmlns:a16="http://schemas.microsoft.com/office/drawing/2014/main" id="{B01CD45A-B605-D4C2-CBBB-DE18AC19D025}"/>
+              </a:ext>
+            </a:extLst>
+          </p:cNvPr>
+          <p:cNvSpPr>
+            <a:spLocks noChangeAspect="1"/>
+          </p:cNvSpPr>
+          <p:nvPr/>
+        </p:nvSpPr>
+        <p:spPr>
+          <a:xfrm>
+            <a:off x="7568708" y="5613891"/>
+            <a:ext cx="144000" cy="144000"/>
+          </a:xfrm>
+          <a:prstGeom prst="ellipse">
+            <a:avLst/>
+          </a:prstGeom>
+          <a:ln>
+            <a:solidFill>
+              <a:schemeClr val="tx1"/>
+            </a:solidFill>
+          </a:ln>
+        </p:spPr>
+        <p:txBody>
+          <a:bodyPr wrap="square" rtlCol="0" anchor="ctr">
+            <a:noAutofit/>
+          </a:bodyPr>
+          <a:lstStyle/>
+          <a:p>
+            <a:pPr algn="ctr"/>
+            <a:endParaRPr lang="zh-CN" altLang="en-US" dirty="0">
+              <a:latin typeface="微软雅黑" pitchFamily="34" charset="-122"/>
+              <a:ea typeface="微软雅黑" pitchFamily="34" charset="-122"/>
+            </a:endParaRPr>
+          </a:p>
+        </p:txBody>
+      </p:sp>
+      <p:sp>
+        <p:nvSpPr>
+          <p:cNvPr id="121" name="椭圆 120">
+            <a:extLst>
+              <a:ext uri="{FF2B5EF4-FFF2-40B4-BE49-F238E27FC236}">
+                <a16:creationId xmlns:a16="http://schemas.microsoft.com/office/drawing/2014/main" id="{14A998B5-D98C-EE46-2A29-01B3BD8B7AD9}"/>
+              </a:ext>
+            </a:extLst>
+          </p:cNvPr>
+          <p:cNvSpPr>
+            <a:spLocks noChangeAspect="1"/>
+          </p:cNvSpPr>
+          <p:nvPr/>
+        </p:nvSpPr>
+        <p:spPr>
+          <a:xfrm>
+            <a:off x="8233654" y="5613891"/>
+            <a:ext cx="144000" cy="144000"/>
+          </a:xfrm>
+          <a:prstGeom prst="ellipse">
+            <a:avLst/>
+          </a:prstGeom>
+          <a:ln>
+            <a:solidFill>
+              <a:schemeClr val="tx1"/>
+            </a:solidFill>
+          </a:ln>
+        </p:spPr>
+        <p:txBody>
+          <a:bodyPr wrap="square" rtlCol="0" anchor="ctr">
+            <a:noAutofit/>
+          </a:bodyPr>
+          <a:lstStyle/>
+          <a:p>
+            <a:pPr algn="ctr"/>
+            <a:endParaRPr lang="zh-CN" altLang="en-US" dirty="0">
+              <a:latin typeface="微软雅黑" pitchFamily="34" charset="-122"/>
+              <a:ea typeface="微软雅黑" pitchFamily="34" charset="-122"/>
+            </a:endParaRPr>
+          </a:p>
+        </p:txBody>
+      </p:sp>
+      <p:sp>
+        <p:nvSpPr>
+          <p:cNvPr id="123" name="椭圆 122">
+            <a:extLst>
+              <a:ext uri="{FF2B5EF4-FFF2-40B4-BE49-F238E27FC236}">
+                <a16:creationId xmlns:a16="http://schemas.microsoft.com/office/drawing/2014/main" id="{020A6B1E-F4CC-5C24-D473-4E3F4BBA834E}"/>
+              </a:ext>
+            </a:extLst>
+          </p:cNvPr>
+          <p:cNvSpPr>
+            <a:spLocks noChangeAspect="1"/>
+          </p:cNvSpPr>
+          <p:nvPr/>
+        </p:nvSpPr>
+        <p:spPr>
+          <a:xfrm>
+            <a:off x="5573873" y="5997297"/>
+            <a:ext cx="144000" cy="144000"/>
+          </a:xfrm>
+          <a:prstGeom prst="ellipse">
+            <a:avLst/>
+          </a:prstGeom>
+          <a:ln>
+            <a:solidFill>
+              <a:schemeClr val="tx1"/>
+            </a:solidFill>
+          </a:ln>
+        </p:spPr>
+        <p:txBody>
+          <a:bodyPr wrap="square" rtlCol="0" anchor="ctr">
+            <a:noAutofit/>
+          </a:bodyPr>
+          <a:lstStyle/>
+          <a:p>
+            <a:pPr algn="ctr"/>
+            <a:endParaRPr lang="zh-CN" altLang="en-US" dirty="0">
+              <a:latin typeface="微软雅黑" pitchFamily="34" charset="-122"/>
+              <a:ea typeface="微软雅黑" pitchFamily="34" charset="-122"/>
+            </a:endParaRPr>
+          </a:p>
+        </p:txBody>
+      </p:sp>
+      <p:sp>
+        <p:nvSpPr>
+          <p:cNvPr id="125" name="椭圆 124">
+            <a:extLst>
+              <a:ext uri="{FF2B5EF4-FFF2-40B4-BE49-F238E27FC236}">
+                <a16:creationId xmlns:a16="http://schemas.microsoft.com/office/drawing/2014/main" id="{32D21FFC-9D47-9668-473C-04F5E3643D0D}"/>
+              </a:ext>
+            </a:extLst>
+          </p:cNvPr>
+          <p:cNvSpPr>
+            <a:spLocks noChangeAspect="1"/>
+          </p:cNvSpPr>
+          <p:nvPr/>
+        </p:nvSpPr>
+        <p:spPr>
+          <a:xfrm>
+            <a:off x="6238818" y="5997297"/>
+            <a:ext cx="144000" cy="144000"/>
+          </a:xfrm>
+          <a:prstGeom prst="ellipse">
+            <a:avLst/>
+          </a:prstGeom>
+          <a:ln>
+            <a:solidFill>
+              <a:schemeClr val="tx1"/>
+            </a:solidFill>
+          </a:ln>
+        </p:spPr>
+        <p:txBody>
+          <a:bodyPr wrap="square" rtlCol="0" anchor="ctr">
+            <a:noAutofit/>
+          </a:bodyPr>
+          <a:lstStyle/>
+          <a:p>
+            <a:pPr algn="ctr"/>
+            <a:endParaRPr lang="zh-CN" altLang="en-US" dirty="0">
+              <a:latin typeface="微软雅黑" pitchFamily="34" charset="-122"/>
+              <a:ea typeface="微软雅黑" pitchFamily="34" charset="-122"/>
+            </a:endParaRPr>
+          </a:p>
+        </p:txBody>
+      </p:sp>
+      <p:sp>
+        <p:nvSpPr>
+          <p:cNvPr id="127" name="椭圆 126">
+            <a:extLst>
+              <a:ext uri="{FF2B5EF4-FFF2-40B4-BE49-F238E27FC236}">
+                <a16:creationId xmlns:a16="http://schemas.microsoft.com/office/drawing/2014/main" id="{B4EE2CA7-81A9-E72B-24F0-F93C867105DA}"/>
+              </a:ext>
+            </a:extLst>
+          </p:cNvPr>
+          <p:cNvSpPr>
+            <a:spLocks noChangeAspect="1"/>
+          </p:cNvSpPr>
+          <p:nvPr/>
+        </p:nvSpPr>
+        <p:spPr>
+          <a:xfrm>
+            <a:off x="6903763" y="5997297"/>
+            <a:ext cx="144000" cy="144000"/>
+          </a:xfrm>
+          <a:prstGeom prst="ellipse">
+            <a:avLst/>
+          </a:prstGeom>
+          <a:ln>
+            <a:solidFill>
+              <a:schemeClr val="tx1"/>
+            </a:solidFill>
+          </a:ln>
+        </p:spPr>
+        <p:txBody>
+          <a:bodyPr wrap="square" rtlCol="0" anchor="ctr">
+            <a:noAutofit/>
+          </a:bodyPr>
+          <a:lstStyle/>
+          <a:p>
+            <a:pPr algn="ctr"/>
+            <a:endParaRPr lang="zh-CN" altLang="en-US" dirty="0">
+              <a:latin typeface="微软雅黑" pitchFamily="34" charset="-122"/>
+              <a:ea typeface="微软雅黑" pitchFamily="34" charset="-122"/>
+            </a:endParaRPr>
+          </a:p>
+        </p:txBody>
+      </p:sp>
+      <p:sp>
+        <p:nvSpPr>
+          <p:cNvPr id="129" name="椭圆 128">
+            <a:extLst>
+              <a:ext uri="{FF2B5EF4-FFF2-40B4-BE49-F238E27FC236}">
+                <a16:creationId xmlns:a16="http://schemas.microsoft.com/office/drawing/2014/main" id="{07280887-6EAD-A0E5-5824-F11EA6910ABC}"/>
+              </a:ext>
+            </a:extLst>
+          </p:cNvPr>
+          <p:cNvSpPr>
+            <a:spLocks noChangeAspect="1"/>
+          </p:cNvSpPr>
+          <p:nvPr/>
+        </p:nvSpPr>
+        <p:spPr>
+          <a:xfrm>
+            <a:off x="7568708" y="5997297"/>
+            <a:ext cx="144000" cy="144000"/>
+          </a:xfrm>
+          <a:prstGeom prst="ellipse">
+            <a:avLst/>
+          </a:prstGeom>
+          <a:ln>
+            <a:solidFill>
+              <a:schemeClr val="tx1"/>
+            </a:solidFill>
+          </a:ln>
+        </p:spPr>
+        <p:txBody>
+          <a:bodyPr wrap="square" rtlCol="0" anchor="ctr">
+            <a:noAutofit/>
+          </a:bodyPr>
+          <a:lstStyle/>
+          <a:p>
+            <a:pPr algn="ctr"/>
+            <a:endParaRPr lang="zh-CN" altLang="en-US" dirty="0">
+              <a:latin typeface="微软雅黑" pitchFamily="34" charset="-122"/>
+              <a:ea typeface="微软雅黑" pitchFamily="34" charset="-122"/>
+            </a:endParaRPr>
+          </a:p>
+        </p:txBody>
+      </p:sp>
+      <p:sp>
+        <p:nvSpPr>
+          <p:cNvPr id="131" name="椭圆 130">
+            <a:extLst>
+              <a:ext uri="{FF2B5EF4-FFF2-40B4-BE49-F238E27FC236}">
+                <a16:creationId xmlns:a16="http://schemas.microsoft.com/office/drawing/2014/main" id="{15EC0B8C-46B7-F3D6-1959-CA8C253A104D}"/>
+              </a:ext>
+            </a:extLst>
+          </p:cNvPr>
+          <p:cNvSpPr>
+            <a:spLocks noChangeAspect="1"/>
+          </p:cNvSpPr>
+          <p:nvPr/>
+        </p:nvSpPr>
+        <p:spPr>
+          <a:xfrm>
+            <a:off x="8233654" y="5997297"/>
+            <a:ext cx="144000" cy="144000"/>
+          </a:xfrm>
+          <a:prstGeom prst="ellipse">
+            <a:avLst/>
+          </a:prstGeom>
+          <a:ln>
+            <a:solidFill>
+              <a:schemeClr val="tx1"/>
+            </a:solidFill>
+          </a:ln>
+        </p:spPr>
+        <p:txBody>
+          <a:bodyPr wrap="square" rtlCol="0" anchor="ctr">
+            <a:noAutofit/>
+          </a:bodyPr>
+          <a:lstStyle/>
+          <a:p>
+            <a:pPr algn="ctr"/>
+            <a:endParaRPr lang="zh-CN" altLang="en-US" dirty="0">
+              <a:latin typeface="微软雅黑" pitchFamily="34" charset="-122"/>
+              <a:ea typeface="微软雅黑" pitchFamily="34" charset="-122"/>
+            </a:endParaRPr>
+          </a:p>
+        </p:txBody>
+      </p:sp>
+      <p:sp>
+        <p:nvSpPr>
+          <p:cNvPr id="132" name="文本框 131">
+            <a:extLst>
+              <a:ext uri="{FF2B5EF4-FFF2-40B4-BE49-F238E27FC236}">
+                <a16:creationId xmlns:a16="http://schemas.microsoft.com/office/drawing/2014/main" id="{339E7395-7CFA-E892-857D-2B82D3C4D7E3}"/>
+              </a:ext>
+            </a:extLst>
+          </p:cNvPr>
+          <p:cNvSpPr txBox="1"/>
+          <p:nvPr/>
+        </p:nvSpPr>
+        <p:spPr>
+          <a:xfrm>
+            <a:off x="160251" y="1510787"/>
+            <a:ext cx="646331" cy="369332"/>
+          </a:xfrm>
+          <a:prstGeom prst="rect">
+            <a:avLst/>
+          </a:prstGeom>
+          <a:noFill/>
+        </p:spPr>
+        <p:txBody>
+          <a:bodyPr wrap="none" rtlCol="0">
+            <a:spAutoFit/>
+          </a:bodyPr>
+          <a:lstStyle/>
+          <a:p>
+            <a:pPr algn="l"/>
+            <a:r>
+              <a:rPr lang="zh-CN" altLang="en-US" dirty="0">
+                <a:latin typeface="微软雅黑" panose="020B0503020204020204" pitchFamily="34" charset="-122"/>
+                <a:ea typeface="微软雅黑" panose="020B0503020204020204" pitchFamily="34" charset="-122"/>
+              </a:rPr>
+              <a:t>测量</a:t>
+            </a:r>
+          </a:p>
+        </p:txBody>
+      </p:sp>
+      <p:sp>
+        <p:nvSpPr>
+          <p:cNvPr id="133" name="文本框 132">
+            <a:extLst>
+              <a:ext uri="{FF2B5EF4-FFF2-40B4-BE49-F238E27FC236}">
+                <a16:creationId xmlns:a16="http://schemas.microsoft.com/office/drawing/2014/main" id="{2EB9118F-7B18-5FA4-7052-1155BB583257}"/>
+              </a:ext>
+            </a:extLst>
+          </p:cNvPr>
+          <p:cNvSpPr txBox="1"/>
+          <p:nvPr/>
+        </p:nvSpPr>
+        <p:spPr>
+          <a:xfrm>
+            <a:off x="166255" y="3243714"/>
+            <a:ext cx="646331" cy="369332"/>
+          </a:xfrm>
+          <a:prstGeom prst="rect">
+            <a:avLst/>
+          </a:prstGeom>
+          <a:noFill/>
+        </p:spPr>
+        <p:txBody>
+          <a:bodyPr wrap="none" rtlCol="0">
+            <a:spAutoFit/>
+          </a:bodyPr>
+          <a:lstStyle/>
+          <a:p>
+            <a:pPr algn="l"/>
+            <a:r>
+              <a:rPr lang="zh-CN" altLang="en-US" dirty="0">
+                <a:latin typeface="微软雅黑" panose="020B0503020204020204" pitchFamily="34" charset="-122"/>
+                <a:ea typeface="微软雅黑" panose="020B0503020204020204" pitchFamily="34" charset="-122"/>
+              </a:rPr>
+              <a:t>纠缠</a:t>
+            </a:r>
+          </a:p>
+        </p:txBody>
+      </p:sp>
+      <p:sp>
+        <p:nvSpPr>
+          <p:cNvPr id="134" name="文本框 133">
+            <a:extLst>
+              <a:ext uri="{FF2B5EF4-FFF2-40B4-BE49-F238E27FC236}">
+                <a16:creationId xmlns:a16="http://schemas.microsoft.com/office/drawing/2014/main" id="{39DA69E9-94D0-61B0-69C0-FB2F613EC194}"/>
+              </a:ext>
+            </a:extLst>
+          </p:cNvPr>
+          <p:cNvSpPr txBox="1"/>
+          <p:nvPr/>
+        </p:nvSpPr>
+        <p:spPr>
+          <a:xfrm>
+            <a:off x="166255" y="5380522"/>
+            <a:ext cx="646331" cy="369332"/>
+          </a:xfrm>
+          <a:prstGeom prst="rect">
+            <a:avLst/>
+          </a:prstGeom>
+          <a:noFill/>
+        </p:spPr>
+        <p:txBody>
+          <a:bodyPr wrap="none" rtlCol="0">
+            <a:spAutoFit/>
+          </a:bodyPr>
+          <a:lstStyle/>
+          <a:p>
+            <a:pPr algn="l"/>
+            <a:r>
+              <a:rPr lang="zh-CN" altLang="en-US" dirty="0">
+                <a:latin typeface="微软雅黑" panose="020B0503020204020204" pitchFamily="34" charset="-122"/>
+                <a:ea typeface="微软雅黑" panose="020B0503020204020204" pitchFamily="34" charset="-122"/>
+              </a:rPr>
+              <a:t>存储</a:t>
+            </a:r>
+          </a:p>
+        </p:txBody>
+      </p:sp>
+      <p:sp>
+        <p:nvSpPr>
+          <p:cNvPr id="135" name="文本框 134">
+            <a:extLst>
+              <a:ext uri="{FF2B5EF4-FFF2-40B4-BE49-F238E27FC236}">
+                <a16:creationId xmlns:a16="http://schemas.microsoft.com/office/drawing/2014/main" id="{CE7BCD53-0889-619C-5FCE-AB3DEF9D80AE}"/>
+              </a:ext>
+            </a:extLst>
+          </p:cNvPr>
+          <p:cNvSpPr txBox="1"/>
+          <p:nvPr/>
+        </p:nvSpPr>
+        <p:spPr>
+          <a:xfrm>
+            <a:off x="8780691" y="5316559"/>
+            <a:ext cx="1539204" cy="369332"/>
+          </a:xfrm>
+          <a:prstGeom prst="rect">
+            <a:avLst/>
+          </a:prstGeom>
+          <a:noFill/>
+        </p:spPr>
+        <p:txBody>
+          <a:bodyPr wrap="none" rtlCol="0">
+            <a:spAutoFit/>
+          </a:bodyPr>
+          <a:lstStyle/>
+          <a:p>
+            <a:pPr algn="l"/>
+            <a:r>
+              <a:rPr lang="zh-CN" altLang="en-US" dirty="0">
+                <a:latin typeface="微软雅黑" panose="020B0503020204020204" pitchFamily="34" charset="-122"/>
+                <a:ea typeface="微软雅黑" panose="020B0503020204020204" pitchFamily="34" charset="-122"/>
+              </a:rPr>
+              <a:t>捕获</a:t>
+            </a:r>
+            <a:r>
+              <a:rPr lang="en-US" altLang="zh-CN" dirty="0">
+                <a:latin typeface="微软雅黑" panose="020B0503020204020204" pitchFamily="34" charset="-122"/>
+                <a:ea typeface="微软雅黑" panose="020B0503020204020204" pitchFamily="34" charset="-122"/>
+              </a:rPr>
+              <a:t>&amp;</a:t>
+            </a:r>
+            <a:r>
+              <a:rPr lang="zh-CN" altLang="en-US" dirty="0">
+                <a:latin typeface="微软雅黑" panose="020B0503020204020204" pitchFamily="34" charset="-122"/>
+                <a:ea typeface="微软雅黑" panose="020B0503020204020204" pitchFamily="34" charset="-122"/>
+              </a:rPr>
+              <a:t>初始化</a:t>
+            </a:r>
+          </a:p>
+        </p:txBody>
+      </p:sp>
+      <p:sp>
+        <p:nvSpPr>
+          <p:cNvPr id="136" name="箭头: 左 135">
+            <a:extLst>
+              <a:ext uri="{FF2B5EF4-FFF2-40B4-BE49-F238E27FC236}">
+                <a16:creationId xmlns:a16="http://schemas.microsoft.com/office/drawing/2014/main" id="{3D608C09-094A-D9D1-2D3C-8B114AB24CD6}"/>
+              </a:ext>
+            </a:extLst>
+          </p:cNvPr>
+          <p:cNvSpPr/>
+          <p:nvPr/>
+        </p:nvSpPr>
+        <p:spPr>
+          <a:xfrm>
+            <a:off x="4349628" y="5380521"/>
+            <a:ext cx="751995" cy="233369"/>
+          </a:xfrm>
+          <a:prstGeom prst="leftArrow">
+            <a:avLst/>
+          </a:prstGeom>
+          <a:ln>
+            <a:solidFill>
+              <a:schemeClr val="tx1"/>
+            </a:solidFill>
+          </a:ln>
+        </p:spPr>
+        <p:txBody>
+          <a:bodyPr wrap="square" rtlCol="0" anchor="ctr">
+            <a:noAutofit/>
+          </a:bodyPr>
+          <a:lstStyle/>
+          <a:p>
+            <a:pPr algn="ctr"/>
+            <a:endParaRPr lang="zh-CN" altLang="en-US" dirty="0">
+              <a:latin typeface="微软雅黑" pitchFamily="34" charset="-122"/>
+              <a:ea typeface="微软雅黑" pitchFamily="34" charset="-122"/>
+            </a:endParaRPr>
+          </a:p>
+        </p:txBody>
+      </p:sp>
+      <p:sp>
+        <p:nvSpPr>
+          <p:cNvPr id="138" name="文本框 137">
+            <a:extLst>
+              <a:ext uri="{FF2B5EF4-FFF2-40B4-BE49-F238E27FC236}">
+                <a16:creationId xmlns:a16="http://schemas.microsoft.com/office/drawing/2014/main" id="{2CF6EDF7-4C65-6BF7-37FA-A68DBE742520}"/>
+              </a:ext>
+            </a:extLst>
+          </p:cNvPr>
+          <p:cNvSpPr txBox="1"/>
+          <p:nvPr/>
+        </p:nvSpPr>
+        <p:spPr>
+          <a:xfrm>
+            <a:off x="8780691" y="5836454"/>
+            <a:ext cx="2954655" cy="369332"/>
+          </a:xfrm>
+          <a:prstGeom prst="rect">
+            <a:avLst/>
+          </a:prstGeom>
+          <a:noFill/>
+        </p:spPr>
+        <p:txBody>
+          <a:bodyPr wrap="none" rtlCol="0">
+            <a:spAutoFit/>
+          </a:bodyPr>
+          <a:lstStyle/>
+          <a:p>
+            <a:pPr algn="l"/>
+            <a:r>
+              <a:rPr lang="zh-CN" altLang="en-US" dirty="0">
+                <a:latin typeface="微软雅黑" panose="020B0503020204020204" pitchFamily="34" charset="-122"/>
+                <a:ea typeface="微软雅黑" panose="020B0503020204020204" pitchFamily="34" charset="-122"/>
+              </a:rPr>
+              <a:t>不同类型原子有什么区别？</a:t>
+            </a:r>
+          </a:p>
+        </p:txBody>
+      </p:sp>
+      <p:sp>
+        <p:nvSpPr>
+          <p:cNvPr id="139" name="文本框 138">
+            <a:extLst>
+              <a:ext uri="{FF2B5EF4-FFF2-40B4-BE49-F238E27FC236}">
+                <a16:creationId xmlns:a16="http://schemas.microsoft.com/office/drawing/2014/main" id="{F5840EF3-C6FE-8F7F-7170-291A131CE9A0}"/>
+              </a:ext>
+            </a:extLst>
+          </p:cNvPr>
+          <p:cNvSpPr txBox="1"/>
+          <p:nvPr/>
+        </p:nvSpPr>
+        <p:spPr>
+          <a:xfrm>
+            <a:off x="4349628" y="1366787"/>
+            <a:ext cx="2723823" cy="369332"/>
+          </a:xfrm>
+          <a:prstGeom prst="rect">
+            <a:avLst/>
+          </a:prstGeom>
+          <a:noFill/>
+        </p:spPr>
+        <p:txBody>
+          <a:bodyPr wrap="none" rtlCol="0">
+            <a:spAutoFit/>
+          </a:bodyPr>
+          <a:lstStyle/>
+          <a:p>
+            <a:pPr algn="l"/>
+            <a:r>
+              <a:rPr lang="zh-CN" altLang="en-US" dirty="0">
+                <a:latin typeface="微软雅黑" panose="020B0503020204020204" pitchFamily="34" charset="-122"/>
+                <a:ea typeface="微软雅黑" panose="020B0503020204020204" pitchFamily="34" charset="-122"/>
+              </a:rPr>
+              <a:t>测量之后的原子如何处理</a:t>
+            </a:r>
+          </a:p>
+        </p:txBody>
+      </p:sp>
+      <p:sp>
+        <p:nvSpPr>
+          <p:cNvPr id="140" name="箭头: 右 139">
+            <a:extLst>
+              <a:ext uri="{FF2B5EF4-FFF2-40B4-BE49-F238E27FC236}">
+                <a16:creationId xmlns:a16="http://schemas.microsoft.com/office/drawing/2014/main" id="{11E760F0-E628-ECAE-C4C3-FA0CA3937EFD}"/>
+              </a:ext>
+            </a:extLst>
+          </p:cNvPr>
+          <p:cNvSpPr/>
+          <p:nvPr/>
+        </p:nvSpPr>
+        <p:spPr>
+          <a:xfrm rot="2522778">
+            <a:off x="3843308" y="2980976"/>
+            <a:ext cx="3229232" cy="198832"/>
+          </a:xfrm>
+          <a:prstGeom prst="rightArrow">
+            <a:avLst/>
+          </a:prstGeom>
+          <a:ln>
+            <a:solidFill>
+              <a:schemeClr val="tx1"/>
+            </a:solidFill>
+          </a:ln>
+        </p:spPr>
+        <p:txBody>
+          <a:bodyPr wrap="square" rtlCol="0" anchor="ctr">
+            <a:noAutofit/>
+          </a:bodyPr>
+          <a:lstStyle/>
+          <a:p>
+            <a:pPr algn="ctr"/>
+            <a:endParaRPr lang="zh-CN" altLang="en-US" dirty="0">
+              <a:latin typeface="微软雅黑" pitchFamily="34" charset="-122"/>
+              <a:ea typeface="微软雅黑" pitchFamily="34" charset="-122"/>
+            </a:endParaRPr>
+          </a:p>
+        </p:txBody>
+      </p:sp>
+    </p:spTree>
+    <p:extLst>
+      <p:ext uri="{BB962C8B-B14F-4D97-AF65-F5344CB8AC3E}">
+        <p14:creationId xmlns:p14="http://schemas.microsoft.com/office/powerpoint/2010/main" val="1527128315"/>
       </p:ext>
     </p:extLst>
   </p:cSld>
